--- a/DOCUMENTATION/Group_D_Presentation_FIle.pptx
+++ b/DOCUMENTATION/Group_D_Presentation_FIle.pptx
@@ -122,18 +122,15 @@
       </a:defRPr>
     </a:lvl9pPr>
   </p:defaultTextStyle>
-  <p:extLst>
-    <p:ext uri="{EFAFB233-063F-42B5-8137-9DF3F51BA10A}">
-      <p15:sldGuideLst xmlns:p15="http://schemas.microsoft.com/office/powerpoint/2012/main"/>
-    </p:ext>
-  </p:extLst>
 </p:presentation>
 </file>
 
 <file path=ppt/revisionInfo.xml><?xml version="1.0" encoding="utf-8"?>
 <p1510:revInfo xmlns:a="http://schemas.openxmlformats.org/drawingml/2006/main" xmlns:r="http://schemas.openxmlformats.org/officeDocument/2006/relationships" xmlns:p1510="http://schemas.microsoft.com/office/powerpoint/2015/10/main">
   <p1510:revLst>
-    <p1510:client id="{AAAE3E69-D86A-474B-B73E-348E6D403A39}" v="55" dt="2026-10-09T10:55:58.097"/>
+    <p1510:client id="{190A3296-01B7-C84C-9AD8-7589081828E7}" v="11" dt="2026-10-11T19:00:13.996"/>
+    <p1510:client id="{CD64B637-F206-550C-129F-CA5AC4987AF9}" v="2" dt="2026-10-13T13:18:39.794"/>
+    <p1510:client id="{E1644649-21D8-2906-45FA-AC802ED2B596}" v="16" dt="2026-10-13T15:18:35.523"/>
   </p1510:revLst>
 </p1510:revInfo>
 </file>
@@ -141,9 +138,297 @@
 <file path=ppt/changesInfos/changesInfo1.xml><?xml version="1.0" encoding="utf-8"?>
 <pc:chgInfo xmlns:a="http://schemas.openxmlformats.org/drawingml/2006/main" xmlns:r="http://schemas.openxmlformats.org/officeDocument/2006/relationships" xmlns:ac="http://schemas.microsoft.com/office/drawing/2013/main/command" xmlns:pc="http://schemas.microsoft.com/office/powerpoint/2013/main/command">
   <pc:docChgLst>
+    <pc:chgData name="Asim Mian" userId="S::b01813743@studentmail.uws.ac.uk::c23492a1-d542-4a68-a554-d9cb9df9bc02" providerId="AD" clId="Web-{E1644649-21D8-2906-45FA-AC802ED2B596}"/>
+    <pc:docChg chg="modSld">
+      <pc:chgData name="Asim Mian" userId="S::b01813743@studentmail.uws.ac.uk::c23492a1-d542-4a68-a554-d9cb9df9bc02" providerId="AD" clId="Web-{E1644649-21D8-2906-45FA-AC802ED2B596}" dt="2026-10-13T15:18:35.523" v="8" actId="1076"/>
+      <pc:docMkLst>
+        <pc:docMk/>
+      </pc:docMkLst>
+      <pc:sldChg chg="modSp">
+        <pc:chgData name="Asim Mian" userId="S::b01813743@studentmail.uws.ac.uk::c23492a1-d542-4a68-a554-d9cb9df9bc02" providerId="AD" clId="Web-{E1644649-21D8-2906-45FA-AC802ED2B596}" dt="2026-10-13T15:18:35.523" v="8" actId="1076"/>
+        <pc:sldMkLst>
+          <pc:docMk/>
+          <pc:sldMk cId="3838240909" sldId="295"/>
+        </pc:sldMkLst>
+        <pc:spChg chg="mod">
+          <ac:chgData name="Asim Mian" userId="S::b01813743@studentmail.uws.ac.uk::c23492a1-d542-4a68-a554-d9cb9df9bc02" providerId="AD" clId="Web-{E1644649-21D8-2906-45FA-AC802ED2B596}" dt="2026-10-13T15:18:35.523" v="8" actId="1076"/>
+          <ac:spMkLst>
+            <pc:docMk/>
+            <pc:sldMk cId="3838240909" sldId="295"/>
+            <ac:spMk id="8" creationId="{8A50FE24-D44F-271A-C1E6-C10061219E8B}"/>
+          </ac:spMkLst>
+        </pc:spChg>
+      </pc:sldChg>
+    </pc:docChg>
+  </pc:docChgLst>
+  <pc:docChgLst>
+    <pc:chgData name="Paul Bennett" userId="S::b01817143@studentmail.uws.ac.uk::fc0bdc68-7c01-477d-8ae5-310da9786952" providerId="AD" clId="Web-{A8F8DB1D-A187-F2EE-1536-48DE6C432EB1}"/>
+    <pc:docChg chg="modSld">
+      <pc:chgData name="Paul Bennett" userId="S::b01817143@studentmail.uws.ac.uk::fc0bdc68-7c01-477d-8ae5-310da9786952" providerId="AD" clId="Web-{A8F8DB1D-A187-F2EE-1536-48DE6C432EB1}" dt="2026-09-30T15:22:08.488" v="1299" actId="1076"/>
+      <pc:docMkLst>
+        <pc:docMk/>
+      </pc:docMkLst>
+    </pc:docChg>
+  </pc:docChgLst>
+  <pc:docChgLst>
+    <pc:chgData name="Asim Mian" userId="c23492a1-d542-4a68-a554-d9cb9df9bc02" providerId="ADAL" clId="{99719AC2-D973-4332-9A7F-57E88CEC7084}"/>
+    <pc:docChg chg="undo custSel addSld delSld modSld sldOrd">
+      <pc:chgData name="Asim Mian" userId="c23492a1-d542-4a68-a554-d9cb9df9bc02" providerId="ADAL" clId="{99719AC2-D973-4332-9A7F-57E88CEC7084}" dt="2026-10-01T17:03:32.744" v="5729" actId="1076"/>
+      <pc:docMkLst>
+        <pc:docMk/>
+      </pc:docMkLst>
+    </pc:docChg>
+  </pc:docChgLst>
+  <pc:docChgLst>
+    <pc:chgData name="Asim Mian" userId="S::b01813743@studentmail.uws.ac.uk::c23492a1-d542-4a68-a554-d9cb9df9bc02" providerId="AD" clId="Web-{49AA9A4D-C3FD-08BC-E271-23AFA7E77A43}"/>
+    <pc:docChg chg="addSld modSld">
+      <pc:chgData name="Asim Mian" userId="S::b01813743@studentmail.uws.ac.uk::c23492a1-d542-4a68-a554-d9cb9df9bc02" providerId="AD" clId="Web-{49AA9A4D-C3FD-08BC-E271-23AFA7E77A43}" dt="2026-09-29T19:19:17.227" v="561" actId="20577"/>
+      <pc:docMkLst>
+        <pc:docMk/>
+      </pc:docMkLst>
+    </pc:docChg>
+  </pc:docChgLst>
+  <pc:docChgLst>
+    <pc:chgData name="Iram Rafique" userId="S::b00858434@studentmail.uws.ac.uk::2891bba8-a473-4102-8aad-0e1efcea5071" providerId="AD" clId="Web-{CD64B637-F206-550C-129F-CA5AC4987AF9}"/>
+    <pc:docChg chg="modSld">
+      <pc:chgData name="Iram Rafique" userId="S::b00858434@studentmail.uws.ac.uk::2891bba8-a473-4102-8aad-0e1efcea5071" providerId="AD" clId="Web-{CD64B637-F206-550C-129F-CA5AC4987AF9}" dt="2026-10-13T13:18:39.794" v="1" actId="20577"/>
+      <pc:docMkLst>
+        <pc:docMk/>
+      </pc:docMkLst>
+      <pc:sldChg chg="modSp">
+        <pc:chgData name="Iram Rafique" userId="S::b00858434@studentmail.uws.ac.uk::2891bba8-a473-4102-8aad-0e1efcea5071" providerId="AD" clId="Web-{CD64B637-F206-550C-129F-CA5AC4987AF9}" dt="2026-10-13T13:18:39.794" v="1" actId="20577"/>
+        <pc:sldMkLst>
+          <pc:docMk/>
+          <pc:sldMk cId="190967963" sldId="290"/>
+        </pc:sldMkLst>
+        <pc:spChg chg="mod">
+          <ac:chgData name="Iram Rafique" userId="S::b00858434@studentmail.uws.ac.uk::2891bba8-a473-4102-8aad-0e1efcea5071" providerId="AD" clId="Web-{CD64B637-F206-550C-129F-CA5AC4987AF9}" dt="2026-10-13T13:18:39.794" v="1" actId="20577"/>
+          <ac:spMkLst>
+            <pc:docMk/>
+            <pc:sldMk cId="190967963" sldId="290"/>
+            <ac:spMk id="12" creationId="{A3B0E664-0F5F-7B5A-BEDC-A65AACBC822B}"/>
+          </ac:spMkLst>
+        </pc:spChg>
+      </pc:sldChg>
+    </pc:docChg>
+  </pc:docChgLst>
+  <pc:docChgLst>
+    <pc:chgData name="Iram Rafique" userId="S::b00858434@studentmail.uws.ac.uk::2891bba8-a473-4102-8aad-0e1efcea5071" providerId="AD" clId="Web-{0C7A1CD3-E3BB-91A9-F8CB-0989D83959C6}"/>
+    <pc:docChg chg="modSld">
+      <pc:chgData name="Iram Rafique" userId="S::b00858434@studentmail.uws.ac.uk::2891bba8-a473-4102-8aad-0e1efcea5071" providerId="AD" clId="Web-{0C7A1CD3-E3BB-91A9-F8CB-0989D83959C6}" dt="2026-10-02T18:45:23.226" v="6" actId="20577"/>
+      <pc:docMkLst>
+        <pc:docMk/>
+      </pc:docMkLst>
+    </pc:docChg>
+  </pc:docChgLst>
+  <pc:docChgLst>
+    <pc:chgData name="Iram Rafique" userId="S::b00858434@studentmail.uws.ac.uk::2891bba8-a473-4102-8aad-0e1efcea5071" providerId="AD" clId="Web-{F802ADC8-5689-9D67-0508-598A768727C8}"/>
+    <pc:docChg chg="addSld delSld modSld sldOrd">
+      <pc:chgData name="Iram Rafique" userId="S::b00858434@studentmail.uws.ac.uk::2891bba8-a473-4102-8aad-0e1efcea5071" providerId="AD" clId="Web-{F802ADC8-5689-9D67-0508-598A768727C8}" dt="2026-09-30T13:49:43.416" v="294"/>
+      <pc:docMkLst>
+        <pc:docMk/>
+      </pc:docMkLst>
+    </pc:docChg>
+  </pc:docChgLst>
+  <pc:docChgLst>
     <pc:chgData name="Iram Rafique" userId="S::b00858434@studentmail.uws.ac.uk::2891bba8-a473-4102-8aad-0e1efcea5071" providerId="AD" clId="Web-{FA09C513-A40D-C8A9-E8EF-F59CC9A47B7C}"/>
     <pc:docChg chg="addSld delSld modSld">
       <pc:chgData name="Iram Rafique" userId="S::b00858434@studentmail.uws.ac.uk::2891bba8-a473-4102-8aad-0e1efcea5071" providerId="AD" clId="Web-{FA09C513-A40D-C8A9-E8EF-F59CC9A47B7C}" dt="2026-10-02T15:20:40.548" v="166" actId="1076"/>
+      <pc:docMkLst>
+        <pc:docMk/>
+      </pc:docMkLst>
+    </pc:docChg>
+  </pc:docChgLst>
+  <pc:docChgLst>
+    <pc:chgData name="Aaron Hamilton" userId="18204c3e-02c8-4c76-b06e-0d252f35102f" providerId="ADAL" clId="{56C94A2A-6EA3-5B70-8EF3-378E9C7B2007}"/>
+    <pc:docChg chg="custSel addSld modSld sldOrd">
+      <pc:chgData name="Aaron Hamilton" userId="18204c3e-02c8-4c76-b06e-0d252f35102f" providerId="ADAL" clId="{56C94A2A-6EA3-5B70-8EF3-378E9C7B2007}" dt="2026-10-07T12:31:00.450" v="1195" actId="1076"/>
+      <pc:docMkLst>
+        <pc:docMk/>
+      </pc:docMkLst>
+      <pc:sldChg chg="modSp mod">
+        <pc:chgData name="Aaron Hamilton" userId="18204c3e-02c8-4c76-b06e-0d252f35102f" providerId="ADAL" clId="{56C94A2A-6EA3-5B70-8EF3-378E9C7B2007}" dt="2026-10-04T16:22:08.022" v="18" actId="313"/>
+        <pc:sldMkLst>
+          <pc:docMk/>
+          <pc:sldMk cId="463772295" sldId="285"/>
+        </pc:sldMkLst>
+        <pc:spChg chg="mod">
+          <ac:chgData name="Aaron Hamilton" userId="18204c3e-02c8-4c76-b06e-0d252f35102f" providerId="ADAL" clId="{56C94A2A-6EA3-5B70-8EF3-378E9C7B2007}" dt="2026-10-04T16:22:08.022" v="18" actId="313"/>
+          <ac:spMkLst>
+            <pc:docMk/>
+            <pc:sldMk cId="463772295" sldId="285"/>
+            <ac:spMk id="8" creationId="{A15AE641-5C6E-5366-2CFB-62828EA19D86}"/>
+          </ac:spMkLst>
+        </pc:spChg>
+      </pc:sldChg>
+      <pc:sldChg chg="addSp delSp modSp add mod ord">
+        <pc:chgData name="Aaron Hamilton" userId="18204c3e-02c8-4c76-b06e-0d252f35102f" providerId="ADAL" clId="{56C94A2A-6EA3-5B70-8EF3-378E9C7B2007}" dt="2026-10-04T16:24:15.970" v="269" actId="478"/>
+        <pc:sldMkLst>
+          <pc:docMk/>
+          <pc:sldMk cId="2347342010" sldId="289"/>
+        </pc:sldMkLst>
+        <pc:spChg chg="mod">
+          <ac:chgData name="Aaron Hamilton" userId="18204c3e-02c8-4c76-b06e-0d252f35102f" providerId="ADAL" clId="{56C94A2A-6EA3-5B70-8EF3-378E9C7B2007}" dt="2026-10-04T16:23:48.737" v="263" actId="20577"/>
+          <ac:spMkLst>
+            <pc:docMk/>
+            <pc:sldMk cId="2347342010" sldId="289"/>
+            <ac:spMk id="8" creationId="{C227C96F-FD69-EFB3-7EE8-62122179F056}"/>
+          </ac:spMkLst>
+        </pc:spChg>
+        <pc:spChg chg="mod">
+          <ac:chgData name="Aaron Hamilton" userId="18204c3e-02c8-4c76-b06e-0d252f35102f" providerId="ADAL" clId="{56C94A2A-6EA3-5B70-8EF3-378E9C7B2007}" dt="2026-10-04T16:20:54.090" v="13" actId="20577"/>
+          <ac:spMkLst>
+            <pc:docMk/>
+            <pc:sldMk cId="2347342010" sldId="289"/>
+            <ac:spMk id="9" creationId="{9F6DD530-A127-64C5-66EA-A259DAB7222D}"/>
+          </ac:spMkLst>
+        </pc:spChg>
+      </pc:sldChg>
+      <pc:sldChg chg="addSp delSp modSp add mod ord">
+        <pc:chgData name="Aaron Hamilton" userId="18204c3e-02c8-4c76-b06e-0d252f35102f" providerId="ADAL" clId="{56C94A2A-6EA3-5B70-8EF3-378E9C7B2007}" dt="2026-10-06T09:47:59.343" v="1048" actId="478"/>
+        <pc:sldMkLst>
+          <pc:docMk/>
+          <pc:sldMk cId="190967963" sldId="290"/>
+        </pc:sldMkLst>
+        <pc:spChg chg="add mod">
+          <ac:chgData name="Aaron Hamilton" userId="18204c3e-02c8-4c76-b06e-0d252f35102f" providerId="ADAL" clId="{56C94A2A-6EA3-5B70-8EF3-378E9C7B2007}" dt="2026-10-06T09:45:52.182" v="791" actId="313"/>
+          <ac:spMkLst>
+            <pc:docMk/>
+            <pc:sldMk cId="190967963" sldId="290"/>
+            <ac:spMk id="7" creationId="{6D4DBD5C-726C-2E86-3FBD-15E0D9C2B1AE}"/>
+          </ac:spMkLst>
+        </pc:spChg>
+        <pc:spChg chg="mod">
+          <ac:chgData name="Aaron Hamilton" userId="18204c3e-02c8-4c76-b06e-0d252f35102f" providerId="ADAL" clId="{56C94A2A-6EA3-5B70-8EF3-378E9C7B2007}" dt="2026-10-06T09:42:49.490" v="492" actId="20577"/>
+          <ac:spMkLst>
+            <pc:docMk/>
+            <pc:sldMk cId="190967963" sldId="290"/>
+            <ac:spMk id="8" creationId="{246AB51D-F291-3EDE-C9F0-FC236DCC7F8C}"/>
+          </ac:spMkLst>
+        </pc:spChg>
+        <pc:spChg chg="mod">
+          <ac:chgData name="Aaron Hamilton" userId="18204c3e-02c8-4c76-b06e-0d252f35102f" providerId="ADAL" clId="{56C94A2A-6EA3-5B70-8EF3-378E9C7B2007}" dt="2026-10-06T09:41:31.922" v="322" actId="20577"/>
+          <ac:spMkLst>
+            <pc:docMk/>
+            <pc:sldMk cId="190967963" sldId="290"/>
+            <ac:spMk id="9" creationId="{01A556BA-DEAA-7112-F371-AB1D5B79EC98}"/>
+          </ac:spMkLst>
+        </pc:spChg>
+        <pc:spChg chg="add mod">
+          <ac:chgData name="Aaron Hamilton" userId="18204c3e-02c8-4c76-b06e-0d252f35102f" providerId="ADAL" clId="{56C94A2A-6EA3-5B70-8EF3-378E9C7B2007}" dt="2026-10-06T09:47:52.635" v="1047" actId="313"/>
+          <ac:spMkLst>
+            <pc:docMk/>
+            <pc:sldMk cId="190967963" sldId="290"/>
+            <ac:spMk id="12" creationId="{A3B0E664-0F5F-7B5A-BEDC-A65AACBC822B}"/>
+          </ac:spMkLst>
+        </pc:spChg>
+      </pc:sldChg>
+      <pc:sldChg chg="addSp delSp modSp add mod">
+        <pc:chgData name="Aaron Hamilton" userId="18204c3e-02c8-4c76-b06e-0d252f35102f" providerId="ADAL" clId="{56C94A2A-6EA3-5B70-8EF3-378E9C7B2007}" dt="2026-10-06T10:28:54.683" v="1178" actId="20577"/>
+        <pc:sldMkLst>
+          <pc:docMk/>
+          <pc:sldMk cId="2706933580" sldId="291"/>
+        </pc:sldMkLst>
+        <pc:spChg chg="mod">
+          <ac:chgData name="Aaron Hamilton" userId="18204c3e-02c8-4c76-b06e-0d252f35102f" providerId="ADAL" clId="{56C94A2A-6EA3-5B70-8EF3-378E9C7B2007}" dt="2026-10-06T10:28:54.683" v="1178" actId="20577"/>
+          <ac:spMkLst>
+            <pc:docMk/>
+            <pc:sldMk cId="2706933580" sldId="291"/>
+            <ac:spMk id="8" creationId="{B1284C07-41A0-75EE-D270-8682EE1B785D}"/>
+          </ac:spMkLst>
+        </pc:spChg>
+        <pc:spChg chg="mod">
+          <ac:chgData name="Aaron Hamilton" userId="18204c3e-02c8-4c76-b06e-0d252f35102f" providerId="ADAL" clId="{56C94A2A-6EA3-5B70-8EF3-378E9C7B2007}" dt="2026-10-06T10:24:57.521" v="1078" actId="313"/>
+          <ac:spMkLst>
+            <pc:docMk/>
+            <pc:sldMk cId="2706933580" sldId="291"/>
+            <ac:spMk id="9" creationId="{B4351A18-0480-CA87-F3F0-0A7577986577}"/>
+          </ac:spMkLst>
+        </pc:spChg>
+        <pc:picChg chg="add mod">
+          <ac:chgData name="Aaron Hamilton" userId="18204c3e-02c8-4c76-b06e-0d252f35102f" providerId="ADAL" clId="{56C94A2A-6EA3-5B70-8EF3-378E9C7B2007}" dt="2026-10-06T10:28:09.840" v="1087" actId="1076"/>
+          <ac:picMkLst>
+            <pc:docMk/>
+            <pc:sldMk cId="2706933580" sldId="291"/>
+            <ac:picMk id="10" creationId="{F31DA15B-C619-5A7C-90DE-11AB467EA2CF}"/>
+          </ac:picMkLst>
+        </pc:picChg>
+      </pc:sldChg>
+      <pc:sldChg chg="modSp add mod ord">
+        <pc:chgData name="Aaron Hamilton" userId="18204c3e-02c8-4c76-b06e-0d252f35102f" providerId="ADAL" clId="{56C94A2A-6EA3-5B70-8EF3-378E9C7B2007}" dt="2026-10-07T12:31:00.450" v="1195" actId="1076"/>
+        <pc:sldMkLst>
+          <pc:docMk/>
+          <pc:sldMk cId="2319327202" sldId="292"/>
+        </pc:sldMkLst>
+        <pc:spChg chg="mod">
+          <ac:chgData name="Aaron Hamilton" userId="18204c3e-02c8-4c76-b06e-0d252f35102f" providerId="ADAL" clId="{56C94A2A-6EA3-5B70-8EF3-378E9C7B2007}" dt="2026-10-07T12:31:00.450" v="1195" actId="1076"/>
+          <ac:spMkLst>
+            <pc:docMk/>
+            <pc:sldMk cId="2319327202" sldId="292"/>
+            <ac:spMk id="9" creationId="{F1C790DE-DE9C-E2B4-5F90-8AD84DE9F94C}"/>
+          </ac:spMkLst>
+        </pc:spChg>
+      </pc:sldChg>
+    </pc:docChg>
+  </pc:docChgLst>
+  <pc:docChgLst>
+    <pc:chgData name="Iram Rafique" userId="S::b00858434@studentmail.uws.ac.uk::2891bba8-a473-4102-8aad-0e1efcea5071" providerId="AD" clId="Web-{00000000-0000-0000-0000-000000000000}"/>
+    <pc:docChg chg="modSld">
+      <pc:chgData name="Iram Rafique" userId="S::b00858434@studentmail.uws.ac.uk::2891bba8-a473-4102-8aad-0e1efcea5071" providerId="AD" clId="Web-{00000000-0000-0000-0000-000000000000}" dt="2026-09-30T09:21:51.484" v="132"/>
+      <pc:docMkLst>
+        <pc:docMk/>
+      </pc:docMkLst>
+    </pc:docChg>
+  </pc:docChgLst>
+  <pc:docChgLst>
+    <pc:chgData name="Iram Rafique" userId="S::b00858434@studentmail.uws.ac.uk::2891bba8-a473-4102-8aad-0e1efcea5071" providerId="AD" clId="Web-{045C668F-717B-6133-146C-D5EB657C2C03}"/>
+    <pc:docChg chg="addSld modSld sldOrd">
+      <pc:chgData name="Iram Rafique" userId="S::b00858434@studentmail.uws.ac.uk::2891bba8-a473-4102-8aad-0e1efcea5071" providerId="AD" clId="Web-{045C668F-717B-6133-146C-D5EB657C2C03}" dt="2026-09-30T09:03:03.514" v="18" actId="1076"/>
+      <pc:docMkLst>
+        <pc:docMk/>
+      </pc:docMkLst>
+    </pc:docChg>
+  </pc:docChgLst>
+  <pc:docChgLst>
+    <pc:chgData name="Iram Rafique" userId="S::b00858434@studentmail.uws.ac.uk::2891bba8-a473-4102-8aad-0e1efcea5071" providerId="AD" clId="Web-{01C4B754-031C-4C4E-086A-30C6E27CFA5C}"/>
+    <pc:docChg chg="addSld delSld modSld">
+      <pc:chgData name="Iram Rafique" userId="S::b00858434@studentmail.uws.ac.uk::2891bba8-a473-4102-8aad-0e1efcea5071" providerId="AD" clId="Web-{01C4B754-031C-4C4E-086A-30C6E27CFA5C}" dt="2026-09-30T18:58:20.520" v="291" actId="1076"/>
+      <pc:docMkLst>
+        <pc:docMk/>
+      </pc:docMkLst>
+    </pc:docChg>
+  </pc:docChgLst>
+  <pc:docChgLst>
+    <pc:chgData name="Asim Mian" userId="S::b01813743@studentmail.uws.ac.uk::c23492a1-d542-4a68-a554-d9cb9df9bc02" providerId="AD" clId="Web-{14D4C68E-A5A7-CB0E-AE4B-D499018E1E32}"/>
+    <pc:docChg chg="addSld modSld">
+      <pc:chgData name="Asim Mian" userId="S::b01813743@studentmail.uws.ac.uk::c23492a1-d542-4a68-a554-d9cb9df9bc02" providerId="AD" clId="Web-{14D4C68E-A5A7-CB0E-AE4B-D499018E1E32}" dt="2026-09-29T20:57:08.237" v="245" actId="20577"/>
+      <pc:docMkLst>
+        <pc:docMk/>
+      </pc:docMkLst>
+    </pc:docChg>
+  </pc:docChgLst>
+  <pc:docChgLst>
+    <pc:chgData name="Iram Rafique" userId="S::b00858434@studentmail.uws.ac.uk::2891bba8-a473-4102-8aad-0e1efcea5071" providerId="AD" clId="Web-{68BAF1F3-0738-4058-8847-42ED16C80F77}"/>
+    <pc:docChg chg="addSld delSld modSld sldOrd">
+      <pc:chgData name="Iram Rafique" userId="S::b00858434@studentmail.uws.ac.uk::2891bba8-a473-4102-8aad-0e1efcea5071" providerId="AD" clId="Web-{68BAF1F3-0738-4058-8847-42ED16C80F77}" dt="2026-09-30T12:03:51.952" v="457" actId="20577"/>
+      <pc:docMkLst>
+        <pc:docMk/>
+      </pc:docMkLst>
+    </pc:docChg>
+  </pc:docChgLst>
+  <pc:docChgLst>
+    <pc:chgData name="Iram Rafique" userId="S::b00858434@studentmail.uws.ac.uk::2891bba8-a473-4102-8aad-0e1efcea5071" providerId="AD" clId="Web-{ED450A75-D772-052B-84D3-26575907E0B5}"/>
+    <pc:docChg chg="delSld modSld">
+      <pc:chgData name="Iram Rafique" userId="S::b00858434@studentmail.uws.ac.uk::2891bba8-a473-4102-8aad-0e1efcea5071" providerId="AD" clId="Web-{ED450A75-D772-052B-84D3-26575907E0B5}" dt="2026-09-30T09:30:27.790" v="3" actId="1076"/>
+      <pc:docMkLst>
+        <pc:docMk/>
+      </pc:docMkLst>
+    </pc:docChg>
+  </pc:docChgLst>
+  <pc:docChgLst>
+    <pc:chgData name="Asim Mian" userId="S::b01813743@studentmail.uws.ac.uk::c23492a1-d542-4a68-a554-d9cb9df9bc02" providerId="AD" clId="Web-{00000000-0000-0000-0000-000000000000}"/>
+    <pc:docChg chg="addSld modSld">
+      <pc:chgData name="Asim Mian" userId="S::b01813743@studentmail.uws.ac.uk::c23492a1-d542-4a68-a554-d9cb9df9bc02" providerId="AD" clId="Web-{00000000-0000-0000-0000-000000000000}" dt="2026-09-30T09:54:57.175" v="13" actId="20577"/>
       <pc:docMkLst>
         <pc:docMk/>
       </pc:docMkLst>
@@ -159,108 +444,14 @@
     </pc:docChg>
   </pc:docChgLst>
   <pc:docChgLst>
-    <pc:chgData name="Iram Rafique" userId="S::b00858434@studentmail.uws.ac.uk::2891bba8-a473-4102-8aad-0e1efcea5071" providerId="AD" clId="Web-{01C4B754-031C-4C4E-086A-30C6E27CFA5C}"/>
-    <pc:docChg chg="addSld delSld modSld">
-      <pc:chgData name="Iram Rafique" userId="S::b00858434@studentmail.uws.ac.uk::2891bba8-a473-4102-8aad-0e1efcea5071" providerId="AD" clId="Web-{01C4B754-031C-4C4E-086A-30C6E27CFA5C}" dt="2026-09-30T18:58:20.520" v="291" actId="1076"/>
+    <pc:chgData name="Aaron Hamilton" userId="18204c3e-02c8-4c76-b06e-0d252f35102f" providerId="ADAL" clId="{86A63069-2CCC-5A02-9D86-AB1A41F75532}"/>
+    <pc:docChg chg="undo custSel addSld delSld modSld sldOrd">
+      <pc:chgData name="Aaron Hamilton" userId="18204c3e-02c8-4c76-b06e-0d252f35102f" providerId="ADAL" clId="{86A63069-2CCC-5A02-9D86-AB1A41F75532}" dt="2026-10-11T19:00:16.033" v="20592" actId="20577"/>
       <pc:docMkLst>
         <pc:docMk/>
       </pc:docMkLst>
-    </pc:docChg>
-  </pc:docChgLst>
-  <pc:docChgLst>
-    <pc:chgData name="Iram Rafique" userId="S::b00858434@studentmail.uws.ac.uk::2891bba8-a473-4102-8aad-0e1efcea5071" providerId="AD" clId="Web-{045C668F-717B-6133-146C-D5EB657C2C03}"/>
-    <pc:docChg chg="addSld modSld sldOrd">
-      <pc:chgData name="Iram Rafique" userId="S::b00858434@studentmail.uws.ac.uk::2891bba8-a473-4102-8aad-0e1efcea5071" providerId="AD" clId="Web-{045C668F-717B-6133-146C-D5EB657C2C03}" dt="2026-09-30T09:03:03.514" v="18" actId="1076"/>
-      <pc:docMkLst>
-        <pc:docMk/>
-      </pc:docMkLst>
-    </pc:docChg>
-  </pc:docChgLst>
-  <pc:docChgLst>
-    <pc:chgData name="Asim Mian" userId="c23492a1-d542-4a68-a554-d9cb9df9bc02" providerId="ADAL" clId="{99719AC2-D973-4332-9A7F-57E88CEC7084}"/>
-    <pc:docChg chg="undo custSel addSld delSld modSld sldOrd">
-      <pc:chgData name="Asim Mian" userId="c23492a1-d542-4a68-a554-d9cb9df9bc02" providerId="ADAL" clId="{99719AC2-D973-4332-9A7F-57E88CEC7084}" dt="2026-10-01T17:03:32.744" v="5729" actId="1076"/>
-      <pc:docMkLst>
-        <pc:docMk/>
-      </pc:docMkLst>
-    </pc:docChg>
-  </pc:docChgLst>
-  <pc:docChgLst>
-    <pc:chgData name="Iram Rafique" userId="S::b00858434@studentmail.uws.ac.uk::2891bba8-a473-4102-8aad-0e1efcea5071" providerId="AD" clId="Web-{68BAF1F3-0738-4058-8847-42ED16C80F77}"/>
-    <pc:docChg chg="addSld delSld modSld sldOrd">
-      <pc:chgData name="Iram Rafique" userId="S::b00858434@studentmail.uws.ac.uk::2891bba8-a473-4102-8aad-0e1efcea5071" providerId="AD" clId="Web-{68BAF1F3-0738-4058-8847-42ED16C80F77}" dt="2026-09-30T12:03:51.952" v="457" actId="20577"/>
-      <pc:docMkLst>
-        <pc:docMk/>
-      </pc:docMkLst>
-    </pc:docChg>
-  </pc:docChgLst>
-  <pc:docChgLst>
-    <pc:chgData name="Iram Rafique" userId="S::b00858434@studentmail.uws.ac.uk::2891bba8-a473-4102-8aad-0e1efcea5071" providerId="AD" clId="Web-{F802ADC8-5689-9D67-0508-598A768727C8}"/>
-    <pc:docChg chg="addSld delSld modSld sldOrd">
-      <pc:chgData name="Iram Rafique" userId="S::b00858434@studentmail.uws.ac.uk::2891bba8-a473-4102-8aad-0e1efcea5071" providerId="AD" clId="Web-{F802ADC8-5689-9D67-0508-598A768727C8}" dt="2026-09-30T13:49:43.416" v="294"/>
-      <pc:docMkLst>
-        <pc:docMk/>
-      </pc:docMkLst>
-    </pc:docChg>
-  </pc:docChgLst>
-  <pc:docChgLst>
-    <pc:chgData name="Aaron Hamilton" userId="18204c3e-02c8-4c76-b06e-0d252f35102f" providerId="ADAL" clId="{86A63069-2CCC-5A02-9D86-AB1A41F75532}"/>
-    <pc:docChg chg="undo custSel addSld delSld modSld sldOrd">
-      <pc:chgData name="Aaron Hamilton" userId="18204c3e-02c8-4c76-b06e-0d252f35102f" providerId="ADAL" clId="{86A63069-2CCC-5A02-9D86-AB1A41F75532}" dt="2026-10-09T10:55:58.097" v="6392" actId="171"/>
-      <pc:docMkLst>
-        <pc:docMk/>
-      </pc:docMkLst>
-      <pc:sldChg chg="del setBg">
-        <pc:chgData name="Aaron Hamilton" userId="18204c3e-02c8-4c76-b06e-0d252f35102f" providerId="ADAL" clId="{86A63069-2CCC-5A02-9D86-AB1A41F75532}" dt="2026-10-09T10:17:15.407" v="6389" actId="2696"/>
-        <pc:sldMkLst>
-          <pc:docMk/>
-          <pc:sldMk cId="1036226476" sldId="264"/>
-        </pc:sldMkLst>
-      </pc:sldChg>
-      <pc:sldChg chg="del setBg">
-        <pc:chgData name="Aaron Hamilton" userId="18204c3e-02c8-4c76-b06e-0d252f35102f" providerId="ADAL" clId="{86A63069-2CCC-5A02-9D86-AB1A41F75532}" dt="2026-10-09T10:01:06.710" v="5912" actId="2696"/>
-        <pc:sldMkLst>
-          <pc:docMk/>
-          <pc:sldMk cId="3598576440" sldId="276"/>
-        </pc:sldMkLst>
-      </pc:sldChg>
-      <pc:sldChg chg="del setBg">
-        <pc:chgData name="Aaron Hamilton" userId="18204c3e-02c8-4c76-b06e-0d252f35102f" providerId="ADAL" clId="{86A63069-2CCC-5A02-9D86-AB1A41F75532}" dt="2026-10-09T10:01:06.710" v="5912" actId="2696"/>
-        <pc:sldMkLst>
-          <pc:docMk/>
-          <pc:sldMk cId="4234582200" sldId="277"/>
-        </pc:sldMkLst>
-      </pc:sldChg>
-      <pc:sldChg chg="del setBg">
-        <pc:chgData name="Aaron Hamilton" userId="18204c3e-02c8-4c76-b06e-0d252f35102f" providerId="ADAL" clId="{86A63069-2CCC-5A02-9D86-AB1A41F75532}" dt="2026-10-09T08:53:36.283" v="4666" actId="2696"/>
-        <pc:sldMkLst>
-          <pc:docMk/>
-          <pc:sldMk cId="2381802583" sldId="278"/>
-        </pc:sldMkLst>
-      </pc:sldChg>
-      <pc:sldChg chg="del setBg">
-        <pc:chgData name="Aaron Hamilton" userId="18204c3e-02c8-4c76-b06e-0d252f35102f" providerId="ADAL" clId="{86A63069-2CCC-5A02-9D86-AB1A41F75532}" dt="2026-10-09T08:58:13.761" v="4735" actId="2696"/>
-        <pc:sldMkLst>
-          <pc:docMk/>
-          <pc:sldMk cId="259701994" sldId="279"/>
-        </pc:sldMkLst>
-      </pc:sldChg>
-      <pc:sldChg chg="del setBg">
-        <pc:chgData name="Aaron Hamilton" userId="18204c3e-02c8-4c76-b06e-0d252f35102f" providerId="ADAL" clId="{86A63069-2CCC-5A02-9D86-AB1A41F75532}" dt="2026-10-09T08:58:13.761" v="4735" actId="2696"/>
-        <pc:sldMkLst>
-          <pc:docMk/>
-          <pc:sldMk cId="3324777049" sldId="280"/>
-        </pc:sldMkLst>
-      </pc:sldChg>
-      <pc:sldChg chg="del setBg">
-        <pc:chgData name="Aaron Hamilton" userId="18204c3e-02c8-4c76-b06e-0d252f35102f" providerId="ADAL" clId="{86A63069-2CCC-5A02-9D86-AB1A41F75532}" dt="2026-10-09T08:58:13.761" v="4735" actId="2696"/>
-        <pc:sldMkLst>
-          <pc:docMk/>
-          <pc:sldMk cId="3234631312" sldId="281"/>
-        </pc:sldMkLst>
-      </pc:sldChg>
-      <pc:sldChg chg="addSp delSp modSp add mod modTransition">
-        <pc:chgData name="Aaron Hamilton" userId="18204c3e-02c8-4c76-b06e-0d252f35102f" providerId="ADAL" clId="{86A63069-2CCC-5A02-9D86-AB1A41F75532}" dt="2026-10-03T23:00:35.006" v="1874"/>
+      <pc:sldChg chg="addSp delSp modSp add mod modTransition modNotesTx">
+        <pc:chgData name="Aaron Hamilton" userId="18204c3e-02c8-4c76-b06e-0d252f35102f" providerId="ADAL" clId="{86A63069-2CCC-5A02-9D86-AB1A41F75532}" dt="2026-10-10T09:07:18.046" v="8708" actId="20577"/>
         <pc:sldMkLst>
           <pc:docMk/>
           <pc:sldMk cId="3667455686" sldId="284"/>
@@ -290,8 +481,8 @@
           </ac:spMkLst>
         </pc:spChg>
       </pc:sldChg>
-      <pc:sldChg chg="addSp delSp modSp add mod modTransition">
-        <pc:chgData name="Aaron Hamilton" userId="18204c3e-02c8-4c76-b06e-0d252f35102f" providerId="ADAL" clId="{86A63069-2CCC-5A02-9D86-AB1A41F75532}" dt="2026-10-07T15:34:25.962" v="3083" actId="1037"/>
+      <pc:sldChg chg="addSp delSp modSp add mod modTransition modNotesTx">
+        <pc:chgData name="Aaron Hamilton" userId="18204c3e-02c8-4c76-b06e-0d252f35102f" providerId="ADAL" clId="{86A63069-2CCC-5A02-9D86-AB1A41F75532}" dt="2026-10-10T08:54:28.755" v="8707" actId="20577"/>
         <pc:sldMkLst>
           <pc:docMk/>
           <pc:sldMk cId="463772295" sldId="285"/>
@@ -449,8 +640,8 @@
           </ac:picMkLst>
         </pc:picChg>
       </pc:sldChg>
-      <pc:sldChg chg="addSp delSp modSp add mod modTransition">
-        <pc:chgData name="Aaron Hamilton" userId="18204c3e-02c8-4c76-b06e-0d252f35102f" providerId="ADAL" clId="{86A63069-2CCC-5A02-9D86-AB1A41F75532}" dt="2026-10-07T15:35:07.672" v="3132" actId="167"/>
+      <pc:sldChg chg="addSp delSp modSp add mod modTransition modNotesTx">
+        <pc:chgData name="Aaron Hamilton" userId="18204c3e-02c8-4c76-b06e-0d252f35102f" providerId="ADAL" clId="{86A63069-2CCC-5A02-9D86-AB1A41F75532}" dt="2026-10-10T09:28:42.585" v="10193" actId="20577"/>
         <pc:sldMkLst>
           <pc:docMk/>
           <pc:sldMk cId="760331326" sldId="286"/>
@@ -536,8 +727,8 @@
           </ac:picMkLst>
         </pc:picChg>
       </pc:sldChg>
-      <pc:sldChg chg="addSp delSp modSp add mod ord modTransition">
-        <pc:chgData name="Aaron Hamilton" userId="18204c3e-02c8-4c76-b06e-0d252f35102f" providerId="ADAL" clId="{86A63069-2CCC-5A02-9D86-AB1A41F75532}" dt="2026-10-07T15:36:15.143" v="3177" actId="167"/>
+      <pc:sldChg chg="addSp delSp modSp add mod ord modTransition modNotesTx">
+        <pc:chgData name="Aaron Hamilton" userId="18204c3e-02c8-4c76-b06e-0d252f35102f" providerId="ADAL" clId="{86A63069-2CCC-5A02-9D86-AB1A41F75532}" dt="2026-10-10T10:12:09.089" v="17038" actId="20577"/>
         <pc:sldMkLst>
           <pc:docMk/>
           <pc:sldMk cId="995733660" sldId="287"/>
@@ -655,8 +846,8 @@
           </ac:picMkLst>
         </pc:picChg>
       </pc:sldChg>
-      <pc:sldChg chg="addSp delSp modSp add mod modTransition">
-        <pc:chgData name="Aaron Hamilton" userId="18204c3e-02c8-4c76-b06e-0d252f35102f" providerId="ADAL" clId="{86A63069-2CCC-5A02-9D86-AB1A41F75532}" dt="2026-10-09T10:54:41.281" v="6390"/>
+      <pc:sldChg chg="addSp delSp modSp add mod modTransition modNotesTx">
+        <pc:chgData name="Aaron Hamilton" userId="18204c3e-02c8-4c76-b06e-0d252f35102f" providerId="ADAL" clId="{86A63069-2CCC-5A02-9D86-AB1A41F75532}" dt="2026-10-11T15:40:54.544" v="19603" actId="33524"/>
         <pc:sldMkLst>
           <pc:docMk/>
           <pc:sldMk cId="179583553" sldId="288"/>
@@ -798,8 +989,8 @@
           </ac:grpSpMkLst>
         </pc:grpChg>
       </pc:sldChg>
-      <pc:sldChg chg="addSp delSp modSp mod modTransition">
-        <pc:chgData name="Aaron Hamilton" userId="18204c3e-02c8-4c76-b06e-0d252f35102f" providerId="ADAL" clId="{86A63069-2CCC-5A02-9D86-AB1A41F75532}" dt="2026-10-09T10:54:44.182" v="6391"/>
+      <pc:sldChg chg="addSp delSp modSp mod modTransition modNotesTx">
+        <pc:chgData name="Aaron Hamilton" userId="18204c3e-02c8-4c76-b06e-0d252f35102f" providerId="ADAL" clId="{86A63069-2CCC-5A02-9D86-AB1A41F75532}" dt="2026-10-10T10:14:54.196" v="18802" actId="20577"/>
         <pc:sldMkLst>
           <pc:docMk/>
           <pc:sldMk cId="2347342010" sldId="289"/>
@@ -1101,15 +1292,29 @@
           </ac:grpSpMkLst>
         </pc:grpChg>
       </pc:sldChg>
-      <pc:sldChg chg="ord">
-        <pc:chgData name="Aaron Hamilton" userId="18204c3e-02c8-4c76-b06e-0d252f35102f" providerId="ADAL" clId="{86A63069-2CCC-5A02-9D86-AB1A41F75532}" dt="2026-10-09T08:54:51.085" v="4667" actId="20578"/>
+      <pc:sldChg chg="modNotesTx">
+        <pc:chgData name="Aaron Hamilton" userId="18204c3e-02c8-4c76-b06e-0d252f35102f" providerId="ADAL" clId="{86A63069-2CCC-5A02-9D86-AB1A41F75532}" dt="2026-10-11T16:12:01.172" v="19611" actId="20577"/>
+        <pc:sldMkLst>
+          <pc:docMk/>
+          <pc:sldMk cId="190967963" sldId="290"/>
+        </pc:sldMkLst>
+      </pc:sldChg>
+      <pc:sldChg chg="modNotesTx">
+        <pc:chgData name="Aaron Hamilton" userId="18204c3e-02c8-4c76-b06e-0d252f35102f" providerId="ADAL" clId="{86A63069-2CCC-5A02-9D86-AB1A41F75532}" dt="2026-10-11T16:15:39.974" v="19623" actId="20577"/>
+        <pc:sldMkLst>
+          <pc:docMk/>
+          <pc:sldMk cId="2706933580" sldId="291"/>
+        </pc:sldMkLst>
+      </pc:sldChg>
+      <pc:sldChg chg="ord modNotesTx">
+        <pc:chgData name="Aaron Hamilton" userId="18204c3e-02c8-4c76-b06e-0d252f35102f" providerId="ADAL" clId="{86A63069-2CCC-5A02-9D86-AB1A41F75532}" dt="2026-10-11T16:14:23.774" v="19614" actId="20577"/>
         <pc:sldMkLst>
           <pc:docMk/>
           <pc:sldMk cId="2319327202" sldId="292"/>
         </pc:sldMkLst>
       </pc:sldChg>
-      <pc:sldChg chg="addSp delSp modSp add mod ord">
-        <pc:chgData name="Aaron Hamilton" userId="18204c3e-02c8-4c76-b06e-0d252f35102f" providerId="ADAL" clId="{86A63069-2CCC-5A02-9D86-AB1A41F75532}" dt="2026-10-09T10:55:58.097" v="6392" actId="171"/>
+      <pc:sldChg chg="addSp delSp modSp add mod ord modNotesTx">
+        <pc:chgData name="Aaron Hamilton" userId="18204c3e-02c8-4c76-b06e-0d252f35102f" providerId="ADAL" clId="{86A63069-2CCC-5A02-9D86-AB1A41F75532}" dt="2026-10-11T14:56:22.398" v="19597" actId="33524"/>
         <pc:sldMkLst>
           <pc:docMk/>
           <pc:sldMk cId="12988263" sldId="293"/>
@@ -1155,8 +1360,8 @@
           </ac:picMkLst>
         </pc:picChg>
       </pc:sldChg>
-      <pc:sldChg chg="addSp delSp modSp add mod setBg">
-        <pc:chgData name="Aaron Hamilton" userId="18204c3e-02c8-4c76-b06e-0d252f35102f" providerId="ADAL" clId="{86A63069-2CCC-5A02-9D86-AB1A41F75532}" dt="2026-10-09T09:21:46.650" v="5228" actId="167"/>
+      <pc:sldChg chg="addSp delSp modSp add mod setBg modNotesTx">
+        <pc:chgData name="Aaron Hamilton" userId="18204c3e-02c8-4c76-b06e-0d252f35102f" providerId="ADAL" clId="{86A63069-2CCC-5A02-9D86-AB1A41F75532}" dt="2026-10-10T09:46:20.473" v="12220" actId="33524"/>
         <pc:sldMkLst>
           <pc:docMk/>
           <pc:sldMk cId="1369097353" sldId="294"/>
@@ -1202,20 +1407,12 @@
           </ac:picMkLst>
         </pc:picChg>
       </pc:sldChg>
-      <pc:sldChg chg="addSp delSp modSp add mod ord">
-        <pc:chgData name="Aaron Hamilton" userId="18204c3e-02c8-4c76-b06e-0d252f35102f" providerId="ADAL" clId="{86A63069-2CCC-5A02-9D86-AB1A41F75532}" dt="2026-10-09T10:03:38.619" v="6037" actId="478"/>
+      <pc:sldChg chg="addSp delSp modSp add mod ord modNotesTx">
+        <pc:chgData name="Aaron Hamilton" userId="18204c3e-02c8-4c76-b06e-0d252f35102f" providerId="ADAL" clId="{86A63069-2CCC-5A02-9D86-AB1A41F75532}" dt="2026-10-10T09:48:52.085" v="13570" actId="20577"/>
         <pc:sldMkLst>
           <pc:docMk/>
           <pc:sldMk cId="3838240909" sldId="295"/>
         </pc:sldMkLst>
-        <pc:spChg chg="add del mod">
-          <ac:chgData name="Aaron Hamilton" userId="18204c3e-02c8-4c76-b06e-0d252f35102f" providerId="ADAL" clId="{86A63069-2CCC-5A02-9D86-AB1A41F75532}" dt="2026-10-09T10:03:38.619" v="6037" actId="478"/>
-          <ac:spMkLst>
-            <pc:docMk/>
-            <pc:sldMk cId="3838240909" sldId="295"/>
-            <ac:spMk id="2" creationId="{232653F2-1D61-9309-20AB-C2B240E61E1D}"/>
-          </ac:spMkLst>
-        </pc:spChg>
         <pc:spChg chg="mod">
           <ac:chgData name="Aaron Hamilton" userId="18204c3e-02c8-4c76-b06e-0d252f35102f" providerId="ADAL" clId="{86A63069-2CCC-5A02-9D86-AB1A41F75532}" dt="2026-10-09T10:03:36.470" v="6036" actId="1076"/>
           <ac:spMkLst>
@@ -1233,20 +1430,12 @@
           </ac:spMkLst>
         </pc:spChg>
       </pc:sldChg>
-      <pc:sldChg chg="addSp delSp modSp add mod ord">
-        <pc:chgData name="Aaron Hamilton" userId="18204c3e-02c8-4c76-b06e-0d252f35102f" providerId="ADAL" clId="{86A63069-2CCC-5A02-9D86-AB1A41F75532}" dt="2026-10-09T10:12:11.539" v="6222" actId="14100"/>
+      <pc:sldChg chg="addSp delSp modSp add mod ord modNotesTx">
+        <pc:chgData name="Aaron Hamilton" userId="18204c3e-02c8-4c76-b06e-0d252f35102f" providerId="ADAL" clId="{86A63069-2CCC-5A02-9D86-AB1A41F75532}" dt="2026-10-10T09:42:46.193" v="10822" actId="20577"/>
         <pc:sldMkLst>
           <pc:docMk/>
           <pc:sldMk cId="2818975703" sldId="296"/>
         </pc:sldMkLst>
-        <pc:spChg chg="topLvl">
-          <ac:chgData name="Aaron Hamilton" userId="18204c3e-02c8-4c76-b06e-0d252f35102f" providerId="ADAL" clId="{86A63069-2CCC-5A02-9D86-AB1A41F75532}" dt="2026-10-09T08:59:32.849" v="4796" actId="165"/>
-          <ac:spMkLst>
-            <pc:docMk/>
-            <pc:sldMk cId="2818975703" sldId="296"/>
-            <ac:spMk id="5" creationId="{0B62F29D-E600-A188-87EB-EFA8BF72E4FE}"/>
-          </ac:spMkLst>
-        </pc:spChg>
         <pc:spChg chg="mod">
           <ac:chgData name="Aaron Hamilton" userId="18204c3e-02c8-4c76-b06e-0d252f35102f" providerId="ADAL" clId="{86A63069-2CCC-5A02-9D86-AB1A41F75532}" dt="2026-10-09T08:59:21.844" v="4794" actId="20577"/>
           <ac:spMkLst>
@@ -1295,36 +1484,12 @@
             <ac:grpSpMk id="2" creationId="{EC3011B7-DACD-3BBB-086C-DF5A403FBA5E}"/>
           </ac:grpSpMkLst>
         </pc:grpChg>
-        <pc:grpChg chg="add del">
-          <ac:chgData name="Aaron Hamilton" userId="18204c3e-02c8-4c76-b06e-0d252f35102f" providerId="ADAL" clId="{86A63069-2CCC-5A02-9D86-AB1A41F75532}" dt="2026-10-09T08:59:52.670" v="4798" actId="478"/>
-          <ac:grpSpMkLst>
-            <pc:docMk/>
-            <pc:sldMk cId="2818975703" sldId="296"/>
-            <ac:grpSpMk id="6" creationId="{54A39E10-BD51-1F39-61CD-9C8A2BC404D9}"/>
-          </ac:grpSpMkLst>
-        </pc:grpChg>
-        <pc:picChg chg="topLvl">
-          <ac:chgData name="Aaron Hamilton" userId="18204c3e-02c8-4c76-b06e-0d252f35102f" providerId="ADAL" clId="{86A63069-2CCC-5A02-9D86-AB1A41F75532}" dt="2026-10-09T08:59:32.849" v="4796" actId="165"/>
-          <ac:picMkLst>
-            <pc:docMk/>
-            <pc:sldMk cId="2818975703" sldId="296"/>
-            <ac:picMk id="3" creationId="{42635859-452B-9351-BC6F-0EA7A026F86B}"/>
-          </ac:picMkLst>
-        </pc:picChg>
         <pc:picChg chg="mod">
           <ac:chgData name="Aaron Hamilton" userId="18204c3e-02c8-4c76-b06e-0d252f35102f" providerId="ADAL" clId="{86A63069-2CCC-5A02-9D86-AB1A41F75532}" dt="2026-10-09T08:59:53.654" v="4799"/>
           <ac:picMkLst>
             <pc:docMk/>
             <pc:sldMk cId="2818975703" sldId="296"/>
             <ac:picMk id="7" creationId="{35F99EBE-CB3E-B044-66CB-B11E6FC8C6C8}"/>
-          </ac:picMkLst>
-        </pc:picChg>
-        <pc:picChg chg="del">
-          <ac:chgData name="Aaron Hamilton" userId="18204c3e-02c8-4c76-b06e-0d252f35102f" providerId="ADAL" clId="{86A63069-2CCC-5A02-9D86-AB1A41F75532}" dt="2026-10-09T08:59:25.948" v="4795" actId="478"/>
-          <ac:picMkLst>
-            <pc:docMk/>
-            <pc:sldMk cId="2818975703" sldId="296"/>
-            <ac:picMk id="10" creationId="{A79EA4D8-CFA8-4AF5-370A-1BC033A683BB}"/>
           </ac:picMkLst>
         </pc:picChg>
         <pc:picChg chg="add mod">
@@ -1352,8 +1517,8 @@
           </ac:picMkLst>
         </pc:picChg>
       </pc:sldChg>
-      <pc:sldChg chg="addSp delSp modSp add mod">
-        <pc:chgData name="Aaron Hamilton" userId="18204c3e-02c8-4c76-b06e-0d252f35102f" providerId="ADAL" clId="{86A63069-2CCC-5A02-9D86-AB1A41F75532}" dt="2026-10-09T10:02:44.167" v="6035" actId="1035"/>
+      <pc:sldChg chg="addSp delSp modSp add mod modNotesTx">
+        <pc:chgData name="Aaron Hamilton" userId="18204c3e-02c8-4c76-b06e-0d252f35102f" providerId="ADAL" clId="{86A63069-2CCC-5A02-9D86-AB1A41F75532}" dt="2026-10-11T18:13:55.404" v="20588" actId="20577"/>
         <pc:sldMkLst>
           <pc:docMk/>
           <pc:sldMk cId="2875095156" sldId="297"/>
@@ -1366,36 +1531,12 @@
             <ac:spMk id="7" creationId="{67E74173-8D60-406B-7DB7-002919AB0DA3}"/>
           </ac:spMkLst>
         </pc:spChg>
-        <pc:spChg chg="del">
-          <ac:chgData name="Aaron Hamilton" userId="18204c3e-02c8-4c76-b06e-0d252f35102f" providerId="ADAL" clId="{86A63069-2CCC-5A02-9D86-AB1A41F75532}" dt="2026-10-09T09:46:04.234" v="5652" actId="478"/>
-          <ac:spMkLst>
-            <pc:docMk/>
-            <pc:sldMk cId="2875095156" sldId="297"/>
-            <ac:spMk id="8" creationId="{02CD70F5-E70B-6B05-5CF0-3E908BB71EF1}"/>
-          </ac:spMkLst>
-        </pc:spChg>
         <pc:spChg chg="mod">
           <ac:chgData name="Aaron Hamilton" userId="18204c3e-02c8-4c76-b06e-0d252f35102f" providerId="ADAL" clId="{86A63069-2CCC-5A02-9D86-AB1A41F75532}" dt="2026-10-09T09:24:32.134" v="5252" actId="20577"/>
           <ac:spMkLst>
             <pc:docMk/>
             <pc:sldMk cId="2875095156" sldId="297"/>
             <ac:spMk id="9" creationId="{6DE3A7AF-4613-AEDC-2629-266D0E05C296}"/>
-          </ac:spMkLst>
-        </pc:spChg>
-        <pc:spChg chg="add del mod">
-          <ac:chgData name="Aaron Hamilton" userId="18204c3e-02c8-4c76-b06e-0d252f35102f" providerId="ADAL" clId="{86A63069-2CCC-5A02-9D86-AB1A41F75532}" dt="2026-10-09T09:25:52.552" v="5260" actId="478"/>
-          <ac:spMkLst>
-            <pc:docMk/>
-            <pc:sldMk cId="2875095156" sldId="297"/>
-            <ac:spMk id="11" creationId="{266397D9-F395-A4C9-F434-63C67E65263A}"/>
-          </ac:spMkLst>
-        </pc:spChg>
-        <pc:spChg chg="add del mod">
-          <ac:chgData name="Aaron Hamilton" userId="18204c3e-02c8-4c76-b06e-0d252f35102f" providerId="ADAL" clId="{86A63069-2CCC-5A02-9D86-AB1A41F75532}" dt="2026-10-09T09:34:45.394" v="5275" actId="478"/>
-          <ac:spMkLst>
-            <pc:docMk/>
-            <pc:sldMk cId="2875095156" sldId="297"/>
-            <ac:spMk id="12" creationId="{F28C4342-BAAC-E941-76B6-8C88DFD2244A}"/>
           </ac:spMkLst>
         </pc:spChg>
         <pc:spChg chg="add mod">
@@ -1406,22 +1547,6 @@
             <ac:spMk id="13" creationId="{C134EAE0-6BF0-9B21-A0A7-0B9F83DA6F05}"/>
           </ac:spMkLst>
         </pc:spChg>
-        <pc:spChg chg="del">
-          <ac:chgData name="Aaron Hamilton" userId="18204c3e-02c8-4c76-b06e-0d252f35102f" providerId="ADAL" clId="{86A63069-2CCC-5A02-9D86-AB1A41F75532}" dt="2026-10-09T09:26:02.731" v="5263" actId="478"/>
-          <ac:spMkLst>
-            <pc:docMk/>
-            <pc:sldMk cId="2875095156" sldId="297"/>
-            <ac:spMk id="14" creationId="{621756F9-365D-F2B2-D805-F3AB2D60611C}"/>
-          </ac:spMkLst>
-        </pc:spChg>
-        <pc:spChg chg="add del mod">
-          <ac:chgData name="Aaron Hamilton" userId="18204c3e-02c8-4c76-b06e-0d252f35102f" providerId="ADAL" clId="{86A63069-2CCC-5A02-9D86-AB1A41F75532}" dt="2026-10-09T09:34:57.604" v="5278" actId="478"/>
-          <ac:spMkLst>
-            <pc:docMk/>
-            <pc:sldMk cId="2875095156" sldId="297"/>
-            <ac:spMk id="15" creationId="{BD751770-3D38-5F4E-304F-B4ACE300F8AE}"/>
-          </ac:spMkLst>
-        </pc:spChg>
         <pc:spChg chg="add mod">
           <ac:chgData name="Aaron Hamilton" userId="18204c3e-02c8-4c76-b06e-0d252f35102f" providerId="ADAL" clId="{86A63069-2CCC-5A02-9D86-AB1A41F75532}" dt="2026-10-09T09:50:20.842" v="5728" actId="1076"/>
           <ac:spMkLst>
@@ -1430,68 +1555,12 @@
             <ac:spMk id="16" creationId="{23631EAF-00B8-F985-370F-DCE1DA83E32A}"/>
           </ac:spMkLst>
         </pc:spChg>
-        <pc:spChg chg="add del mod">
-          <ac:chgData name="Aaron Hamilton" userId="18204c3e-02c8-4c76-b06e-0d252f35102f" providerId="ADAL" clId="{86A63069-2CCC-5A02-9D86-AB1A41F75532}" dt="2026-10-09T09:26:03.824" v="5264" actId="478"/>
-          <ac:spMkLst>
-            <pc:docMk/>
-            <pc:sldMk cId="2875095156" sldId="297"/>
-            <ac:spMk id="17" creationId="{24781AB7-1946-607A-C687-DE66CAF1F1E4}"/>
-          </ac:spMkLst>
-        </pc:spChg>
-        <pc:spChg chg="add del mod">
-          <ac:chgData name="Aaron Hamilton" userId="18204c3e-02c8-4c76-b06e-0d252f35102f" providerId="ADAL" clId="{86A63069-2CCC-5A02-9D86-AB1A41F75532}" dt="2026-10-09T09:34:55.962" v="5276" actId="478"/>
-          <ac:spMkLst>
-            <pc:docMk/>
-            <pc:sldMk cId="2875095156" sldId="297"/>
-            <ac:spMk id="18" creationId="{EB1A3618-9EFC-73E9-3C38-BA8E6767E626}"/>
-          </ac:spMkLst>
-        </pc:spChg>
         <pc:spChg chg="mod">
           <ac:chgData name="Aaron Hamilton" userId="18204c3e-02c8-4c76-b06e-0d252f35102f" providerId="ADAL" clId="{86A63069-2CCC-5A02-9D86-AB1A41F75532}" dt="2026-10-09T09:50:20.842" v="5728" actId="1076"/>
           <ac:spMkLst>
             <pc:docMk/>
             <pc:sldMk cId="2875095156" sldId="297"/>
             <ac:spMk id="19" creationId="{4D8B80F8-499E-5FF0-CABE-16F574089A41}"/>
-          </ac:spMkLst>
-        </pc:spChg>
-        <pc:spChg chg="add del mod">
-          <ac:chgData name="Aaron Hamilton" userId="18204c3e-02c8-4c76-b06e-0d252f35102f" providerId="ADAL" clId="{86A63069-2CCC-5A02-9D86-AB1A41F75532}" dt="2026-10-09T09:26:04.942" v="5265" actId="478"/>
-          <ac:spMkLst>
-            <pc:docMk/>
-            <pc:sldMk cId="2875095156" sldId="297"/>
-            <ac:spMk id="20" creationId="{73701360-1E80-A3B3-3E62-EA491328E371}"/>
-          </ac:spMkLst>
-        </pc:spChg>
-        <pc:spChg chg="del mod">
-          <ac:chgData name="Aaron Hamilton" userId="18204c3e-02c8-4c76-b06e-0d252f35102f" providerId="ADAL" clId="{86A63069-2CCC-5A02-9D86-AB1A41F75532}" dt="2026-10-09T09:34:59.068" v="5279" actId="478"/>
-          <ac:spMkLst>
-            <pc:docMk/>
-            <pc:sldMk cId="2875095156" sldId="297"/>
-            <ac:spMk id="21" creationId="{A7B688F9-5E1C-A7E1-5335-FC97A25F8FD5}"/>
-          </ac:spMkLst>
-        </pc:spChg>
-        <pc:spChg chg="del">
-          <ac:chgData name="Aaron Hamilton" userId="18204c3e-02c8-4c76-b06e-0d252f35102f" providerId="ADAL" clId="{86A63069-2CCC-5A02-9D86-AB1A41F75532}" dt="2026-10-09T09:25:45.548" v="5259" actId="478"/>
-          <ac:spMkLst>
-            <pc:docMk/>
-            <pc:sldMk cId="2875095156" sldId="297"/>
-            <ac:spMk id="22" creationId="{72577DE8-CCA7-5E4A-2FBA-E6076E1BEC3F}"/>
-          </ac:spMkLst>
-        </pc:spChg>
-        <pc:spChg chg="del">
-          <ac:chgData name="Aaron Hamilton" userId="18204c3e-02c8-4c76-b06e-0d252f35102f" providerId="ADAL" clId="{86A63069-2CCC-5A02-9D86-AB1A41F75532}" dt="2026-10-09T09:25:45.548" v="5259" actId="478"/>
-          <ac:spMkLst>
-            <pc:docMk/>
-            <pc:sldMk cId="2875095156" sldId="297"/>
-            <ac:spMk id="23" creationId="{A004E244-C071-670F-5783-6D69F9C3E13B}"/>
-          </ac:spMkLst>
-        </pc:spChg>
-        <pc:spChg chg="add del mod">
-          <ac:chgData name="Aaron Hamilton" userId="18204c3e-02c8-4c76-b06e-0d252f35102f" providerId="ADAL" clId="{86A63069-2CCC-5A02-9D86-AB1A41F75532}" dt="2026-10-09T09:25:45.548" v="5259" actId="478"/>
-          <ac:spMkLst>
-            <pc:docMk/>
-            <pc:sldMk cId="2875095156" sldId="297"/>
-            <ac:spMk id="24" creationId="{1919DAE2-C556-55E1-4973-D7368B843D4A}"/>
           </ac:spMkLst>
         </pc:spChg>
         <pc:spChg chg="mod topLvl">
@@ -1574,30 +1643,6 @@
             <ac:spMk id="59" creationId="{95A49F06-7579-185B-B79E-FA23E6098B47}"/>
           </ac:spMkLst>
         </pc:spChg>
-        <pc:spChg chg="add del mod">
-          <ac:chgData name="Aaron Hamilton" userId="18204c3e-02c8-4c76-b06e-0d252f35102f" providerId="ADAL" clId="{86A63069-2CCC-5A02-9D86-AB1A41F75532}" dt="2026-10-09T10:02:32.736" v="5948" actId="478"/>
-          <ac:spMkLst>
-            <pc:docMk/>
-            <pc:sldMk cId="2875095156" sldId="297"/>
-            <ac:spMk id="60" creationId="{3D8907B7-F3A3-1D38-8C54-CC56989919B3}"/>
-          </ac:spMkLst>
-        </pc:spChg>
-        <pc:spChg chg="add del mod">
-          <ac:chgData name="Aaron Hamilton" userId="18204c3e-02c8-4c76-b06e-0d252f35102f" providerId="ADAL" clId="{86A63069-2CCC-5A02-9D86-AB1A41F75532}" dt="2026-10-09T10:02:32.736" v="5948" actId="478"/>
-          <ac:spMkLst>
-            <pc:docMk/>
-            <pc:sldMk cId="2875095156" sldId="297"/>
-            <ac:spMk id="61" creationId="{346088BA-3F74-3218-1B62-1D7C9DAADC46}"/>
-          </ac:spMkLst>
-        </pc:spChg>
-        <pc:spChg chg="add del mod">
-          <ac:chgData name="Aaron Hamilton" userId="18204c3e-02c8-4c76-b06e-0d252f35102f" providerId="ADAL" clId="{86A63069-2CCC-5A02-9D86-AB1A41F75532}" dt="2026-10-09T10:02:32.736" v="5948" actId="478"/>
-          <ac:spMkLst>
-            <pc:docMk/>
-            <pc:sldMk cId="2875095156" sldId="297"/>
-            <ac:spMk id="62" creationId="{255D5E1E-6050-6F24-0062-BB510373C208}"/>
-          </ac:spMkLst>
-        </pc:spChg>
         <pc:spChg chg="add mod">
           <ac:chgData name="Aaron Hamilton" userId="18204c3e-02c8-4c76-b06e-0d252f35102f" providerId="ADAL" clId="{86A63069-2CCC-5A02-9D86-AB1A41F75532}" dt="2026-10-09T10:02:44.167" v="6035" actId="1035"/>
           <ac:spMkLst>
@@ -1622,14 +1667,6 @@
             <ac:spMk id="65" creationId="{5E8BEA2A-D8BA-CB19-350E-092961068AB0}"/>
           </ac:spMkLst>
         </pc:spChg>
-        <pc:grpChg chg="add del mod">
-          <ac:chgData name="Aaron Hamilton" userId="18204c3e-02c8-4c76-b06e-0d252f35102f" providerId="ADAL" clId="{86A63069-2CCC-5A02-9D86-AB1A41F75532}" dt="2026-10-09T09:39:41.907" v="5451" actId="165"/>
-          <ac:grpSpMkLst>
-            <pc:docMk/>
-            <pc:sldMk cId="2875095156" sldId="297"/>
-            <ac:grpSpMk id="28" creationId="{945A91F1-1674-1A26-14FA-1B3EEC18C818}"/>
-          </ac:grpSpMkLst>
-        </pc:grpChg>
         <pc:grpChg chg="add mod">
           <ac:chgData name="Aaron Hamilton" userId="18204c3e-02c8-4c76-b06e-0d252f35102f" providerId="ADAL" clId="{86A63069-2CCC-5A02-9D86-AB1A41F75532}" dt="2026-10-09T09:40:24.737" v="5505" actId="1076"/>
           <ac:grpSpMkLst>
@@ -1646,20 +1683,12 @@
             <ac:grpSpMk id="57" creationId="{34AEC049-F0C5-1465-892D-3E4DA4D777FB}"/>
           </ac:grpSpMkLst>
         </pc:grpChg>
-        <pc:picChg chg="add mod">
-          <ac:chgData name="Aaron Hamilton" userId="18204c3e-02c8-4c76-b06e-0d252f35102f" providerId="ADAL" clId="{86A63069-2CCC-5A02-9D86-AB1A41F75532}" dt="2026-10-09T09:25:16.137" v="5257" actId="1076"/>
+        <pc:picChg chg="add del mod">
+          <ac:chgData name="Aaron Hamilton" userId="18204c3e-02c8-4c76-b06e-0d252f35102f" providerId="ADAL" clId="{86A63069-2CCC-5A02-9D86-AB1A41F75532}" dt="2026-10-11T16:14:00.475" v="19612" actId="478"/>
           <ac:picMkLst>
             <pc:docMk/>
             <pc:sldMk cId="2875095156" sldId="297"/>
             <ac:picMk id="2" creationId="{DC776A4D-FCB2-A1B1-37A3-55462FBBAAC0}"/>
-          </ac:picMkLst>
-        </pc:picChg>
-        <pc:picChg chg="del">
-          <ac:chgData name="Aaron Hamilton" userId="18204c3e-02c8-4c76-b06e-0d252f35102f" providerId="ADAL" clId="{86A63069-2CCC-5A02-9D86-AB1A41F75532}" dt="2026-10-09T09:24:56.867" v="5253" actId="478"/>
-          <ac:picMkLst>
-            <pc:docMk/>
-            <pc:sldMk cId="2875095156" sldId="297"/>
-            <ac:picMk id="10" creationId="{443FD2EC-D633-2653-36D7-543D16F4CD96}"/>
           </ac:picMkLst>
         </pc:picChg>
         <pc:picChg chg="add mod">
@@ -1710,14 +1739,6 @@
             <ac:cxnSpMk id="44" creationId="{086DF537-361C-911B-E5BC-9EB026C3E0C5}"/>
           </ac:cxnSpMkLst>
         </pc:cxnChg>
-        <pc:cxnChg chg="add del mod">
-          <ac:chgData name="Aaron Hamilton" userId="18204c3e-02c8-4c76-b06e-0d252f35102f" providerId="ADAL" clId="{86A63069-2CCC-5A02-9D86-AB1A41F75532}" dt="2026-10-09T09:47:18.001" v="5659" actId="478"/>
-          <ac:cxnSpMkLst>
-            <pc:docMk/>
-            <pc:sldMk cId="2875095156" sldId="297"/>
-            <ac:cxnSpMk id="45" creationId="{59EBA0DB-A3DA-76BB-B48A-D51974DC9EA0}"/>
-          </ac:cxnSpMkLst>
-        </pc:cxnChg>
         <pc:cxnChg chg="add mod">
           <ac:chgData name="Aaron Hamilton" userId="18204c3e-02c8-4c76-b06e-0d252f35102f" providerId="ADAL" clId="{86A63069-2CCC-5A02-9D86-AB1A41F75532}" dt="2026-10-09T09:47:31.868" v="5662" actId="14100"/>
           <ac:cxnSpMkLst>
@@ -1735,20 +1756,12 @@
           </ac:cxnSpMkLst>
         </pc:cxnChg>
       </pc:sldChg>
-      <pc:sldChg chg="addSp delSp modSp add mod">
-        <pc:chgData name="Aaron Hamilton" userId="18204c3e-02c8-4c76-b06e-0d252f35102f" providerId="ADAL" clId="{86A63069-2CCC-5A02-9D86-AB1A41F75532}" dt="2026-10-09T10:02:17.959" v="5947" actId="1076"/>
+      <pc:sldChg chg="addSp delSp modSp add mod modNotesTx">
+        <pc:chgData name="Aaron Hamilton" userId="18204c3e-02c8-4c76-b06e-0d252f35102f" providerId="ADAL" clId="{86A63069-2CCC-5A02-9D86-AB1A41F75532}" dt="2026-10-11T19:00:16.033" v="20592" actId="20577"/>
         <pc:sldMkLst>
           <pc:docMk/>
           <pc:sldMk cId="1695456473" sldId="298"/>
         </pc:sldMkLst>
-        <pc:spChg chg="add del mod">
-          <ac:chgData name="Aaron Hamilton" userId="18204c3e-02c8-4c76-b06e-0d252f35102f" providerId="ADAL" clId="{86A63069-2CCC-5A02-9D86-AB1A41F75532}" dt="2026-10-09T09:58:42.870" v="5798"/>
-          <ac:spMkLst>
-            <pc:docMk/>
-            <pc:sldMk cId="1695456473" sldId="298"/>
-            <ac:spMk id="8" creationId="{06E47A6E-BEB2-AF95-B096-24DEAC4D314E}"/>
-          </ac:spMkLst>
-        </pc:spChg>
         <pc:spChg chg="add mod">
           <ac:chgData name="Aaron Hamilton" userId="18204c3e-02c8-4c76-b06e-0d252f35102f" providerId="ADAL" clId="{86A63069-2CCC-5A02-9D86-AB1A41F75532}" dt="2026-10-09T10:02:13.373" v="5946" actId="1076"/>
           <ac:spMkLst>
@@ -1781,9 +1794,17 @@
             <ac:spMk id="59" creationId="{1737381B-F7B5-273C-596C-B1F0BACD37CB}"/>
           </ac:spMkLst>
         </pc:spChg>
+        <pc:picChg chg="del">
+          <ac:chgData name="Aaron Hamilton" userId="18204c3e-02c8-4c76-b06e-0d252f35102f" providerId="ADAL" clId="{86A63069-2CCC-5A02-9D86-AB1A41F75532}" dt="2026-10-11T16:14:10.479" v="19613" actId="478"/>
+          <ac:picMkLst>
+            <pc:docMk/>
+            <pc:sldMk cId="1695456473" sldId="298"/>
+            <ac:picMk id="2" creationId="{E7A0E90C-780D-25CA-B48F-D539E4B9A7FE}"/>
+          </ac:picMkLst>
+        </pc:picChg>
       </pc:sldChg>
-      <pc:sldChg chg="addSp delSp modSp add mod ord">
-        <pc:chgData name="Aaron Hamilton" userId="18204c3e-02c8-4c76-b06e-0d252f35102f" providerId="ADAL" clId="{86A63069-2CCC-5A02-9D86-AB1A41F75532}" dt="2026-10-09T10:14:11.203" v="6388" actId="1038"/>
+      <pc:sldChg chg="addSp delSp modSp add mod ord modNotesTx">
+        <pc:chgData name="Aaron Hamilton" userId="18204c3e-02c8-4c76-b06e-0d252f35102f" providerId="ADAL" clId="{86A63069-2CCC-5A02-9D86-AB1A41F75532}" dt="2026-10-11T15:47:15.064" v="19607" actId="20577"/>
         <pc:sldMkLst>
           <pc:docMk/>
           <pc:sldMk cId="2949412547" sldId="299"/>
@@ -1794,14 +1815,6 @@
             <pc:docMk/>
             <pc:sldMk cId="2949412547" sldId="299"/>
             <ac:spMk id="9" creationId="{9701407F-28C8-BB0A-C8A5-2D9B74FE5150}"/>
-          </ac:spMkLst>
-        </pc:spChg>
-        <pc:spChg chg="del">
-          <ac:chgData name="Aaron Hamilton" userId="18204c3e-02c8-4c76-b06e-0d252f35102f" providerId="ADAL" clId="{86A63069-2CCC-5A02-9D86-AB1A41F75532}" dt="2026-10-09T10:14:03.752" v="6371" actId="478"/>
-          <ac:spMkLst>
-            <pc:docMk/>
-            <pc:sldMk cId="2949412547" sldId="299"/>
-            <ac:spMk id="11" creationId="{80C1C8F0-46E6-058D-E9DB-B311FDBC8E6A}"/>
           </ac:spMkLst>
         </pc:spChg>
         <pc:spChg chg="mod">
@@ -1844,22 +1857,6 @@
             <ac:spMk id="22" creationId="{6CF993F6-574B-2A15-5366-DFF48E3A84CC}"/>
           </ac:spMkLst>
         </pc:spChg>
-        <pc:grpChg chg="del">
-          <ac:chgData name="Aaron Hamilton" userId="18204c3e-02c8-4c76-b06e-0d252f35102f" providerId="ADAL" clId="{86A63069-2CCC-5A02-9D86-AB1A41F75532}" dt="2026-10-09T10:04:46.514" v="6040" actId="478"/>
-          <ac:grpSpMkLst>
-            <pc:docMk/>
-            <pc:sldMk cId="2949412547" sldId="299"/>
-            <ac:grpSpMk id="10" creationId="{EE1ABACA-A13D-4CF7-EFF6-62D3CA55681A}"/>
-          </ac:grpSpMkLst>
-        </pc:grpChg>
-        <pc:picChg chg="del">
-          <ac:chgData name="Aaron Hamilton" userId="18204c3e-02c8-4c76-b06e-0d252f35102f" providerId="ADAL" clId="{86A63069-2CCC-5A02-9D86-AB1A41F75532}" dt="2026-10-09T10:04:49.321" v="6041" actId="478"/>
-          <ac:picMkLst>
-            <pc:docMk/>
-            <pc:sldMk cId="2949412547" sldId="299"/>
-            <ac:picMk id="8" creationId="{0E24EF8B-E7EC-5783-79FF-F46E6292A703}"/>
-          </ac:picMkLst>
-        </pc:picChg>
         <pc:picChg chg="add mod">
           <ac:chgData name="Aaron Hamilton" userId="18204c3e-02c8-4c76-b06e-0d252f35102f" providerId="ADAL" clId="{86A63069-2CCC-5A02-9D86-AB1A41F75532}" dt="2026-10-09T10:12:39.805" v="6283" actId="1036"/>
           <ac:picMkLst>
@@ -1884,201 +1881,6 @@
             <ac:picMk id="15" creationId="{536B33E3-AB20-70B5-DC28-8213B3C6FEC9}"/>
           </ac:picMkLst>
         </pc:picChg>
-      </pc:sldChg>
-    </pc:docChg>
-  </pc:docChgLst>
-  <pc:docChgLst>
-    <pc:chgData name="Asim Mian" userId="S::b01813743@studentmail.uws.ac.uk::c23492a1-d542-4a68-a554-d9cb9df9bc02" providerId="AD" clId="Web-{49AA9A4D-C3FD-08BC-E271-23AFA7E77A43}"/>
-    <pc:docChg chg="addSld modSld">
-      <pc:chgData name="Asim Mian" userId="S::b01813743@studentmail.uws.ac.uk::c23492a1-d542-4a68-a554-d9cb9df9bc02" providerId="AD" clId="Web-{49AA9A4D-C3FD-08BC-E271-23AFA7E77A43}" dt="2026-09-29T19:19:17.227" v="561" actId="20577"/>
-      <pc:docMkLst>
-        <pc:docMk/>
-      </pc:docMkLst>
-    </pc:docChg>
-  </pc:docChgLst>
-  <pc:docChgLst>
-    <pc:chgData name="Asim Mian" userId="S::b01813743@studentmail.uws.ac.uk::c23492a1-d542-4a68-a554-d9cb9df9bc02" providerId="AD" clId="Web-{14D4C68E-A5A7-CB0E-AE4B-D499018E1E32}"/>
-    <pc:docChg chg="addSld modSld">
-      <pc:chgData name="Asim Mian" userId="S::b01813743@studentmail.uws.ac.uk::c23492a1-d542-4a68-a554-d9cb9df9bc02" providerId="AD" clId="Web-{14D4C68E-A5A7-CB0E-AE4B-D499018E1E32}" dt="2026-09-29T20:57:08.237" v="245" actId="20577"/>
-      <pc:docMkLst>
-        <pc:docMk/>
-      </pc:docMkLst>
-    </pc:docChg>
-  </pc:docChgLst>
-  <pc:docChgLst>
-    <pc:chgData name="Iram Rafique" userId="S::b00858434@studentmail.uws.ac.uk::2891bba8-a473-4102-8aad-0e1efcea5071" providerId="AD" clId="Web-{00000000-0000-0000-0000-000000000000}"/>
-    <pc:docChg chg="modSld">
-      <pc:chgData name="Iram Rafique" userId="S::b00858434@studentmail.uws.ac.uk::2891bba8-a473-4102-8aad-0e1efcea5071" providerId="AD" clId="Web-{00000000-0000-0000-0000-000000000000}" dt="2026-09-30T09:21:51.484" v="132"/>
-      <pc:docMkLst>
-        <pc:docMk/>
-      </pc:docMkLst>
-    </pc:docChg>
-  </pc:docChgLst>
-  <pc:docChgLst>
-    <pc:chgData name="Iram Rafique" userId="S::b00858434@studentmail.uws.ac.uk::2891bba8-a473-4102-8aad-0e1efcea5071" providerId="AD" clId="Web-{0C7A1CD3-E3BB-91A9-F8CB-0989D83959C6}"/>
-    <pc:docChg chg="modSld">
-      <pc:chgData name="Iram Rafique" userId="S::b00858434@studentmail.uws.ac.uk::2891bba8-a473-4102-8aad-0e1efcea5071" providerId="AD" clId="Web-{0C7A1CD3-E3BB-91A9-F8CB-0989D83959C6}" dt="2026-10-02T18:45:23.226" v="6" actId="20577"/>
-      <pc:docMkLst>
-        <pc:docMk/>
-      </pc:docMkLst>
-    </pc:docChg>
-  </pc:docChgLst>
-  <pc:docChgLst>
-    <pc:chgData name="Paul Bennett" userId="S::b01817143@studentmail.uws.ac.uk::fc0bdc68-7c01-477d-8ae5-310da9786952" providerId="AD" clId="Web-{A8F8DB1D-A187-F2EE-1536-48DE6C432EB1}"/>
-    <pc:docChg chg="modSld">
-      <pc:chgData name="Paul Bennett" userId="S::b01817143@studentmail.uws.ac.uk::fc0bdc68-7c01-477d-8ae5-310da9786952" providerId="AD" clId="Web-{A8F8DB1D-A187-F2EE-1536-48DE6C432EB1}" dt="2026-09-30T15:22:08.488" v="1299" actId="1076"/>
-      <pc:docMkLst>
-        <pc:docMk/>
-      </pc:docMkLst>
-    </pc:docChg>
-  </pc:docChgLst>
-  <pc:docChgLst>
-    <pc:chgData name="Asim Mian" userId="S::b01813743@studentmail.uws.ac.uk::c23492a1-d542-4a68-a554-d9cb9df9bc02" providerId="AD" clId="Web-{00000000-0000-0000-0000-000000000000}"/>
-    <pc:docChg chg="addSld modSld">
-      <pc:chgData name="Asim Mian" userId="S::b01813743@studentmail.uws.ac.uk::c23492a1-d542-4a68-a554-d9cb9df9bc02" providerId="AD" clId="Web-{00000000-0000-0000-0000-000000000000}" dt="2026-09-30T09:54:57.175" v="13" actId="20577"/>
-      <pc:docMkLst>
-        <pc:docMk/>
-      </pc:docMkLst>
-    </pc:docChg>
-  </pc:docChgLst>
-  <pc:docChgLst>
-    <pc:chgData name="Iram Rafique" userId="S::b00858434@studentmail.uws.ac.uk::2891bba8-a473-4102-8aad-0e1efcea5071" providerId="AD" clId="Web-{ED450A75-D772-052B-84D3-26575907E0B5}"/>
-    <pc:docChg chg="delSld modSld">
-      <pc:chgData name="Iram Rafique" userId="S::b00858434@studentmail.uws.ac.uk::2891bba8-a473-4102-8aad-0e1efcea5071" providerId="AD" clId="Web-{ED450A75-D772-052B-84D3-26575907E0B5}" dt="2026-09-30T09:30:27.790" v="3" actId="1076"/>
-      <pc:docMkLst>
-        <pc:docMk/>
-      </pc:docMkLst>
-    </pc:docChg>
-  </pc:docChgLst>
-  <pc:docChgLst>
-    <pc:chgData name="Aaron Hamilton" userId="18204c3e-02c8-4c76-b06e-0d252f35102f" providerId="ADAL" clId="{56C94A2A-6EA3-5B70-8EF3-378E9C7B2007}"/>
-    <pc:docChg chg="custSel addSld modSld sldOrd">
-      <pc:chgData name="Aaron Hamilton" userId="18204c3e-02c8-4c76-b06e-0d252f35102f" providerId="ADAL" clId="{56C94A2A-6EA3-5B70-8EF3-378E9C7B2007}" dt="2026-10-07T12:31:00.450" v="1195" actId="1076"/>
-      <pc:docMkLst>
-        <pc:docMk/>
-      </pc:docMkLst>
-      <pc:sldChg chg="modSp mod">
-        <pc:chgData name="Aaron Hamilton" userId="18204c3e-02c8-4c76-b06e-0d252f35102f" providerId="ADAL" clId="{56C94A2A-6EA3-5B70-8EF3-378E9C7B2007}" dt="2026-10-04T16:22:08.022" v="18" actId="313"/>
-        <pc:sldMkLst>
-          <pc:docMk/>
-          <pc:sldMk cId="463772295" sldId="285"/>
-        </pc:sldMkLst>
-        <pc:spChg chg="mod">
-          <ac:chgData name="Aaron Hamilton" userId="18204c3e-02c8-4c76-b06e-0d252f35102f" providerId="ADAL" clId="{56C94A2A-6EA3-5B70-8EF3-378E9C7B2007}" dt="2026-10-04T16:22:08.022" v="18" actId="313"/>
-          <ac:spMkLst>
-            <pc:docMk/>
-            <pc:sldMk cId="463772295" sldId="285"/>
-            <ac:spMk id="8" creationId="{A15AE641-5C6E-5366-2CFB-62828EA19D86}"/>
-          </ac:spMkLst>
-        </pc:spChg>
-      </pc:sldChg>
-      <pc:sldChg chg="addSp delSp modSp add mod ord">
-        <pc:chgData name="Aaron Hamilton" userId="18204c3e-02c8-4c76-b06e-0d252f35102f" providerId="ADAL" clId="{56C94A2A-6EA3-5B70-8EF3-378E9C7B2007}" dt="2026-10-04T16:24:15.970" v="269" actId="478"/>
-        <pc:sldMkLst>
-          <pc:docMk/>
-          <pc:sldMk cId="2347342010" sldId="289"/>
-        </pc:sldMkLst>
-        <pc:spChg chg="mod">
-          <ac:chgData name="Aaron Hamilton" userId="18204c3e-02c8-4c76-b06e-0d252f35102f" providerId="ADAL" clId="{56C94A2A-6EA3-5B70-8EF3-378E9C7B2007}" dt="2026-10-04T16:23:48.737" v="263" actId="20577"/>
-          <ac:spMkLst>
-            <pc:docMk/>
-            <pc:sldMk cId="2347342010" sldId="289"/>
-            <ac:spMk id="8" creationId="{C227C96F-FD69-EFB3-7EE8-62122179F056}"/>
-          </ac:spMkLst>
-        </pc:spChg>
-        <pc:spChg chg="mod">
-          <ac:chgData name="Aaron Hamilton" userId="18204c3e-02c8-4c76-b06e-0d252f35102f" providerId="ADAL" clId="{56C94A2A-6EA3-5B70-8EF3-378E9C7B2007}" dt="2026-10-04T16:20:54.090" v="13" actId="20577"/>
-          <ac:spMkLst>
-            <pc:docMk/>
-            <pc:sldMk cId="2347342010" sldId="289"/>
-            <ac:spMk id="9" creationId="{9F6DD530-A127-64C5-66EA-A259DAB7222D}"/>
-          </ac:spMkLst>
-        </pc:spChg>
-      </pc:sldChg>
-      <pc:sldChg chg="addSp delSp modSp add mod ord">
-        <pc:chgData name="Aaron Hamilton" userId="18204c3e-02c8-4c76-b06e-0d252f35102f" providerId="ADAL" clId="{56C94A2A-6EA3-5B70-8EF3-378E9C7B2007}" dt="2026-10-06T09:47:59.343" v="1048" actId="478"/>
-        <pc:sldMkLst>
-          <pc:docMk/>
-          <pc:sldMk cId="190967963" sldId="290"/>
-        </pc:sldMkLst>
-        <pc:spChg chg="add mod">
-          <ac:chgData name="Aaron Hamilton" userId="18204c3e-02c8-4c76-b06e-0d252f35102f" providerId="ADAL" clId="{56C94A2A-6EA3-5B70-8EF3-378E9C7B2007}" dt="2026-10-06T09:45:52.182" v="791" actId="313"/>
-          <ac:spMkLst>
-            <pc:docMk/>
-            <pc:sldMk cId="190967963" sldId="290"/>
-            <ac:spMk id="7" creationId="{6D4DBD5C-726C-2E86-3FBD-15E0D9C2B1AE}"/>
-          </ac:spMkLst>
-        </pc:spChg>
-        <pc:spChg chg="mod">
-          <ac:chgData name="Aaron Hamilton" userId="18204c3e-02c8-4c76-b06e-0d252f35102f" providerId="ADAL" clId="{56C94A2A-6EA3-5B70-8EF3-378E9C7B2007}" dt="2026-10-06T09:42:49.490" v="492" actId="20577"/>
-          <ac:spMkLst>
-            <pc:docMk/>
-            <pc:sldMk cId="190967963" sldId="290"/>
-            <ac:spMk id="8" creationId="{246AB51D-F291-3EDE-C9F0-FC236DCC7F8C}"/>
-          </ac:spMkLst>
-        </pc:spChg>
-        <pc:spChg chg="mod">
-          <ac:chgData name="Aaron Hamilton" userId="18204c3e-02c8-4c76-b06e-0d252f35102f" providerId="ADAL" clId="{56C94A2A-6EA3-5B70-8EF3-378E9C7B2007}" dt="2026-10-06T09:41:31.922" v="322" actId="20577"/>
-          <ac:spMkLst>
-            <pc:docMk/>
-            <pc:sldMk cId="190967963" sldId="290"/>
-            <ac:spMk id="9" creationId="{01A556BA-DEAA-7112-F371-AB1D5B79EC98}"/>
-          </ac:spMkLst>
-        </pc:spChg>
-        <pc:spChg chg="add mod">
-          <ac:chgData name="Aaron Hamilton" userId="18204c3e-02c8-4c76-b06e-0d252f35102f" providerId="ADAL" clId="{56C94A2A-6EA3-5B70-8EF3-378E9C7B2007}" dt="2026-10-06T09:47:52.635" v="1047" actId="313"/>
-          <ac:spMkLst>
-            <pc:docMk/>
-            <pc:sldMk cId="190967963" sldId="290"/>
-            <ac:spMk id="12" creationId="{A3B0E664-0F5F-7B5A-BEDC-A65AACBC822B}"/>
-          </ac:spMkLst>
-        </pc:spChg>
-      </pc:sldChg>
-      <pc:sldChg chg="addSp delSp modSp add mod">
-        <pc:chgData name="Aaron Hamilton" userId="18204c3e-02c8-4c76-b06e-0d252f35102f" providerId="ADAL" clId="{56C94A2A-6EA3-5B70-8EF3-378E9C7B2007}" dt="2026-10-06T10:28:54.683" v="1178" actId="20577"/>
-        <pc:sldMkLst>
-          <pc:docMk/>
-          <pc:sldMk cId="2706933580" sldId="291"/>
-        </pc:sldMkLst>
-        <pc:spChg chg="mod">
-          <ac:chgData name="Aaron Hamilton" userId="18204c3e-02c8-4c76-b06e-0d252f35102f" providerId="ADAL" clId="{56C94A2A-6EA3-5B70-8EF3-378E9C7B2007}" dt="2026-10-06T10:28:54.683" v="1178" actId="20577"/>
-          <ac:spMkLst>
-            <pc:docMk/>
-            <pc:sldMk cId="2706933580" sldId="291"/>
-            <ac:spMk id="8" creationId="{B1284C07-41A0-75EE-D270-8682EE1B785D}"/>
-          </ac:spMkLst>
-        </pc:spChg>
-        <pc:spChg chg="mod">
-          <ac:chgData name="Aaron Hamilton" userId="18204c3e-02c8-4c76-b06e-0d252f35102f" providerId="ADAL" clId="{56C94A2A-6EA3-5B70-8EF3-378E9C7B2007}" dt="2026-10-06T10:24:57.521" v="1078" actId="313"/>
-          <ac:spMkLst>
-            <pc:docMk/>
-            <pc:sldMk cId="2706933580" sldId="291"/>
-            <ac:spMk id="9" creationId="{B4351A18-0480-CA87-F3F0-0A7577986577}"/>
-          </ac:spMkLst>
-        </pc:spChg>
-        <pc:picChg chg="add mod">
-          <ac:chgData name="Aaron Hamilton" userId="18204c3e-02c8-4c76-b06e-0d252f35102f" providerId="ADAL" clId="{56C94A2A-6EA3-5B70-8EF3-378E9C7B2007}" dt="2026-10-06T10:28:09.840" v="1087" actId="1076"/>
-          <ac:picMkLst>
-            <pc:docMk/>
-            <pc:sldMk cId="2706933580" sldId="291"/>
-            <ac:picMk id="10" creationId="{F31DA15B-C619-5A7C-90DE-11AB467EA2CF}"/>
-          </ac:picMkLst>
-        </pc:picChg>
-      </pc:sldChg>
-      <pc:sldChg chg="modSp add mod ord">
-        <pc:chgData name="Aaron Hamilton" userId="18204c3e-02c8-4c76-b06e-0d252f35102f" providerId="ADAL" clId="{56C94A2A-6EA3-5B70-8EF3-378E9C7B2007}" dt="2026-10-07T12:31:00.450" v="1195" actId="1076"/>
-        <pc:sldMkLst>
-          <pc:docMk/>
-          <pc:sldMk cId="2319327202" sldId="292"/>
-        </pc:sldMkLst>
-        <pc:spChg chg="mod">
-          <ac:chgData name="Aaron Hamilton" userId="18204c3e-02c8-4c76-b06e-0d252f35102f" providerId="ADAL" clId="{56C94A2A-6EA3-5B70-8EF3-378E9C7B2007}" dt="2026-10-07T12:31:00.450" v="1195" actId="1076"/>
-          <ac:spMkLst>
-            <pc:docMk/>
-            <pc:sldMk cId="2319327202" sldId="292"/>
-            <ac:spMk id="9" creationId="{F1C790DE-DE9C-E2B4-5F90-8AD84DE9F94C}"/>
-          </ac:spMkLst>
-        </pc:spChg>
       </pc:sldChg>
     </pc:docChg>
   </pc:docChgLst>
@@ -2167,7 +1969,7 @@
           <a:p>
             <a:fld id="{5B93A69D-B41C-3F4F-B1D3-33124D18B25E}" type="datetimeFigureOut">
               <a:rPr lang="en-US" smtClean="0"/>
-              <a:t>10/9/2026</a:t>
+              <a:t>10/13/2026</a:t>
             </a:fld>
             <a:endParaRPr lang="en-US"/>
           </a:p>
@@ -2462,6 +2264,1571 @@
           </p:nvPr>
         </p:nvSpPr>
         <p:spPr/>
+      </p:sp>
+      <p:sp>
+        <p:nvSpPr>
+          <p:cNvPr id="3" name="Notes Placeholder 2"/>
+          <p:cNvSpPr>
+            <a:spLocks noGrp="1"/>
+          </p:cNvSpPr>
+          <p:nvPr>
+            <p:ph type="body" idx="1"/>
+          </p:nvPr>
+        </p:nvSpPr>
+        <p:spPr/>
+        <p:txBody>
+          <a:bodyPr/>
+          <a:lstStyle/>
+          <a:p>
+            <a:r>
+              <a:rPr lang="en-US"/>
+              <a:t>Paul: Good Afternoon, everyone. Today we are going to be exploring Flutter in today’s lecture.</a:t>
+            </a:r>
+            <a:br>
+              <a:rPr lang="en-US"/>
+            </a:br>
+            <a:br>
+              <a:rPr lang="en-US"/>
+            </a:br>
+            <a:r>
+              <a:rPr lang="en-US"/>
+              <a:t>Iram: We will be looking at how Flutter works and its system of widgets it uses.</a:t>
+            </a:r>
+            <a:br>
+              <a:rPr lang="en-US"/>
+            </a:br>
+            <a:br>
+              <a:rPr lang="en-US"/>
+            </a:br>
+            <a:r>
+              <a:rPr lang="en-US"/>
+              <a:t>Asim: We will also look at the advantages of Flutter can bring you into your development.</a:t>
+            </a:r>
+            <a:br>
+              <a:rPr lang="en-US"/>
+            </a:br>
+            <a:br>
+              <a:rPr lang="en-US"/>
+            </a:br>
+            <a:r>
+              <a:rPr lang="en-US"/>
+              <a:t>Aaron: We also will talk about the drawbacks we found and a then talk about the Lab work.</a:t>
+            </a:r>
+            <a:br>
+              <a:rPr lang="en-US"/>
+            </a:br>
+            <a:br>
+              <a:rPr lang="en-US"/>
+            </a:br>
+            <a:r>
+              <a:rPr lang="en-US"/>
+              <a:t>Iram: At the end we will be taking questions, we would love to answer them. Let’s start!</a:t>
+            </a:r>
+          </a:p>
+        </p:txBody>
+      </p:sp>
+      <p:sp>
+        <p:nvSpPr>
+          <p:cNvPr id="4" name="Slide Number Placeholder 3"/>
+          <p:cNvSpPr>
+            <a:spLocks noGrp="1"/>
+          </p:cNvSpPr>
+          <p:nvPr>
+            <p:ph type="sldNum" sz="quarter" idx="5"/>
+          </p:nvPr>
+        </p:nvSpPr>
+        <p:spPr/>
+        <p:txBody>
+          <a:bodyPr/>
+          <a:lstStyle/>
+          <a:p>
+            <a:fld id="{2A6723D5-B88C-DC4A-99B9-F7A549FFB66B}" type="slidenum">
+              <a:rPr lang="en-US" smtClean="0"/>
+              <a:t>1</a:t>
+            </a:fld>
+            <a:endParaRPr lang="en-US"/>
+          </a:p>
+        </p:txBody>
+      </p:sp>
+    </p:spTree>
+    <p:extLst>
+      <p:ext uri="{BB962C8B-B14F-4D97-AF65-F5344CB8AC3E}">
+        <p14:creationId xmlns:p14="http://schemas.microsoft.com/office/powerpoint/2010/main" val="2408450925"/>
+      </p:ext>
+    </p:extLst>
+  </p:cSld>
+  <p:clrMapOvr>
+    <a:masterClrMapping/>
+  </p:clrMapOvr>
+</p:notes>
+</file>
+
+<file path=ppt/notesSlides/notesSlide10.xml><?xml version="1.0" encoding="utf-8"?>
+<p:notes xmlns:a="http://schemas.openxmlformats.org/drawingml/2006/main" xmlns:r="http://schemas.openxmlformats.org/officeDocument/2006/relationships" xmlns:p="http://schemas.openxmlformats.org/presentationml/2006/main">
+  <p:cSld>
+    <p:spTree>
+      <p:nvGrpSpPr>
+        <p:cNvPr id="1" name=""/>
+        <p:cNvGrpSpPr/>
+        <p:nvPr/>
+      </p:nvGrpSpPr>
+      <p:grpSpPr>
+        <a:xfrm>
+          <a:off x="0" y="0"/>
+          <a:ext cx="0" cy="0"/>
+          <a:chOff x="0" y="0"/>
+          <a:chExt cx="0" cy="0"/>
+        </a:xfrm>
+      </p:grpSpPr>
+      <p:sp>
+        <p:nvSpPr>
+          <p:cNvPr id="2" name="Slide Image Placeholder 1"/>
+          <p:cNvSpPr>
+            <a:spLocks noGrp="1" noRot="1" noChangeAspect="1"/>
+          </p:cNvSpPr>
+          <p:nvPr>
+            <p:ph type="sldImg"/>
+          </p:nvPr>
+        </p:nvSpPr>
+        <p:spPr/>
+      </p:sp>
+      <p:sp>
+        <p:nvSpPr>
+          <p:cNvPr id="3" name="Notes Placeholder 2"/>
+          <p:cNvSpPr>
+            <a:spLocks noGrp="1"/>
+          </p:cNvSpPr>
+          <p:nvPr>
+            <p:ph type="body" idx="1"/>
+          </p:nvPr>
+        </p:nvSpPr>
+        <p:spPr/>
+        <p:txBody>
+          <a:bodyPr/>
+          <a:lstStyle/>
+          <a:p>
+            <a:r>
+              <a:rPr lang="en-US" sz="1200" kern="1200">
+                <a:solidFill>
+                  <a:schemeClr val="tx1"/>
+                </a:solidFill>
+                <a:effectLst/>
+                <a:latin typeface="+mn-lt"/>
+                <a:ea typeface="+mn-ea"/>
+                <a:cs typeface="+mn-cs"/>
+              </a:rPr>
+              <a:t>So, in a real-world example. Image a company that has built an e-commerce app using flutter to allow customers to browse an array of items available to buy.</a:t>
+            </a:r>
+          </a:p>
+          <a:p>
+            <a:br>
+              <a:rPr lang="en-US" sz="1200" kern="1200">
+                <a:solidFill>
+                  <a:schemeClr val="tx1"/>
+                </a:solidFill>
+                <a:effectLst/>
+                <a:latin typeface="+mn-lt"/>
+                <a:ea typeface="+mn-ea"/>
+                <a:cs typeface="+mn-cs"/>
+              </a:rPr>
+            </a:br>
+            <a:endParaRPr lang="en-US" sz="1200" kern="1200">
+              <a:solidFill>
+                <a:schemeClr val="tx1"/>
+              </a:solidFill>
+              <a:effectLst/>
+              <a:latin typeface="+mn-lt"/>
+              <a:ea typeface="+mn-ea"/>
+              <a:cs typeface="+mn-cs"/>
+            </a:endParaRPr>
+          </a:p>
+          <a:p>
+            <a:r>
+              <a:rPr lang="en-US" sz="1200" kern="1200">
+                <a:solidFill>
+                  <a:schemeClr val="tx1"/>
+                </a:solidFill>
+                <a:effectLst/>
+                <a:latin typeface="+mn-lt"/>
+                <a:ea typeface="+mn-ea"/>
+                <a:cs typeface="+mn-cs"/>
+              </a:rPr>
+              <a:t>When the user open the app, they are on the Home Screen, the app initially displays a spinner in the center or a skeleton placeholder. Behind the scene, Dart is communicating to the backend server to reeve the current catalog of items.</a:t>
+            </a:r>
+          </a:p>
+          <a:p>
+            <a:br>
+              <a:rPr lang="en-US" sz="1200" kern="1200">
+                <a:solidFill>
+                  <a:schemeClr val="tx1"/>
+                </a:solidFill>
+                <a:effectLst/>
+                <a:latin typeface="+mn-lt"/>
+                <a:ea typeface="+mn-ea"/>
+                <a:cs typeface="+mn-cs"/>
+              </a:rPr>
+            </a:br>
+            <a:endParaRPr lang="en-US" sz="1200" kern="1200">
+              <a:solidFill>
+                <a:schemeClr val="tx1"/>
+              </a:solidFill>
+              <a:effectLst/>
+              <a:latin typeface="+mn-lt"/>
+              <a:ea typeface="+mn-ea"/>
+              <a:cs typeface="+mn-cs"/>
+            </a:endParaRPr>
+          </a:p>
+          <a:p>
+            <a:pPr marL="0" marR="0" lvl="0" indent="0" algn="l" defTabSz="914400" rtl="0" eaLnBrk="1" fontAlgn="auto" latinLnBrk="0" hangingPunct="1">
+              <a:lnSpc>
+                <a:spcPct val="100000"/>
+              </a:lnSpc>
+              <a:spcBef>
+                <a:spcPts val="0"/>
+              </a:spcBef>
+              <a:spcAft>
+                <a:spcPts val="0"/>
+              </a:spcAft>
+              <a:buClrTx/>
+              <a:buSzTx/>
+              <a:buFontTx/>
+              <a:buNone/>
+              <a:tabLst/>
+              <a:defRPr/>
+            </a:pPr>
+            <a:r>
+              <a:rPr lang="en-US" sz="1200" kern="1200">
+                <a:solidFill>
+                  <a:schemeClr val="tx1"/>
+                </a:solidFill>
+                <a:effectLst/>
+                <a:latin typeface="+mn-lt"/>
+                <a:ea typeface="+mn-ea"/>
+                <a:cs typeface="+mn-cs"/>
+              </a:rPr>
+              <a:t>Once dart had successfully populated its variables with the latest information, Flutter is designed to automatically detect the changes and update upon the changed data. This means that the stateful widgets will now dynamically update, transitioning from the skeleton placeholder with the recent catalog.</a:t>
+            </a:r>
+          </a:p>
+          <a:p>
+            <a:br>
+              <a:rPr lang="en-US" sz="1200" kern="1200">
+                <a:solidFill>
+                  <a:schemeClr val="tx1"/>
+                </a:solidFill>
+                <a:effectLst/>
+                <a:latin typeface="+mn-lt"/>
+                <a:ea typeface="+mn-ea"/>
+                <a:cs typeface="+mn-cs"/>
+              </a:rPr>
+            </a:br>
+            <a:endParaRPr lang="en-US" sz="1200" kern="1200">
+              <a:solidFill>
+                <a:schemeClr val="tx1"/>
+              </a:solidFill>
+              <a:effectLst/>
+              <a:latin typeface="+mn-lt"/>
+              <a:ea typeface="+mn-ea"/>
+              <a:cs typeface="+mn-cs"/>
+            </a:endParaRPr>
+          </a:p>
+          <a:p>
+            <a:r>
+              <a:rPr lang="en-US" sz="1200" kern="1200">
+                <a:solidFill>
+                  <a:schemeClr val="tx1"/>
+                </a:solidFill>
+                <a:effectLst/>
+                <a:latin typeface="+mn-lt"/>
+                <a:ea typeface="+mn-ea"/>
+                <a:cs typeface="+mn-cs"/>
+              </a:rPr>
+              <a:t>This happens through out the app, all with the help of flutter and dart making the experience as seamless as possible. </a:t>
+            </a:r>
+          </a:p>
+          <a:p>
+            <a:endParaRPr lang="en-US" sz="1200" kern="1200">
+              <a:solidFill>
+                <a:schemeClr val="tx1"/>
+              </a:solidFill>
+              <a:effectLst/>
+              <a:latin typeface="+mn-lt"/>
+              <a:ea typeface="+mn-ea"/>
+              <a:cs typeface="+mn-cs"/>
+            </a:endParaRPr>
+          </a:p>
+        </p:txBody>
+      </p:sp>
+      <p:sp>
+        <p:nvSpPr>
+          <p:cNvPr id="4" name="Slide Number Placeholder 3"/>
+          <p:cNvSpPr>
+            <a:spLocks noGrp="1"/>
+          </p:cNvSpPr>
+          <p:nvPr>
+            <p:ph type="sldNum" sz="quarter" idx="5"/>
+          </p:nvPr>
+        </p:nvSpPr>
+        <p:spPr/>
+        <p:txBody>
+          <a:bodyPr/>
+          <a:lstStyle/>
+          <a:p>
+            <a:fld id="{2A6723D5-B88C-DC4A-99B9-F7A549FFB66B}" type="slidenum">
+              <a:rPr lang="en-US" smtClean="0"/>
+              <a:t>10</a:t>
+            </a:fld>
+            <a:endParaRPr lang="en-US"/>
+          </a:p>
+        </p:txBody>
+      </p:sp>
+    </p:spTree>
+    <p:extLst>
+      <p:ext uri="{BB962C8B-B14F-4D97-AF65-F5344CB8AC3E}">
+        <p14:creationId xmlns:p14="http://schemas.microsoft.com/office/powerpoint/2010/main" val="3673580313"/>
+      </p:ext>
+    </p:extLst>
+  </p:cSld>
+  <p:clrMapOvr>
+    <a:masterClrMapping/>
+  </p:clrMapOvr>
+</p:notes>
+</file>
+
+<file path=ppt/notesSlides/notesSlide11.xml><?xml version="1.0" encoding="utf-8"?>
+<p:notes xmlns:a="http://schemas.openxmlformats.org/drawingml/2006/main" xmlns:r="http://schemas.openxmlformats.org/officeDocument/2006/relationships" xmlns:p="http://schemas.openxmlformats.org/presentationml/2006/main">
+  <p:cSld>
+    <p:spTree>
+      <p:nvGrpSpPr>
+        <p:cNvPr id="1" name=""/>
+        <p:cNvGrpSpPr/>
+        <p:nvPr/>
+      </p:nvGrpSpPr>
+      <p:grpSpPr>
+        <a:xfrm>
+          <a:off x="0" y="0"/>
+          <a:ext cx="0" cy="0"/>
+          <a:chOff x="0" y="0"/>
+          <a:chExt cx="0" cy="0"/>
+        </a:xfrm>
+      </p:grpSpPr>
+      <p:sp>
+        <p:nvSpPr>
+          <p:cNvPr id="2" name="Slide Image Placeholder 1"/>
+          <p:cNvSpPr>
+            <a:spLocks noGrp="1" noRot="1" noChangeAspect="1"/>
+          </p:cNvSpPr>
+          <p:nvPr>
+            <p:ph type="sldImg"/>
+          </p:nvPr>
+        </p:nvSpPr>
+        <p:spPr/>
+      </p:sp>
+      <p:sp>
+        <p:nvSpPr>
+          <p:cNvPr id="3" name="Notes Placeholder 2"/>
+          <p:cNvSpPr>
+            <a:spLocks noGrp="1"/>
+          </p:cNvSpPr>
+          <p:nvPr>
+            <p:ph type="body" idx="1"/>
+          </p:nvPr>
+        </p:nvSpPr>
+        <p:spPr/>
+        <p:txBody>
+          <a:bodyPr/>
+          <a:lstStyle/>
+          <a:p>
+            <a:r>
+              <a:rPr lang="en-US"/>
+              <a:t>There are many advantages for choosing flutter having the one code base means that all your different platforms are always up to get there at the exact same time nobody’s messing out on any features which can actually make your development time so much faster idea just focusing on the one and we’re flat his hot reload. You do not need to keep rebuilding your project. I can update on the fly so your development time really does shrink with flutter..</a:t>
+            </a:r>
+          </a:p>
+          <a:p>
+            <a:endParaRPr lang="en-US"/>
+          </a:p>
+          <a:p>
+            <a:r>
+              <a:rPr lang="en-US"/>
+              <a:t>And thanks to the dynamic, which I builder it has you can really make you unique looking apps and it can then be converting directly to native machine code so performance should be great throughout no matter diplo form you choose to run it on</a:t>
+            </a:r>
+          </a:p>
+          <a:p>
+            <a:r>
+              <a:rPr lang="en-US"/>
+              <a:t>And thanks to the open source nature of flutter the community arc always creating new widgets and support flutter to grow.</a:t>
+            </a:r>
+          </a:p>
+        </p:txBody>
+      </p:sp>
+      <p:sp>
+        <p:nvSpPr>
+          <p:cNvPr id="4" name="Slide Number Placeholder 3"/>
+          <p:cNvSpPr>
+            <a:spLocks noGrp="1"/>
+          </p:cNvSpPr>
+          <p:nvPr>
+            <p:ph type="sldNum" sz="quarter" idx="5"/>
+          </p:nvPr>
+        </p:nvSpPr>
+        <p:spPr/>
+        <p:txBody>
+          <a:bodyPr/>
+          <a:lstStyle/>
+          <a:p>
+            <a:fld id="{2A6723D5-B88C-DC4A-99B9-F7A549FFB66B}" type="slidenum">
+              <a:rPr lang="en-US" smtClean="0"/>
+              <a:t>11</a:t>
+            </a:fld>
+            <a:endParaRPr lang="en-US"/>
+          </a:p>
+        </p:txBody>
+      </p:sp>
+    </p:spTree>
+    <p:extLst>
+      <p:ext uri="{BB962C8B-B14F-4D97-AF65-F5344CB8AC3E}">
+        <p14:creationId xmlns:p14="http://schemas.microsoft.com/office/powerpoint/2010/main" val="116769537"/>
+      </p:ext>
+    </p:extLst>
+  </p:cSld>
+  <p:clrMapOvr>
+    <a:masterClrMapping/>
+  </p:clrMapOvr>
+</p:notes>
+</file>
+
+<file path=ppt/notesSlides/notesSlide12.xml><?xml version="1.0" encoding="utf-8"?>
+<p:notes xmlns:a="http://schemas.openxmlformats.org/drawingml/2006/main" xmlns:r="http://schemas.openxmlformats.org/officeDocument/2006/relationships" xmlns:p="http://schemas.openxmlformats.org/presentationml/2006/main">
+  <p:cSld>
+    <p:spTree>
+      <p:nvGrpSpPr>
+        <p:cNvPr id="1" name=""/>
+        <p:cNvGrpSpPr/>
+        <p:nvPr/>
+      </p:nvGrpSpPr>
+      <p:grpSpPr>
+        <a:xfrm>
+          <a:off x="0" y="0"/>
+          <a:ext cx="0" cy="0"/>
+          <a:chOff x="0" y="0"/>
+          <a:chExt cx="0" cy="0"/>
+        </a:xfrm>
+      </p:grpSpPr>
+      <p:sp>
+        <p:nvSpPr>
+          <p:cNvPr id="2" name="Slide Image Placeholder 1"/>
+          <p:cNvSpPr>
+            <a:spLocks noGrp="1" noRot="1" noChangeAspect="1"/>
+          </p:cNvSpPr>
+          <p:nvPr>
+            <p:ph type="sldImg"/>
+          </p:nvPr>
+        </p:nvSpPr>
+        <p:spPr/>
+      </p:sp>
+      <p:sp>
+        <p:nvSpPr>
+          <p:cNvPr id="3" name="Notes Placeholder 2"/>
+          <p:cNvSpPr>
+            <a:spLocks noGrp="1"/>
+          </p:cNvSpPr>
+          <p:nvPr>
+            <p:ph type="body" idx="1"/>
+          </p:nvPr>
+        </p:nvSpPr>
+        <p:spPr/>
+        <p:txBody>
+          <a:bodyPr/>
+          <a:lstStyle/>
+          <a:p>
+            <a:r>
+              <a:rPr lang="en-US"/>
+              <a:t>As there’s advantages that also the same number of disadvantages sadly, as of the nature of being multiplatform that means that file sizes of your program may be larger than if they were natively created, and you might actually lose out on day one features from said platforms.</a:t>
+            </a:r>
+          </a:p>
+          <a:p>
+            <a:endParaRPr lang="en-US"/>
+          </a:p>
+          <a:p>
+            <a:r>
+              <a:rPr lang="en-US"/>
+              <a:t>Well flutter can be used for web. It will not be good for SCO optimization due to its long load times and complexities so it should really stay as being a web app rather than traditional pages.</a:t>
+            </a:r>
+          </a:p>
+          <a:p>
+            <a:endParaRPr lang="en-US"/>
+          </a:p>
+          <a:p>
+            <a:r>
+              <a:rPr lang="en-US"/>
+              <a:t>While we have been saying, it’s easy to learn it may be harder for some people that have no JavaScript or react experience.</a:t>
+            </a:r>
+          </a:p>
+          <a:p>
+            <a:endParaRPr lang="en-US"/>
+          </a:p>
+          <a:p>
+            <a:r>
+              <a:rPr lang="en-US"/>
+              <a:t>Jet brains have recently taken Kotlin with compose and made a multi platform as well so people that have android development experiences can easily convert their current code to run on iOS and jet. Brains have also made Coland multiplatform work service side as well, so it can also work on the web so there’s multiple options.</a:t>
+            </a:r>
+          </a:p>
+        </p:txBody>
+      </p:sp>
+      <p:sp>
+        <p:nvSpPr>
+          <p:cNvPr id="4" name="Slide Number Placeholder 3"/>
+          <p:cNvSpPr>
+            <a:spLocks noGrp="1"/>
+          </p:cNvSpPr>
+          <p:nvPr>
+            <p:ph type="sldNum" sz="quarter" idx="5"/>
+          </p:nvPr>
+        </p:nvSpPr>
+        <p:spPr/>
+        <p:txBody>
+          <a:bodyPr/>
+          <a:lstStyle/>
+          <a:p>
+            <a:fld id="{2A6723D5-B88C-DC4A-99B9-F7A549FFB66B}" type="slidenum">
+              <a:rPr lang="en-US" smtClean="0"/>
+              <a:t>12</a:t>
+            </a:fld>
+            <a:endParaRPr lang="en-US"/>
+          </a:p>
+        </p:txBody>
+      </p:sp>
+    </p:spTree>
+    <p:extLst>
+      <p:ext uri="{BB962C8B-B14F-4D97-AF65-F5344CB8AC3E}">
+        <p14:creationId xmlns:p14="http://schemas.microsoft.com/office/powerpoint/2010/main" val="4072831971"/>
+      </p:ext>
+    </p:extLst>
+  </p:cSld>
+  <p:clrMapOvr>
+    <a:masterClrMapping/>
+  </p:clrMapOvr>
+</p:notes>
+</file>
+
+<file path=ppt/notesSlides/notesSlide13.xml><?xml version="1.0" encoding="utf-8"?>
+<p:notes xmlns:a="http://schemas.openxmlformats.org/drawingml/2006/main" xmlns:r="http://schemas.openxmlformats.org/officeDocument/2006/relationships" xmlns:p="http://schemas.openxmlformats.org/presentationml/2006/main">
+  <p:cSld>
+    <p:spTree>
+      <p:nvGrpSpPr>
+        <p:cNvPr id="1" name=""/>
+        <p:cNvGrpSpPr/>
+        <p:nvPr/>
+      </p:nvGrpSpPr>
+      <p:grpSpPr>
+        <a:xfrm>
+          <a:off x="0" y="0"/>
+          <a:ext cx="0" cy="0"/>
+          <a:chOff x="0" y="0"/>
+          <a:chExt cx="0" cy="0"/>
+        </a:xfrm>
+      </p:grpSpPr>
+      <p:sp>
+        <p:nvSpPr>
+          <p:cNvPr id="2" name="Slide Image Placeholder 1"/>
+          <p:cNvSpPr>
+            <a:spLocks noGrp="1" noRot="1" noChangeAspect="1"/>
+          </p:cNvSpPr>
+          <p:nvPr>
+            <p:ph type="sldImg"/>
+          </p:nvPr>
+        </p:nvSpPr>
+        <p:spPr/>
+      </p:sp>
+      <p:sp>
+        <p:nvSpPr>
+          <p:cNvPr id="3" name="Notes Placeholder 2"/>
+          <p:cNvSpPr>
+            <a:spLocks noGrp="1"/>
+          </p:cNvSpPr>
+          <p:nvPr>
+            <p:ph type="body" idx="1"/>
+          </p:nvPr>
+        </p:nvSpPr>
+        <p:spPr/>
+        <p:txBody>
+          <a:bodyPr/>
+          <a:lstStyle/>
+          <a:p>
+            <a:r>
+              <a:rPr lang="en-US"/>
+              <a:t>So much has been said in so little time so here are the key points that we have learned today.</a:t>
+            </a:r>
+          </a:p>
+          <a:p>
+            <a:endParaRPr lang="en-US"/>
+          </a:p>
+          <a:p>
+            <a:r>
+              <a:rPr lang="en-US"/>
+              <a:t>We have learnt that has a large multiplatform support and it’s always getting regularly updated by Google and we have a declarative UI builder, and the easy nature of helps you create beautiful, unique apps, and dart supports you throughout helping you writing the code making sure that you flat application runs fast and smoothly and can be deployed wherever you need it.</a:t>
+            </a:r>
+          </a:p>
+        </p:txBody>
+      </p:sp>
+      <p:sp>
+        <p:nvSpPr>
+          <p:cNvPr id="4" name="Slide Number Placeholder 3"/>
+          <p:cNvSpPr>
+            <a:spLocks noGrp="1"/>
+          </p:cNvSpPr>
+          <p:nvPr>
+            <p:ph type="sldNum" sz="quarter" idx="5"/>
+          </p:nvPr>
+        </p:nvSpPr>
+        <p:spPr/>
+        <p:txBody>
+          <a:bodyPr/>
+          <a:lstStyle/>
+          <a:p>
+            <a:fld id="{2A6723D5-B88C-DC4A-99B9-F7A549FFB66B}" type="slidenum">
+              <a:rPr lang="en-US" smtClean="0"/>
+              <a:t>13</a:t>
+            </a:fld>
+            <a:endParaRPr lang="en-US"/>
+          </a:p>
+        </p:txBody>
+      </p:sp>
+    </p:spTree>
+    <p:extLst>
+      <p:ext uri="{BB962C8B-B14F-4D97-AF65-F5344CB8AC3E}">
+        <p14:creationId xmlns:p14="http://schemas.microsoft.com/office/powerpoint/2010/main" val="3035090701"/>
+      </p:ext>
+    </p:extLst>
+  </p:cSld>
+  <p:clrMapOvr>
+    <a:masterClrMapping/>
+  </p:clrMapOvr>
+</p:notes>
+</file>
+
+<file path=ppt/notesSlides/notesSlide14.xml><?xml version="1.0" encoding="utf-8"?>
+<p:notes xmlns:a="http://schemas.openxmlformats.org/drawingml/2006/main" xmlns:r="http://schemas.openxmlformats.org/officeDocument/2006/relationships" xmlns:p="http://schemas.openxmlformats.org/presentationml/2006/main">
+  <p:cSld>
+    <p:spTree>
+      <p:nvGrpSpPr>
+        <p:cNvPr id="1" name=""/>
+        <p:cNvGrpSpPr/>
+        <p:nvPr/>
+      </p:nvGrpSpPr>
+      <p:grpSpPr>
+        <a:xfrm>
+          <a:off x="0" y="0"/>
+          <a:ext cx="0" cy="0"/>
+          <a:chOff x="0" y="0"/>
+          <a:chExt cx="0" cy="0"/>
+        </a:xfrm>
+      </p:grpSpPr>
+      <p:sp>
+        <p:nvSpPr>
+          <p:cNvPr id="2" name="Slide Image Placeholder 1"/>
+          <p:cNvSpPr>
+            <a:spLocks noGrp="1" noRot="1" noChangeAspect="1"/>
+          </p:cNvSpPr>
+          <p:nvPr>
+            <p:ph type="sldImg"/>
+          </p:nvPr>
+        </p:nvSpPr>
+        <p:spPr/>
+      </p:sp>
+      <p:sp>
+        <p:nvSpPr>
+          <p:cNvPr id="3" name="Notes Placeholder 2"/>
+          <p:cNvSpPr>
+            <a:spLocks noGrp="1"/>
+          </p:cNvSpPr>
+          <p:nvPr>
+            <p:ph type="body" idx="1"/>
+          </p:nvPr>
+        </p:nvSpPr>
+        <p:spPr/>
+        <p:txBody>
+          <a:bodyPr/>
+          <a:lstStyle/>
+          <a:p>
+            <a:r>
+              <a:rPr lang="en-US"/>
+              <a:t>Now let’s take what you have learnt today and put it into practice.</a:t>
+            </a:r>
+          </a:p>
+          <a:p>
+            <a:br>
+              <a:rPr lang="en-US"/>
+            </a:br>
+            <a:r>
+              <a:rPr lang="en-US"/>
+              <a:t>The lab guides you through everything, but at the end of each section there are some challenges, we won't give the answer to them, you need to do a bit of research and testing, the best way of learning!</a:t>
+            </a:r>
+            <a:br>
+              <a:rPr lang="en-US"/>
+            </a:br>
+            <a:br>
+              <a:rPr lang="en-US"/>
+            </a:br>
+            <a:r>
+              <a:rPr lang="en-US"/>
+              <a:t>At the end of the lab, you should be able to create reusable widgets and build up a card interface to display some information.</a:t>
+            </a:r>
+            <a:br>
+              <a:rPr lang="en-US"/>
+            </a:br>
+            <a:br>
+              <a:rPr lang="en-US"/>
+            </a:br>
+            <a:r>
+              <a:rPr lang="en-US"/>
+              <a:t>We aren’t adding any logic as we are just focusing on Flutter itself, but that shouldn’t stop you from playing about and add some logic into it.</a:t>
+            </a:r>
+          </a:p>
+        </p:txBody>
+      </p:sp>
+      <p:sp>
+        <p:nvSpPr>
+          <p:cNvPr id="4" name="Slide Number Placeholder 3"/>
+          <p:cNvSpPr>
+            <a:spLocks noGrp="1"/>
+          </p:cNvSpPr>
+          <p:nvPr>
+            <p:ph type="sldNum" sz="quarter" idx="5"/>
+          </p:nvPr>
+        </p:nvSpPr>
+        <p:spPr/>
+        <p:txBody>
+          <a:bodyPr/>
+          <a:lstStyle/>
+          <a:p>
+            <a:fld id="{2A6723D5-B88C-DC4A-99B9-F7A549FFB66B}" type="slidenum">
+              <a:rPr lang="en-US" smtClean="0"/>
+              <a:t>14</a:t>
+            </a:fld>
+            <a:endParaRPr lang="en-US"/>
+          </a:p>
+        </p:txBody>
+      </p:sp>
+    </p:spTree>
+    <p:extLst>
+      <p:ext uri="{BB962C8B-B14F-4D97-AF65-F5344CB8AC3E}">
+        <p14:creationId xmlns:p14="http://schemas.microsoft.com/office/powerpoint/2010/main" val="1918006739"/>
+      </p:ext>
+    </p:extLst>
+  </p:cSld>
+  <p:clrMapOvr>
+    <a:masterClrMapping/>
+  </p:clrMapOvr>
+</p:notes>
+</file>
+
+<file path=ppt/notesSlides/notesSlide15.xml><?xml version="1.0" encoding="utf-8"?>
+<p:notes xmlns:a="http://schemas.openxmlformats.org/drawingml/2006/main" xmlns:r="http://schemas.openxmlformats.org/officeDocument/2006/relationships" xmlns:p="http://schemas.openxmlformats.org/presentationml/2006/main">
+  <p:cSld>
+    <p:spTree>
+      <p:nvGrpSpPr>
+        <p:cNvPr id="1" name=""/>
+        <p:cNvGrpSpPr/>
+        <p:nvPr/>
+      </p:nvGrpSpPr>
+      <p:grpSpPr>
+        <a:xfrm>
+          <a:off x="0" y="0"/>
+          <a:ext cx="0" cy="0"/>
+          <a:chOff x="0" y="0"/>
+          <a:chExt cx="0" cy="0"/>
+        </a:xfrm>
+      </p:grpSpPr>
+      <p:sp>
+        <p:nvSpPr>
+          <p:cNvPr id="2" name="Slide Image Placeholder 1"/>
+          <p:cNvSpPr>
+            <a:spLocks noGrp="1" noRot="1" noChangeAspect="1"/>
+          </p:cNvSpPr>
+          <p:nvPr>
+            <p:ph type="sldImg"/>
+          </p:nvPr>
+        </p:nvSpPr>
+        <p:spPr/>
+      </p:sp>
+      <p:sp>
+        <p:nvSpPr>
+          <p:cNvPr id="3" name="Notes Placeholder 2"/>
+          <p:cNvSpPr>
+            <a:spLocks noGrp="1"/>
+          </p:cNvSpPr>
+          <p:nvPr>
+            <p:ph type="body" idx="1"/>
+          </p:nvPr>
+        </p:nvSpPr>
+        <p:spPr/>
+        <p:txBody>
+          <a:bodyPr/>
+          <a:lstStyle/>
+          <a:p>
+            <a:r>
+              <a:rPr lang="en-US"/>
+              <a:t>Here are the list of references for you to continue with your learning you’re able to access them on the unique studio lab site by going to the view lecture slides and scrolling to the bottom to Learning resources.</a:t>
+            </a:r>
+          </a:p>
+        </p:txBody>
+      </p:sp>
+      <p:sp>
+        <p:nvSpPr>
+          <p:cNvPr id="4" name="Slide Number Placeholder 3"/>
+          <p:cNvSpPr>
+            <a:spLocks noGrp="1"/>
+          </p:cNvSpPr>
+          <p:nvPr>
+            <p:ph type="sldNum" sz="quarter" idx="5"/>
+          </p:nvPr>
+        </p:nvSpPr>
+        <p:spPr/>
+        <p:txBody>
+          <a:bodyPr/>
+          <a:lstStyle/>
+          <a:p>
+            <a:fld id="{2A6723D5-B88C-DC4A-99B9-F7A549FFB66B}" type="slidenum">
+              <a:rPr lang="en-US" smtClean="0"/>
+              <a:t>15</a:t>
+            </a:fld>
+            <a:endParaRPr lang="en-US"/>
+          </a:p>
+        </p:txBody>
+      </p:sp>
+    </p:spTree>
+    <p:extLst>
+      <p:ext uri="{BB962C8B-B14F-4D97-AF65-F5344CB8AC3E}">
+        <p14:creationId xmlns:p14="http://schemas.microsoft.com/office/powerpoint/2010/main" val="1863511590"/>
+      </p:ext>
+    </p:extLst>
+  </p:cSld>
+  <p:clrMapOvr>
+    <a:masterClrMapping/>
+  </p:clrMapOvr>
+</p:notes>
+</file>
+
+<file path=ppt/notesSlides/notesSlide16.xml><?xml version="1.0" encoding="utf-8"?>
+<p:notes xmlns:a="http://schemas.openxmlformats.org/drawingml/2006/main" xmlns:r="http://schemas.openxmlformats.org/officeDocument/2006/relationships" xmlns:p="http://schemas.openxmlformats.org/presentationml/2006/main">
+  <p:cSld>
+    <p:spTree>
+      <p:nvGrpSpPr>
+        <p:cNvPr id="1" name=""/>
+        <p:cNvGrpSpPr/>
+        <p:nvPr/>
+      </p:nvGrpSpPr>
+      <p:grpSpPr>
+        <a:xfrm>
+          <a:off x="0" y="0"/>
+          <a:ext cx="0" cy="0"/>
+          <a:chOff x="0" y="0"/>
+          <a:chExt cx="0" cy="0"/>
+        </a:xfrm>
+      </p:grpSpPr>
+      <p:sp>
+        <p:nvSpPr>
+          <p:cNvPr id="2" name="Slide Image Placeholder 1"/>
+          <p:cNvSpPr>
+            <a:spLocks noGrp="1" noRot="1" noChangeAspect="1"/>
+          </p:cNvSpPr>
+          <p:nvPr>
+            <p:ph type="sldImg"/>
+          </p:nvPr>
+        </p:nvSpPr>
+        <p:spPr/>
+      </p:sp>
+      <p:sp>
+        <p:nvSpPr>
+          <p:cNvPr id="3" name="Notes Placeholder 2"/>
+          <p:cNvSpPr>
+            <a:spLocks noGrp="1"/>
+          </p:cNvSpPr>
+          <p:nvPr>
+            <p:ph type="body" idx="1"/>
+          </p:nvPr>
+        </p:nvSpPr>
+        <p:spPr/>
+        <p:txBody>
+          <a:bodyPr/>
+          <a:lstStyle/>
+          <a:p>
+            <a:r>
+              <a:rPr lang="en-US"/>
+              <a:t>We really do appreciate your time and listening to our lecture today.</a:t>
+            </a:r>
+          </a:p>
+          <a:p>
+            <a:endParaRPr lang="en-US"/>
+          </a:p>
+          <a:p>
+            <a:r>
+              <a:rPr lang="en-US"/>
+              <a:t>We hope you have some questions for us as we are more than willing to answer and make sure you do have a true understanding on what you learned today.</a:t>
+            </a:r>
+          </a:p>
+          <a:p>
+            <a:endParaRPr lang="en-US"/>
+          </a:p>
+          <a:p>
+            <a:r>
+              <a:rPr lang="en-US"/>
+              <a:t>So, on that note, any questions?</a:t>
+            </a:r>
+          </a:p>
+          <a:p>
+            <a:endParaRPr lang="en-US"/>
+          </a:p>
+          <a:p>
+            <a:r>
+              <a:rPr lang="en-US"/>
+              <a:t>&lt;&lt;DO QUESTIONS&gt;&gt;</a:t>
+            </a:r>
+            <a:br>
+              <a:rPr lang="en-US"/>
+            </a:br>
+            <a:br>
+              <a:rPr lang="en-US"/>
+            </a:br>
+            <a:r>
+              <a:rPr lang="en-US"/>
+              <a:t>Thank you for that, again go to </a:t>
+            </a:r>
+            <a:r>
+              <a:rPr lang="en-US" err="1"/>
+              <a:t>uniqstudio.org</a:t>
+            </a:r>
+            <a:r>
+              <a:rPr lang="en-US"/>
+              <a:t>/learn to start on the lab any questions come find us and will help you through it.</a:t>
+            </a:r>
+          </a:p>
+        </p:txBody>
+      </p:sp>
+      <p:sp>
+        <p:nvSpPr>
+          <p:cNvPr id="4" name="Slide Number Placeholder 3"/>
+          <p:cNvSpPr>
+            <a:spLocks noGrp="1"/>
+          </p:cNvSpPr>
+          <p:nvPr>
+            <p:ph type="sldNum" sz="quarter" idx="5"/>
+          </p:nvPr>
+        </p:nvSpPr>
+        <p:spPr/>
+        <p:txBody>
+          <a:bodyPr/>
+          <a:lstStyle/>
+          <a:p>
+            <a:fld id="{2A6723D5-B88C-DC4A-99B9-F7A549FFB66B}" type="slidenum">
+              <a:rPr lang="en-US" smtClean="0"/>
+              <a:t>16</a:t>
+            </a:fld>
+            <a:endParaRPr lang="en-US"/>
+          </a:p>
+        </p:txBody>
+      </p:sp>
+    </p:spTree>
+    <p:extLst>
+      <p:ext uri="{BB962C8B-B14F-4D97-AF65-F5344CB8AC3E}">
+        <p14:creationId xmlns:p14="http://schemas.microsoft.com/office/powerpoint/2010/main" val="431321376"/>
+      </p:ext>
+    </p:extLst>
+  </p:cSld>
+  <p:clrMapOvr>
+    <a:masterClrMapping/>
+  </p:clrMapOvr>
+</p:notes>
+</file>
+
+<file path=ppt/notesSlides/notesSlide2.xml><?xml version="1.0" encoding="utf-8"?>
+<p:notes xmlns:a="http://schemas.openxmlformats.org/drawingml/2006/main" xmlns:r="http://schemas.openxmlformats.org/officeDocument/2006/relationships" xmlns:p="http://schemas.openxmlformats.org/presentationml/2006/main">
+  <p:cSld>
+    <p:spTree>
+      <p:nvGrpSpPr>
+        <p:cNvPr id="1" name=""/>
+        <p:cNvGrpSpPr/>
+        <p:nvPr/>
+      </p:nvGrpSpPr>
+      <p:grpSpPr>
+        <a:xfrm>
+          <a:off x="0" y="0"/>
+          <a:ext cx="0" cy="0"/>
+          <a:chOff x="0" y="0"/>
+          <a:chExt cx="0" cy="0"/>
+        </a:xfrm>
+      </p:grpSpPr>
+      <p:sp>
+        <p:nvSpPr>
+          <p:cNvPr id="2" name="Slide Image Placeholder 1"/>
+          <p:cNvSpPr>
+            <a:spLocks noGrp="1" noRot="1" noChangeAspect="1"/>
+          </p:cNvSpPr>
+          <p:nvPr>
+            <p:ph type="sldImg"/>
+          </p:nvPr>
+        </p:nvSpPr>
+        <p:spPr/>
+      </p:sp>
+      <p:sp>
+        <p:nvSpPr>
+          <p:cNvPr id="3" name="Notes Placeholder 2"/>
+          <p:cNvSpPr>
+            <a:spLocks noGrp="1"/>
+          </p:cNvSpPr>
+          <p:nvPr>
+            <p:ph type="body" idx="1"/>
+          </p:nvPr>
+        </p:nvSpPr>
+        <p:spPr/>
+        <p:txBody>
+          <a:bodyPr/>
+          <a:lstStyle/>
+          <a:p>
+            <a:r>
+              <a:rPr lang="en-US"/>
+              <a:t>A little introduction to Flutter. </a:t>
+            </a:r>
+          </a:p>
+          <a:p>
+            <a:br>
+              <a:rPr lang="en-US"/>
+            </a:br>
+            <a:r>
+              <a:rPr lang="en-US"/>
+              <a:t>What is Flutter exactly? </a:t>
+            </a:r>
+          </a:p>
+          <a:p>
+            <a:endParaRPr lang="en-US"/>
+          </a:p>
+          <a:p>
+            <a:r>
+              <a:rPr lang="en-US"/>
+              <a:t>Well, it was created by Google as a solution to a common challenge developers had. </a:t>
+            </a:r>
+          </a:p>
+          <a:p>
+            <a:endParaRPr lang="en-US"/>
+          </a:p>
+          <a:p>
+            <a:r>
+              <a:rPr lang="en-US"/>
+              <a:t>Multiple codebases for one app to run on different platforms, making some platforms have missing features and not feel like a single unified app.</a:t>
+            </a:r>
+            <a:br>
+              <a:rPr lang="en-US"/>
+            </a:br>
+            <a:endParaRPr lang="en-US"/>
+          </a:p>
+          <a:p>
+            <a:r>
+              <a:rPr lang="en-US"/>
+              <a:t>Flutter solves this by compiling the code for the platforms you need it on, no more missing features on Android or IOS. </a:t>
+            </a:r>
+          </a:p>
+          <a:p>
+            <a:endParaRPr lang="en-US"/>
+          </a:p>
+          <a:p>
+            <a:r>
+              <a:rPr lang="en-US"/>
+              <a:t>Same layout and design all at the same time. This also helps speed up development as well!</a:t>
+            </a:r>
+            <a:br>
+              <a:rPr lang="en-US"/>
+            </a:br>
+            <a:br>
+              <a:rPr lang="en-US"/>
+            </a:br>
+            <a:r>
+              <a:rPr lang="en-US" sz="1200" b="0" i="0" kern="1200">
+                <a:solidFill>
+                  <a:schemeClr val="tx1"/>
+                </a:solidFill>
+                <a:effectLst/>
+                <a:latin typeface="+mn-lt"/>
+                <a:ea typeface="+mn-ea"/>
+                <a:cs typeface="+mn-cs"/>
+              </a:rPr>
+              <a:t>When Flutter launched, declarative UI development was just starting to take off. Unlike traditional UI builders where you manually stitch layouts together, a declarative approach means you simply tell Flutter what the interface should look like, and the framework handles the rest. This ensures your app maintains a consistent look and feel across any device or screen size.</a:t>
+            </a:r>
+          </a:p>
+          <a:p>
+            <a:endParaRPr lang="en-US" sz="1200" b="0" i="0" kern="1200">
+              <a:solidFill>
+                <a:schemeClr val="tx1"/>
+              </a:solidFill>
+              <a:effectLst/>
+              <a:latin typeface="+mn-lt"/>
+              <a:ea typeface="+mn-ea"/>
+              <a:cs typeface="+mn-cs"/>
+            </a:endParaRPr>
+          </a:p>
+          <a:p>
+            <a:r>
+              <a:rPr lang="en-US" sz="1200" b="0" i="0" kern="1200">
+                <a:solidFill>
+                  <a:schemeClr val="tx1"/>
+                </a:solidFill>
+                <a:effectLst/>
+                <a:latin typeface="+mn-lt"/>
+                <a:ea typeface="+mn-ea"/>
+                <a:cs typeface="+mn-cs"/>
+              </a:rPr>
+              <a:t>Google had built up Flutter with a rich ecosystem of customizable widgets that help developers build modern, responsive applications. First launched 2018, it has now matured framework and used by major companies, like BMW and </a:t>
+            </a:r>
+            <a:r>
+              <a:rPr lang="en-US" sz="1200" b="0" i="0" kern="1200" err="1">
+                <a:solidFill>
+                  <a:schemeClr val="tx1"/>
+                </a:solidFill>
+                <a:effectLst/>
+                <a:latin typeface="+mn-lt"/>
+                <a:ea typeface="+mn-ea"/>
+                <a:cs typeface="+mn-cs"/>
+              </a:rPr>
+              <a:t>Nubank</a:t>
+            </a:r>
+            <a:r>
+              <a:rPr lang="en-US" sz="1200" b="0" i="0" kern="1200">
+                <a:solidFill>
+                  <a:schemeClr val="tx1"/>
+                </a:solidFill>
+                <a:effectLst/>
+                <a:latin typeface="+mn-lt"/>
+                <a:ea typeface="+mn-ea"/>
+                <a:cs typeface="+mn-cs"/>
+              </a:rPr>
+              <a:t>. Google Pay uses flutter as well.</a:t>
+            </a:r>
+          </a:p>
+          <a:p>
+            <a:endParaRPr lang="en-US" sz="1200" b="0" i="0" kern="1200">
+              <a:solidFill>
+                <a:schemeClr val="tx1"/>
+              </a:solidFill>
+              <a:effectLst/>
+              <a:latin typeface="+mn-lt"/>
+              <a:ea typeface="+mn-ea"/>
+              <a:cs typeface="+mn-cs"/>
+            </a:endParaRPr>
+          </a:p>
+          <a:p>
+            <a:r>
+              <a:rPr lang="en-US" sz="1200" b="0" i="0" kern="1200">
+                <a:solidFill>
+                  <a:schemeClr val="tx1"/>
+                </a:solidFill>
+                <a:effectLst/>
+                <a:latin typeface="+mn-lt"/>
+                <a:ea typeface="+mn-ea"/>
+                <a:cs typeface="+mn-cs"/>
+              </a:rPr>
+              <a:t>As you can see on the screen, Flutter empowers you to target a wide variety of platforms from one unified codebase.</a:t>
+            </a:r>
+            <a:endParaRPr lang="en-US"/>
+          </a:p>
+        </p:txBody>
+      </p:sp>
+      <p:sp>
+        <p:nvSpPr>
+          <p:cNvPr id="4" name="Slide Number Placeholder 3"/>
+          <p:cNvSpPr>
+            <a:spLocks noGrp="1"/>
+          </p:cNvSpPr>
+          <p:nvPr>
+            <p:ph type="sldNum" sz="quarter" idx="5"/>
+          </p:nvPr>
+        </p:nvSpPr>
+        <p:spPr/>
+        <p:txBody>
+          <a:bodyPr/>
+          <a:lstStyle/>
+          <a:p>
+            <a:fld id="{2A6723D5-B88C-DC4A-99B9-F7A549FFB66B}" type="slidenum">
+              <a:rPr lang="en-US" smtClean="0"/>
+              <a:t>2</a:t>
+            </a:fld>
+            <a:endParaRPr lang="en-US"/>
+          </a:p>
+        </p:txBody>
+      </p:sp>
+    </p:spTree>
+    <p:extLst>
+      <p:ext uri="{BB962C8B-B14F-4D97-AF65-F5344CB8AC3E}">
+        <p14:creationId xmlns:p14="http://schemas.microsoft.com/office/powerpoint/2010/main" val="3246657700"/>
+      </p:ext>
+    </p:extLst>
+  </p:cSld>
+  <p:clrMapOvr>
+    <a:masterClrMapping/>
+  </p:clrMapOvr>
+</p:notes>
+</file>
+
+<file path=ppt/notesSlides/notesSlide3.xml><?xml version="1.0" encoding="utf-8"?>
+<p:notes xmlns:a="http://schemas.openxmlformats.org/drawingml/2006/main" xmlns:r="http://schemas.openxmlformats.org/officeDocument/2006/relationships" xmlns:p="http://schemas.openxmlformats.org/presentationml/2006/main">
+  <p:cSld>
+    <p:spTree>
+      <p:nvGrpSpPr>
+        <p:cNvPr id="1" name=""/>
+        <p:cNvGrpSpPr/>
+        <p:nvPr/>
+      </p:nvGrpSpPr>
+      <p:grpSpPr>
+        <a:xfrm>
+          <a:off x="0" y="0"/>
+          <a:ext cx="0" cy="0"/>
+          <a:chOff x="0" y="0"/>
+          <a:chExt cx="0" cy="0"/>
+        </a:xfrm>
+      </p:grpSpPr>
+      <p:sp>
+        <p:nvSpPr>
+          <p:cNvPr id="2" name="Slide Image Placeholder 1"/>
+          <p:cNvSpPr>
+            <a:spLocks noGrp="1" noRot="1" noChangeAspect="1"/>
+          </p:cNvSpPr>
+          <p:nvPr>
+            <p:ph type="sldImg"/>
+          </p:nvPr>
+        </p:nvSpPr>
+        <p:spPr/>
+      </p:sp>
+      <p:sp>
+        <p:nvSpPr>
+          <p:cNvPr id="3" name="Notes Placeholder 2"/>
+          <p:cNvSpPr>
+            <a:spLocks noGrp="1"/>
+          </p:cNvSpPr>
+          <p:nvPr>
+            <p:ph type="body" idx="1"/>
+          </p:nvPr>
+        </p:nvSpPr>
+        <p:spPr/>
+        <p:txBody>
+          <a:bodyPr/>
+          <a:lstStyle/>
+          <a:p>
+            <a:r>
+              <a:rPr lang="en-US"/>
+              <a:t>To understand Flutter, we need a quick introduction to Dart.</a:t>
+            </a:r>
+            <a:br>
+              <a:rPr lang="en-US"/>
+            </a:br>
+            <a:br>
+              <a:rPr lang="en-US"/>
+            </a:br>
+            <a:r>
+              <a:rPr lang="en-US"/>
+              <a:t>Flutter runs on top of Dart, a programming language that was also developed by Google. </a:t>
+            </a:r>
+          </a:p>
+          <a:p>
+            <a:endParaRPr lang="en-US"/>
+          </a:p>
+          <a:p>
+            <a:r>
+              <a:rPr lang="en-US"/>
+              <a:t>From the beginning it was designed around being open-source, improving by the community of developers.</a:t>
+            </a:r>
+            <a:br>
+              <a:rPr lang="en-US"/>
+            </a:br>
+            <a:br>
+              <a:rPr lang="en-US"/>
+            </a:br>
+            <a:r>
+              <a:rPr lang="en-US"/>
+              <a:t>Dart was created to be intuitive, easy to pick up and run efficiently across an array of devices.</a:t>
+            </a:r>
+          </a:p>
+          <a:p>
+            <a:endParaRPr lang="en-US"/>
+          </a:p>
+          <a:p>
+            <a:r>
+              <a:rPr lang="en-US"/>
+              <a:t>Fun Fact: Google created Dart originally with the ambition to replace JavaScript on the web. However, Google later shifted the project to, how its now, a multiplatform language.</a:t>
+            </a:r>
+            <a:br>
+              <a:rPr lang="en-US"/>
+            </a:br>
+            <a:br>
+              <a:rPr lang="en-US"/>
+            </a:br>
+            <a:r>
+              <a:rPr lang="en-US"/>
+              <a:t>Because of the design, if you have experience with JavaScript , you might find the syntax familiar, especially if you have worked with the React Framework.</a:t>
+            </a:r>
+            <a:br>
+              <a:rPr lang="en-US"/>
+            </a:br>
+            <a:br>
+              <a:rPr lang="en-US"/>
+            </a:br>
+            <a:r>
+              <a:rPr lang="en-US"/>
+              <a:t>But don’t worry, we won’t be diving into Dart today.</a:t>
+            </a:r>
+          </a:p>
+        </p:txBody>
+      </p:sp>
+      <p:sp>
+        <p:nvSpPr>
+          <p:cNvPr id="4" name="Slide Number Placeholder 3"/>
+          <p:cNvSpPr>
+            <a:spLocks noGrp="1"/>
+          </p:cNvSpPr>
+          <p:nvPr>
+            <p:ph type="sldNum" sz="quarter" idx="5"/>
+          </p:nvPr>
+        </p:nvSpPr>
+        <p:spPr/>
+        <p:txBody>
+          <a:bodyPr/>
+          <a:lstStyle/>
+          <a:p>
+            <a:fld id="{2A6723D5-B88C-DC4A-99B9-F7A549FFB66B}" type="slidenum">
+              <a:rPr lang="en-US" smtClean="0"/>
+              <a:t>3</a:t>
+            </a:fld>
+            <a:endParaRPr lang="en-US"/>
+          </a:p>
+        </p:txBody>
+      </p:sp>
+    </p:spTree>
+    <p:extLst>
+      <p:ext uri="{BB962C8B-B14F-4D97-AF65-F5344CB8AC3E}">
+        <p14:creationId xmlns:p14="http://schemas.microsoft.com/office/powerpoint/2010/main" val="3595330027"/>
+      </p:ext>
+    </p:extLst>
+  </p:cSld>
+  <p:clrMapOvr>
+    <a:masterClrMapping/>
+  </p:clrMapOvr>
+</p:notes>
+</file>
+
+<file path=ppt/notesSlides/notesSlide4.xml><?xml version="1.0" encoding="utf-8"?>
+<p:notes xmlns:a="http://schemas.openxmlformats.org/drawingml/2006/main" xmlns:r="http://schemas.openxmlformats.org/officeDocument/2006/relationships" xmlns:p="http://schemas.openxmlformats.org/presentationml/2006/main">
+  <p:cSld>
+    <p:spTree>
+      <p:nvGrpSpPr>
+        <p:cNvPr id="1" name=""/>
+        <p:cNvGrpSpPr/>
+        <p:nvPr/>
+      </p:nvGrpSpPr>
+      <p:grpSpPr>
+        <a:xfrm>
+          <a:off x="0" y="0"/>
+          <a:ext cx="0" cy="0"/>
+          <a:chOff x="0" y="0"/>
+          <a:chExt cx="0" cy="0"/>
+        </a:xfrm>
+      </p:grpSpPr>
+      <p:sp>
+        <p:nvSpPr>
+          <p:cNvPr id="2" name="Slide Image Placeholder 1"/>
+          <p:cNvSpPr>
+            <a:spLocks noGrp="1" noRot="1" noChangeAspect="1"/>
+          </p:cNvSpPr>
+          <p:nvPr>
+            <p:ph type="sldImg"/>
+          </p:nvPr>
+        </p:nvSpPr>
+        <p:spPr/>
+      </p:sp>
+      <p:sp>
+        <p:nvSpPr>
+          <p:cNvPr id="3" name="Notes Placeholder 2"/>
+          <p:cNvSpPr>
+            <a:spLocks noGrp="1"/>
+          </p:cNvSpPr>
+          <p:nvPr>
+            <p:ph type="body" idx="1"/>
+          </p:nvPr>
+        </p:nvSpPr>
+        <p:spPr/>
+        <p:txBody>
+          <a:bodyPr/>
+          <a:lstStyle/>
+          <a:p>
+            <a:r>
+              <a:rPr lang="en-US" sz="1200" kern="1200">
+                <a:solidFill>
+                  <a:schemeClr val="tx1"/>
+                </a:solidFill>
+                <a:effectLst/>
+                <a:latin typeface="+mn-lt"/>
+                <a:ea typeface="+mn-ea"/>
+                <a:cs typeface="+mn-cs"/>
+              </a:rPr>
+              <a:t>Flutter and Dart are a powerful combination, it’s what brings your app together!</a:t>
+            </a:r>
+            <a:br>
+              <a:rPr lang="en-US" sz="1200" kern="1200">
+                <a:solidFill>
+                  <a:schemeClr val="tx1"/>
+                </a:solidFill>
+                <a:effectLst/>
+                <a:latin typeface="+mn-lt"/>
+                <a:ea typeface="+mn-ea"/>
+                <a:cs typeface="+mn-cs"/>
+              </a:rPr>
+            </a:br>
+            <a:br>
+              <a:rPr lang="en-US" sz="1200" kern="1200">
+                <a:solidFill>
+                  <a:schemeClr val="tx1"/>
+                </a:solidFill>
+                <a:effectLst/>
+                <a:latin typeface="+mn-lt"/>
+                <a:ea typeface="+mn-ea"/>
+                <a:cs typeface="+mn-cs"/>
+              </a:rPr>
+            </a:br>
+            <a:r>
+              <a:rPr lang="en-US" sz="1200" kern="1200">
+                <a:solidFill>
+                  <a:schemeClr val="tx1"/>
+                </a:solidFill>
+                <a:effectLst/>
+                <a:latin typeface="+mn-lt"/>
+                <a:ea typeface="+mn-ea"/>
+                <a:cs typeface="+mn-cs"/>
+              </a:rPr>
+              <a:t>Flutter is the declarative UI framework, providing all the widgets and tools and visual structure that you need your applications. While in the background, Dart is handing all of the business logic that the app needs to run and handle the core logic of the application you are creating.</a:t>
+            </a:r>
+          </a:p>
+          <a:p>
+            <a:br>
+              <a:rPr lang="en-US" sz="1200" kern="1200">
+                <a:solidFill>
+                  <a:schemeClr val="tx1"/>
+                </a:solidFill>
+                <a:effectLst/>
+                <a:latin typeface="+mn-lt"/>
+                <a:ea typeface="+mn-ea"/>
+                <a:cs typeface="+mn-cs"/>
+              </a:rPr>
+            </a:br>
+            <a:endParaRPr lang="en-US" sz="1200" kern="1200">
+              <a:solidFill>
+                <a:schemeClr val="tx1"/>
+              </a:solidFill>
+              <a:effectLst/>
+              <a:latin typeface="+mn-lt"/>
+              <a:ea typeface="+mn-ea"/>
+              <a:cs typeface="+mn-cs"/>
+            </a:endParaRPr>
+          </a:p>
+          <a:p>
+            <a:r>
+              <a:rPr lang="en-US" sz="1200" kern="1200">
+                <a:solidFill>
+                  <a:schemeClr val="tx1"/>
+                </a:solidFill>
+                <a:effectLst/>
+                <a:latin typeface="+mn-lt"/>
+                <a:ea typeface="+mn-ea"/>
+                <a:cs typeface="+mn-cs"/>
+              </a:rPr>
+              <a:t>Both together makes your </a:t>
+            </a:r>
+            <a:r>
+              <a:rPr lang="en-US" sz="1200" kern="1200" err="1">
+                <a:solidFill>
+                  <a:schemeClr val="tx1"/>
+                </a:solidFill>
+                <a:effectLst/>
+                <a:latin typeface="+mn-lt"/>
+                <a:ea typeface="+mn-ea"/>
+                <a:cs typeface="+mn-cs"/>
+              </a:rPr>
+              <a:t>mutiplatform</a:t>
+            </a:r>
+            <a:r>
+              <a:rPr lang="en-US" sz="1200" kern="1200">
+                <a:solidFill>
+                  <a:schemeClr val="tx1"/>
+                </a:solidFill>
+                <a:effectLst/>
+                <a:latin typeface="+mn-lt"/>
+                <a:ea typeface="+mn-ea"/>
+                <a:cs typeface="+mn-cs"/>
+              </a:rPr>
+              <a:t> project run fast and smooth, allowing you to write one base code and deploy across mobile, web and server environments.</a:t>
+            </a:r>
+          </a:p>
+        </p:txBody>
+      </p:sp>
+      <p:sp>
+        <p:nvSpPr>
+          <p:cNvPr id="4" name="Slide Number Placeholder 3"/>
+          <p:cNvSpPr>
+            <a:spLocks noGrp="1"/>
+          </p:cNvSpPr>
+          <p:nvPr>
+            <p:ph type="sldNum" sz="quarter" idx="5"/>
+          </p:nvPr>
+        </p:nvSpPr>
+        <p:spPr/>
+        <p:txBody>
+          <a:bodyPr/>
+          <a:lstStyle/>
+          <a:p>
+            <a:fld id="{2A6723D5-B88C-DC4A-99B9-F7A549FFB66B}" type="slidenum">
+              <a:rPr lang="en-US" smtClean="0"/>
+              <a:t>4</a:t>
+            </a:fld>
+            <a:endParaRPr lang="en-US"/>
+          </a:p>
+        </p:txBody>
+      </p:sp>
+    </p:spTree>
+    <p:extLst>
+      <p:ext uri="{BB962C8B-B14F-4D97-AF65-F5344CB8AC3E}">
+        <p14:creationId xmlns:p14="http://schemas.microsoft.com/office/powerpoint/2010/main" val="122183520"/>
+      </p:ext>
+    </p:extLst>
+  </p:cSld>
+  <p:clrMapOvr>
+    <a:masterClrMapping/>
+  </p:clrMapOvr>
+</p:notes>
+</file>
+
+<file path=ppt/notesSlides/notesSlide5.xml><?xml version="1.0" encoding="utf-8"?>
+<p:notes xmlns:a="http://schemas.openxmlformats.org/drawingml/2006/main" xmlns:r="http://schemas.openxmlformats.org/officeDocument/2006/relationships" xmlns:p="http://schemas.openxmlformats.org/presentationml/2006/main">
+  <p:cSld>
+    <p:spTree>
+      <p:nvGrpSpPr>
+        <p:cNvPr id="1" name=""/>
+        <p:cNvGrpSpPr/>
+        <p:nvPr/>
+      </p:nvGrpSpPr>
+      <p:grpSpPr>
+        <a:xfrm>
+          <a:off x="0" y="0"/>
+          <a:ext cx="0" cy="0"/>
+          <a:chOff x="0" y="0"/>
+          <a:chExt cx="0" cy="0"/>
+        </a:xfrm>
+      </p:grpSpPr>
+      <p:sp>
+        <p:nvSpPr>
+          <p:cNvPr id="2" name="Slide Image Placeholder 1"/>
+          <p:cNvSpPr>
+            <a:spLocks noGrp="1" noRot="1" noChangeAspect="1"/>
+          </p:cNvSpPr>
+          <p:nvPr>
+            <p:ph type="sldImg"/>
+          </p:nvPr>
+        </p:nvSpPr>
+        <p:spPr/>
         <p:txBody>
           <a:bodyPr/>
           <a:lstStyle/>
@@ -2485,7 +3852,192 @@
           <a:bodyPr/>
           <a:lstStyle/>
           <a:p>
-            <a:endParaRPr lang="en-US"/>
+            <a:r>
+              <a:rPr lang="en-US" sz="1200" kern="1200">
+                <a:solidFill>
+                  <a:schemeClr val="tx1"/>
+                </a:solidFill>
+                <a:effectLst/>
+                <a:latin typeface="+mn-lt"/>
+                <a:ea typeface="+mn-ea"/>
+                <a:cs typeface="+mn-cs"/>
+              </a:rPr>
+              <a:t>Let’s break down quickly on how flutter works.</a:t>
+            </a:r>
+            <a:br>
+              <a:rPr lang="en-US" sz="1200" kern="1200">
+                <a:solidFill>
+                  <a:schemeClr val="tx1"/>
+                </a:solidFill>
+                <a:effectLst/>
+                <a:latin typeface="+mn-lt"/>
+                <a:ea typeface="+mn-ea"/>
+                <a:cs typeface="+mn-cs"/>
+              </a:rPr>
+            </a:br>
+            <a:endParaRPr lang="en-US" sz="1200" kern="1200">
+              <a:solidFill>
+                <a:schemeClr val="tx1"/>
+              </a:solidFill>
+              <a:effectLst/>
+              <a:latin typeface="+mn-lt"/>
+              <a:ea typeface="+mn-ea"/>
+              <a:cs typeface="+mn-cs"/>
+            </a:endParaRPr>
+          </a:p>
+          <a:p>
+            <a:r>
+              <a:rPr lang="en-US" sz="1200" kern="1200">
+                <a:solidFill>
+                  <a:schemeClr val="tx1"/>
+                </a:solidFill>
+                <a:effectLst/>
+                <a:latin typeface="+mn-lt"/>
+                <a:ea typeface="+mn-ea"/>
+                <a:cs typeface="+mn-cs"/>
+              </a:rPr>
+              <a:t>At the very top is your application code, this is where you combine UI widgets with your apps business logic and state management. That is where all of that lives.</a:t>
+            </a:r>
+            <a:br>
+              <a:rPr lang="en-US" sz="1200" kern="1200">
+                <a:solidFill>
+                  <a:schemeClr val="tx1"/>
+                </a:solidFill>
+                <a:effectLst/>
+                <a:latin typeface="+mn-lt"/>
+                <a:ea typeface="+mn-ea"/>
+                <a:cs typeface="+mn-cs"/>
+              </a:rPr>
+            </a:br>
+            <a:endParaRPr lang="en-US" sz="1200" kern="1200">
+              <a:solidFill>
+                <a:schemeClr val="tx1"/>
+              </a:solidFill>
+              <a:effectLst/>
+              <a:latin typeface="+mn-lt"/>
+              <a:ea typeface="+mn-ea"/>
+              <a:cs typeface="+mn-cs"/>
+            </a:endParaRPr>
+          </a:p>
+          <a:p>
+            <a:r>
+              <a:rPr lang="en-US" sz="1200" kern="1200">
+                <a:solidFill>
+                  <a:schemeClr val="tx1"/>
+                </a:solidFill>
+                <a:effectLst/>
+                <a:latin typeface="+mn-lt"/>
+                <a:ea typeface="+mn-ea"/>
+                <a:cs typeface="+mn-cs"/>
+              </a:rPr>
+              <a:t>Right underneath that is the Flutter framework. This part is where all of the widgets we had used live and all the other core components are. This also houses the Material and Cupertino themes, gesture detectors, text input and so much more. It takes all your widgets and creates them into the Widget Tree.</a:t>
+            </a:r>
+            <a:br>
+              <a:rPr lang="en-US" sz="1200" kern="1200">
+                <a:solidFill>
+                  <a:schemeClr val="tx1"/>
+                </a:solidFill>
+                <a:effectLst/>
+                <a:latin typeface="+mn-lt"/>
+                <a:ea typeface="+mn-ea"/>
+                <a:cs typeface="+mn-cs"/>
+              </a:rPr>
+            </a:br>
+            <a:endParaRPr lang="en-US" sz="1200" kern="1200">
+              <a:solidFill>
+                <a:schemeClr val="tx1"/>
+              </a:solidFill>
+              <a:effectLst/>
+              <a:latin typeface="+mn-lt"/>
+              <a:ea typeface="+mn-ea"/>
+              <a:cs typeface="+mn-cs"/>
+            </a:endParaRPr>
+          </a:p>
+          <a:p>
+            <a:r>
+              <a:rPr lang="en-US" sz="1200" kern="1200">
+                <a:solidFill>
+                  <a:schemeClr val="tx1"/>
+                </a:solidFill>
+                <a:effectLst/>
+                <a:latin typeface="+mn-lt"/>
+                <a:ea typeface="+mn-ea"/>
+                <a:cs typeface="+mn-cs"/>
+              </a:rPr>
+              <a:t>Then we enter the engine layer. This is where the Dart runtime is hosted, text layout management and handling system events. This area does the heavy lifting of the rendering of the application.</a:t>
+            </a:r>
+          </a:p>
+          <a:p>
+            <a:br>
+              <a:rPr lang="en-US" sz="1200" kern="1200">
+                <a:solidFill>
+                  <a:schemeClr val="tx1"/>
+                </a:solidFill>
+                <a:effectLst/>
+                <a:latin typeface="+mn-lt"/>
+                <a:ea typeface="+mn-ea"/>
+                <a:cs typeface="+mn-cs"/>
+              </a:rPr>
+            </a:br>
+            <a:endParaRPr lang="en-US" sz="1200" kern="1200">
+              <a:solidFill>
+                <a:schemeClr val="tx1"/>
+              </a:solidFill>
+              <a:effectLst/>
+              <a:latin typeface="+mn-lt"/>
+              <a:ea typeface="+mn-ea"/>
+              <a:cs typeface="+mn-cs"/>
+            </a:endParaRPr>
+          </a:p>
+          <a:p>
+            <a:r>
+              <a:rPr lang="en-US" sz="1200" kern="1200">
+                <a:solidFill>
+                  <a:schemeClr val="tx1"/>
+                </a:solidFill>
+                <a:effectLst/>
+                <a:latin typeface="+mn-lt"/>
+                <a:ea typeface="+mn-ea"/>
+                <a:cs typeface="+mn-cs"/>
+              </a:rPr>
+              <a:t>Below the engine sits the Embedder. The embedder is platform-specific—meaning Android, iOS, Windows, and macOS each have their own. It communicates directly with the host operating system to set up rendering surfaces, manage thread scheduling, pass touch inputs, and handle native accessibility events.</a:t>
+            </a:r>
+          </a:p>
+          <a:p>
+            <a:br>
+              <a:rPr lang="en-US" sz="1200" kern="1200">
+                <a:solidFill>
+                  <a:schemeClr val="tx1"/>
+                </a:solidFill>
+                <a:effectLst/>
+                <a:latin typeface="+mn-lt"/>
+                <a:ea typeface="+mn-ea"/>
+                <a:cs typeface="+mn-cs"/>
+              </a:rPr>
+            </a:br>
+            <a:endParaRPr lang="en-US" sz="1200" kern="1200">
+              <a:solidFill>
+                <a:schemeClr val="tx1"/>
+              </a:solidFill>
+              <a:effectLst/>
+              <a:latin typeface="+mn-lt"/>
+              <a:ea typeface="+mn-ea"/>
+              <a:cs typeface="+mn-cs"/>
+            </a:endParaRPr>
+          </a:p>
+          <a:p>
+            <a:r>
+              <a:rPr lang="en-US" sz="1200" kern="1200">
+                <a:solidFill>
+                  <a:schemeClr val="tx1"/>
+                </a:solidFill>
+                <a:effectLst/>
+                <a:latin typeface="+mn-lt"/>
+                <a:ea typeface="+mn-ea"/>
+                <a:cs typeface="+mn-cs"/>
+              </a:rPr>
+              <a:t>Finally, the runner. This is run when you type flutter create. This build up your project from a shell project and get the environment ready for creating your new program. Just like when you start a new project on Android Studio or Xcode.</a:t>
+            </a:r>
           </a:p>
         </p:txBody>
       </p:sp>
@@ -2516,6 +4068,863 @@
     <p:extLst>
       <p:ext uri="{BB962C8B-B14F-4D97-AF65-F5344CB8AC3E}">
         <p14:creationId xmlns:p14="http://schemas.microsoft.com/office/powerpoint/2010/main" val="3481831094"/>
+      </p:ext>
+    </p:extLst>
+  </p:cSld>
+  <p:clrMapOvr>
+    <a:masterClrMapping/>
+  </p:clrMapOvr>
+</p:notes>
+</file>
+
+<file path=ppt/notesSlides/notesSlide6.xml><?xml version="1.0" encoding="utf-8"?>
+<p:notes xmlns:a="http://schemas.openxmlformats.org/drawingml/2006/main" xmlns:r="http://schemas.openxmlformats.org/officeDocument/2006/relationships" xmlns:p="http://schemas.openxmlformats.org/presentationml/2006/main">
+  <p:cSld>
+    <p:spTree>
+      <p:nvGrpSpPr>
+        <p:cNvPr id="1" name=""/>
+        <p:cNvGrpSpPr/>
+        <p:nvPr/>
+      </p:nvGrpSpPr>
+      <p:grpSpPr>
+        <a:xfrm>
+          <a:off x="0" y="0"/>
+          <a:ext cx="0" cy="0"/>
+          <a:chOff x="0" y="0"/>
+          <a:chExt cx="0" cy="0"/>
+        </a:xfrm>
+      </p:grpSpPr>
+      <p:sp>
+        <p:nvSpPr>
+          <p:cNvPr id="2" name="Slide Image Placeholder 1"/>
+          <p:cNvSpPr>
+            <a:spLocks noGrp="1" noRot="1" noChangeAspect="1"/>
+          </p:cNvSpPr>
+          <p:nvPr>
+            <p:ph type="sldImg"/>
+          </p:nvPr>
+        </p:nvSpPr>
+        <p:spPr/>
+      </p:sp>
+      <p:sp>
+        <p:nvSpPr>
+          <p:cNvPr id="3" name="Notes Placeholder 2"/>
+          <p:cNvSpPr>
+            <a:spLocks noGrp="1"/>
+          </p:cNvSpPr>
+          <p:nvPr>
+            <p:ph type="body" idx="1"/>
+          </p:nvPr>
+        </p:nvSpPr>
+        <p:spPr/>
+        <p:txBody>
+          <a:bodyPr/>
+          <a:lstStyle/>
+          <a:p>
+            <a:r>
+              <a:rPr lang="en-US" sz="1200" kern="1200">
+                <a:solidFill>
+                  <a:schemeClr val="tx1"/>
+                </a:solidFill>
+                <a:effectLst/>
+                <a:latin typeface="+mn-lt"/>
+                <a:ea typeface="+mn-ea"/>
+                <a:cs typeface="+mn-cs"/>
+              </a:rPr>
+              <a:t>When building with Flutter, one thing to remember is that almost everything that you see and use in your application is a widgets. Widgets are the fundamental building block of any Flutter project you create.</a:t>
+            </a:r>
+            <a:br>
+              <a:rPr lang="en-US" sz="1200" kern="1200">
+                <a:solidFill>
+                  <a:schemeClr val="tx1"/>
+                </a:solidFill>
+                <a:effectLst/>
+                <a:latin typeface="+mn-lt"/>
+                <a:ea typeface="+mn-ea"/>
+                <a:cs typeface="+mn-cs"/>
+              </a:rPr>
+            </a:br>
+            <a:br>
+              <a:rPr lang="en-US" sz="1200" kern="1200">
+                <a:solidFill>
+                  <a:schemeClr val="tx1"/>
+                </a:solidFill>
+                <a:effectLst/>
+                <a:latin typeface="+mn-lt"/>
+                <a:ea typeface="+mn-ea"/>
+                <a:cs typeface="+mn-cs"/>
+              </a:rPr>
+            </a:br>
+            <a:r>
+              <a:rPr lang="en-US" sz="1200" kern="1200">
+                <a:solidFill>
+                  <a:schemeClr val="tx1"/>
+                </a:solidFill>
+                <a:effectLst/>
+                <a:latin typeface="+mn-lt"/>
+                <a:ea typeface="+mn-ea"/>
+                <a:cs typeface="+mn-cs"/>
+              </a:rPr>
+              <a:t>The framework comes packed with a large library of pre-built widgets out of the box. You have all the basic widgets for rendering text and images as well as helping creating layouts. All the pre-build widgets are also very customizable so your apps can be unique.</a:t>
+            </a:r>
+          </a:p>
+          <a:p>
+            <a:br>
+              <a:rPr lang="en-US" sz="1200" kern="1200">
+                <a:solidFill>
+                  <a:schemeClr val="tx1"/>
+                </a:solidFill>
+                <a:effectLst/>
+                <a:latin typeface="+mn-lt"/>
+                <a:ea typeface="+mn-ea"/>
+                <a:cs typeface="+mn-cs"/>
+              </a:rPr>
+            </a:br>
+            <a:endParaRPr lang="en-US" sz="1200" kern="1200">
+              <a:solidFill>
+                <a:schemeClr val="tx1"/>
+              </a:solidFill>
+              <a:effectLst/>
+              <a:latin typeface="+mn-lt"/>
+              <a:ea typeface="+mn-ea"/>
+              <a:cs typeface="+mn-cs"/>
+            </a:endParaRPr>
+          </a:p>
+          <a:p>
+            <a:r>
+              <a:rPr lang="en-US" sz="1200" kern="1200">
+                <a:solidFill>
+                  <a:schemeClr val="tx1"/>
+                </a:solidFill>
+                <a:effectLst/>
+                <a:latin typeface="+mn-lt"/>
+                <a:ea typeface="+mn-ea"/>
+                <a:cs typeface="+mn-cs"/>
+              </a:rPr>
+              <a:t>Beyond just the built in widgets, there are massive community driven ecosystems alongside Googles first party packages. Every widgets are created to be highly customizable, flexible giving you a strong sense of freedom when creating the app.</a:t>
+            </a:r>
+          </a:p>
+          <a:p>
+            <a:br>
+              <a:rPr lang="en-US" sz="1200" kern="1200">
+                <a:solidFill>
+                  <a:schemeClr val="tx1"/>
+                </a:solidFill>
+                <a:effectLst/>
+                <a:latin typeface="+mn-lt"/>
+                <a:ea typeface="+mn-ea"/>
+                <a:cs typeface="+mn-cs"/>
+              </a:rPr>
+            </a:br>
+            <a:endParaRPr lang="en-US" sz="1200" kern="1200">
+              <a:solidFill>
+                <a:schemeClr val="tx1"/>
+              </a:solidFill>
+              <a:effectLst/>
+              <a:latin typeface="+mn-lt"/>
+              <a:ea typeface="+mn-ea"/>
+              <a:cs typeface="+mn-cs"/>
+            </a:endParaRPr>
+          </a:p>
+          <a:p>
+            <a:r>
+              <a:rPr lang="en-US" sz="1200" kern="1200">
+                <a:solidFill>
+                  <a:schemeClr val="tx1"/>
+                </a:solidFill>
+                <a:effectLst/>
+                <a:latin typeface="+mn-lt"/>
+                <a:ea typeface="+mn-ea"/>
+                <a:cs typeface="+mn-cs"/>
+              </a:rPr>
+              <a:t>As you can see on the screen, there are some of the moist common widgets you’ll work with daily with every project you create.</a:t>
+            </a:r>
+          </a:p>
+        </p:txBody>
+      </p:sp>
+      <p:sp>
+        <p:nvSpPr>
+          <p:cNvPr id="4" name="Slide Number Placeholder 3"/>
+          <p:cNvSpPr>
+            <a:spLocks noGrp="1"/>
+          </p:cNvSpPr>
+          <p:nvPr>
+            <p:ph type="sldNum" sz="quarter" idx="5"/>
+          </p:nvPr>
+        </p:nvSpPr>
+        <p:spPr/>
+        <p:txBody>
+          <a:bodyPr/>
+          <a:lstStyle/>
+          <a:p>
+            <a:fld id="{2A6723D5-B88C-DC4A-99B9-F7A549FFB66B}" type="slidenum">
+              <a:rPr lang="en-US" smtClean="0"/>
+              <a:t>6</a:t>
+            </a:fld>
+            <a:endParaRPr lang="en-US"/>
+          </a:p>
+        </p:txBody>
+      </p:sp>
+    </p:spTree>
+    <p:extLst>
+      <p:ext uri="{BB962C8B-B14F-4D97-AF65-F5344CB8AC3E}">
+        <p14:creationId xmlns:p14="http://schemas.microsoft.com/office/powerpoint/2010/main" val="1615743911"/>
+      </p:ext>
+    </p:extLst>
+  </p:cSld>
+  <p:clrMapOvr>
+    <a:masterClrMapping/>
+  </p:clrMapOvr>
+</p:notes>
+</file>
+
+<file path=ppt/notesSlides/notesSlide7.xml><?xml version="1.0" encoding="utf-8"?>
+<p:notes xmlns:a="http://schemas.openxmlformats.org/drawingml/2006/main" xmlns:r="http://schemas.openxmlformats.org/officeDocument/2006/relationships" xmlns:p="http://schemas.openxmlformats.org/presentationml/2006/main">
+  <p:cSld>
+    <p:spTree>
+      <p:nvGrpSpPr>
+        <p:cNvPr id="1" name=""/>
+        <p:cNvGrpSpPr/>
+        <p:nvPr/>
+      </p:nvGrpSpPr>
+      <p:grpSpPr>
+        <a:xfrm>
+          <a:off x="0" y="0"/>
+          <a:ext cx="0" cy="0"/>
+          <a:chOff x="0" y="0"/>
+          <a:chExt cx="0" cy="0"/>
+        </a:xfrm>
+      </p:grpSpPr>
+      <p:sp>
+        <p:nvSpPr>
+          <p:cNvPr id="2" name="Slide Image Placeholder 1"/>
+          <p:cNvSpPr>
+            <a:spLocks noGrp="1" noRot="1" noChangeAspect="1"/>
+          </p:cNvSpPr>
+          <p:nvPr>
+            <p:ph type="sldImg"/>
+          </p:nvPr>
+        </p:nvSpPr>
+        <p:spPr/>
+      </p:sp>
+      <p:sp>
+        <p:nvSpPr>
+          <p:cNvPr id="3" name="Notes Placeholder 2"/>
+          <p:cNvSpPr>
+            <a:spLocks noGrp="1"/>
+          </p:cNvSpPr>
+          <p:nvPr>
+            <p:ph type="body" idx="1"/>
+          </p:nvPr>
+        </p:nvSpPr>
+        <p:spPr/>
+        <p:txBody>
+          <a:bodyPr/>
+          <a:lstStyle/>
+          <a:p>
+            <a:r>
+              <a:rPr lang="en-US" sz="1200" kern="1200">
+                <a:solidFill>
+                  <a:schemeClr val="tx1"/>
+                </a:solidFill>
+                <a:effectLst/>
+                <a:latin typeface="+mn-lt"/>
+                <a:ea typeface="+mn-ea"/>
+                <a:cs typeface="+mn-cs"/>
+              </a:rPr>
+              <a:t>Now we have an understanding on widgets to build our UI, we will explain how they handle changes. IN Flutter there are to main states that your widgets can be; Stateless and Stateful.</a:t>
+            </a:r>
+          </a:p>
+          <a:p>
+            <a:br>
+              <a:rPr lang="en-US" sz="1200" kern="1200">
+                <a:solidFill>
+                  <a:schemeClr val="tx1"/>
+                </a:solidFill>
+                <a:effectLst/>
+                <a:latin typeface="+mn-lt"/>
+                <a:ea typeface="+mn-ea"/>
+                <a:cs typeface="+mn-cs"/>
+              </a:rPr>
+            </a:br>
+            <a:endParaRPr lang="en-US" sz="1200" kern="1200">
+              <a:solidFill>
+                <a:schemeClr val="tx1"/>
+              </a:solidFill>
+              <a:effectLst/>
+              <a:latin typeface="+mn-lt"/>
+              <a:ea typeface="+mn-ea"/>
+              <a:cs typeface="+mn-cs"/>
+            </a:endParaRPr>
+          </a:p>
+          <a:p>
+            <a:r>
+              <a:rPr lang="en-US" sz="1200" kern="1200">
+                <a:solidFill>
+                  <a:schemeClr val="tx1"/>
+                </a:solidFill>
+                <a:effectLst/>
+                <a:latin typeface="+mn-lt"/>
+                <a:ea typeface="+mn-ea"/>
+                <a:cs typeface="+mn-cs"/>
+              </a:rPr>
+              <a:t>A Stateless Widget is immutable- meaning once the widget is built, it will never change. The contents remain fix regardless upon user interaction or app activity. A good example is the top app bar which might hold a static icon and text.</a:t>
+            </a:r>
+            <a:br>
+              <a:rPr lang="en-US" sz="1200" kern="1200">
+                <a:solidFill>
+                  <a:schemeClr val="tx1"/>
+                </a:solidFill>
+                <a:effectLst/>
+                <a:latin typeface="+mn-lt"/>
+                <a:ea typeface="+mn-ea"/>
+                <a:cs typeface="+mn-cs"/>
+              </a:rPr>
+            </a:br>
+            <a:br>
+              <a:rPr lang="en-US" sz="1200" kern="1200">
+                <a:solidFill>
+                  <a:schemeClr val="tx1"/>
+                </a:solidFill>
+                <a:effectLst/>
+                <a:latin typeface="+mn-lt"/>
+                <a:ea typeface="+mn-ea"/>
+                <a:cs typeface="+mn-cs"/>
+              </a:rPr>
+            </a:br>
+            <a:r>
+              <a:rPr lang="en-US" sz="1200" kern="1200">
+                <a:solidFill>
+                  <a:schemeClr val="tx1"/>
+                </a:solidFill>
+                <a:effectLst/>
+                <a:latin typeface="+mn-lt"/>
+                <a:ea typeface="+mn-ea"/>
+                <a:cs typeface="+mn-cs"/>
+              </a:rPr>
+              <a:t>On the other hand, you have stateful Widgets which are dynamic in nature. It can update its state and re-render its contents on the fly while the app is running. This helps make the app interactive where you need it to be. For example ,you could have a counter, text failed, and/or a toggle switch. In your app you may want details updating live to display weather information.</a:t>
+            </a:r>
+          </a:p>
+          <a:p>
+            <a:br>
+              <a:rPr lang="en-US" sz="1200" kern="1200">
+                <a:solidFill>
+                  <a:schemeClr val="tx1"/>
+                </a:solidFill>
+                <a:effectLst/>
+                <a:latin typeface="+mn-lt"/>
+                <a:ea typeface="+mn-ea"/>
+                <a:cs typeface="+mn-cs"/>
+              </a:rPr>
+            </a:br>
+            <a:endParaRPr lang="en-US" sz="1200" kern="1200">
+              <a:solidFill>
+                <a:schemeClr val="tx1"/>
+              </a:solidFill>
+              <a:effectLst/>
+              <a:latin typeface="+mn-lt"/>
+              <a:ea typeface="+mn-ea"/>
+              <a:cs typeface="+mn-cs"/>
+            </a:endParaRPr>
+          </a:p>
+          <a:p>
+            <a:r>
+              <a:rPr lang="en-US" sz="1200" kern="1200">
+                <a:solidFill>
+                  <a:schemeClr val="tx1"/>
+                </a:solidFill>
+                <a:effectLst/>
+                <a:latin typeface="+mn-lt"/>
+                <a:ea typeface="+mn-ea"/>
+                <a:cs typeface="+mn-cs"/>
+              </a:rPr>
+              <a:t>Flutter efficiently rebuilds only the parts of the UI that need updating.</a:t>
+            </a:r>
+          </a:p>
+        </p:txBody>
+      </p:sp>
+      <p:sp>
+        <p:nvSpPr>
+          <p:cNvPr id="4" name="Slide Number Placeholder 3"/>
+          <p:cNvSpPr>
+            <a:spLocks noGrp="1"/>
+          </p:cNvSpPr>
+          <p:nvPr>
+            <p:ph type="sldNum" sz="quarter" idx="5"/>
+          </p:nvPr>
+        </p:nvSpPr>
+        <p:spPr/>
+        <p:txBody>
+          <a:bodyPr/>
+          <a:lstStyle/>
+          <a:p>
+            <a:fld id="{2A6723D5-B88C-DC4A-99B9-F7A549FFB66B}" type="slidenum">
+              <a:rPr lang="en-US" smtClean="0"/>
+              <a:t>7</a:t>
+            </a:fld>
+            <a:endParaRPr lang="en-US"/>
+          </a:p>
+        </p:txBody>
+      </p:sp>
+    </p:spTree>
+    <p:extLst>
+      <p:ext uri="{BB962C8B-B14F-4D97-AF65-F5344CB8AC3E}">
+        <p14:creationId xmlns:p14="http://schemas.microsoft.com/office/powerpoint/2010/main" val="2374059631"/>
+      </p:ext>
+    </p:extLst>
+  </p:cSld>
+  <p:clrMapOvr>
+    <a:masterClrMapping/>
+  </p:clrMapOvr>
+</p:notes>
+</file>
+
+<file path=ppt/notesSlides/notesSlide8.xml><?xml version="1.0" encoding="utf-8"?>
+<p:notes xmlns:a="http://schemas.openxmlformats.org/drawingml/2006/main" xmlns:r="http://schemas.openxmlformats.org/officeDocument/2006/relationships" xmlns:p="http://schemas.openxmlformats.org/presentationml/2006/main">
+  <p:cSld>
+    <p:spTree>
+      <p:nvGrpSpPr>
+        <p:cNvPr id="1" name=""/>
+        <p:cNvGrpSpPr/>
+        <p:nvPr/>
+      </p:nvGrpSpPr>
+      <p:grpSpPr>
+        <a:xfrm>
+          <a:off x="0" y="0"/>
+          <a:ext cx="0" cy="0"/>
+          <a:chOff x="0" y="0"/>
+          <a:chExt cx="0" cy="0"/>
+        </a:xfrm>
+      </p:grpSpPr>
+      <p:sp>
+        <p:nvSpPr>
+          <p:cNvPr id="2" name="Slide Image Placeholder 1"/>
+          <p:cNvSpPr>
+            <a:spLocks noGrp="1" noRot="1" noChangeAspect="1"/>
+          </p:cNvSpPr>
+          <p:nvPr>
+            <p:ph type="sldImg"/>
+          </p:nvPr>
+        </p:nvSpPr>
+        <p:spPr/>
+      </p:sp>
+      <p:sp>
+        <p:nvSpPr>
+          <p:cNvPr id="3" name="Notes Placeholder 2"/>
+          <p:cNvSpPr>
+            <a:spLocks noGrp="1"/>
+          </p:cNvSpPr>
+          <p:nvPr>
+            <p:ph type="body" idx="1"/>
+          </p:nvPr>
+        </p:nvSpPr>
+        <p:spPr/>
+        <p:txBody>
+          <a:bodyPr/>
+          <a:lstStyle/>
+          <a:p>
+            <a:r>
+              <a:rPr lang="en-US" sz="1200" kern="1200">
+                <a:solidFill>
+                  <a:schemeClr val="tx1"/>
+                </a:solidFill>
+                <a:effectLst/>
+                <a:latin typeface="+mn-lt"/>
+                <a:ea typeface="+mn-ea"/>
+                <a:cs typeface="+mn-cs"/>
+              </a:rPr>
+              <a:t>Let’s look at code example above.</a:t>
+            </a:r>
+          </a:p>
+          <a:p>
+            <a:br>
+              <a:rPr lang="en-US" sz="1200" kern="1200">
+                <a:solidFill>
+                  <a:schemeClr val="tx1"/>
+                </a:solidFill>
+                <a:effectLst/>
+                <a:latin typeface="+mn-lt"/>
+                <a:ea typeface="+mn-ea"/>
+                <a:cs typeface="+mn-cs"/>
+              </a:rPr>
+            </a:br>
+            <a:r>
+              <a:rPr lang="en-US" sz="1200" kern="1200">
+                <a:solidFill>
+                  <a:schemeClr val="tx1"/>
+                </a:solidFill>
+                <a:effectLst/>
+                <a:latin typeface="+mn-lt"/>
+                <a:ea typeface="+mn-ea"/>
+                <a:cs typeface="+mn-cs"/>
+              </a:rPr>
+              <a:t>On line one we’re importing Google’s Material Design package, which gives us all the core visual styling and widgets needed for the app.</a:t>
+            </a:r>
+          </a:p>
+          <a:p>
+            <a:br>
+              <a:rPr lang="en-US" sz="1200" kern="1200">
+                <a:solidFill>
+                  <a:schemeClr val="tx1"/>
+                </a:solidFill>
+                <a:effectLst/>
+                <a:latin typeface="+mn-lt"/>
+                <a:ea typeface="+mn-ea"/>
+                <a:cs typeface="+mn-cs"/>
+              </a:rPr>
+            </a:br>
+            <a:endParaRPr lang="en-US" sz="1200" kern="1200">
+              <a:solidFill>
+                <a:schemeClr val="tx1"/>
+              </a:solidFill>
+              <a:effectLst/>
+              <a:latin typeface="+mn-lt"/>
+              <a:ea typeface="+mn-ea"/>
+              <a:cs typeface="+mn-cs"/>
+            </a:endParaRPr>
+          </a:p>
+          <a:p>
+            <a:r>
+              <a:rPr lang="en-US" sz="1200" kern="1200">
+                <a:solidFill>
+                  <a:schemeClr val="tx1"/>
+                </a:solidFill>
+                <a:effectLst/>
+                <a:latin typeface="+mn-lt"/>
+                <a:ea typeface="+mn-ea"/>
+                <a:cs typeface="+mn-cs"/>
+              </a:rPr>
+              <a:t>On line three, we have void main, which is the entry point for every Dart application.</a:t>
+            </a:r>
+          </a:p>
+          <a:p>
+            <a:br>
+              <a:rPr lang="en-US" sz="1200" kern="1200">
+                <a:solidFill>
+                  <a:schemeClr val="tx1"/>
+                </a:solidFill>
+                <a:effectLst/>
+                <a:latin typeface="+mn-lt"/>
+                <a:ea typeface="+mn-ea"/>
+                <a:cs typeface="+mn-cs"/>
+              </a:rPr>
+            </a:br>
+            <a:endParaRPr lang="en-US" sz="1200" kern="1200">
+              <a:solidFill>
+                <a:schemeClr val="tx1"/>
+              </a:solidFill>
+              <a:effectLst/>
+              <a:latin typeface="+mn-lt"/>
+              <a:ea typeface="+mn-ea"/>
+              <a:cs typeface="+mn-cs"/>
+            </a:endParaRPr>
+          </a:p>
+          <a:p>
+            <a:r>
+              <a:rPr lang="en-US" sz="1200" kern="1200">
+                <a:solidFill>
+                  <a:schemeClr val="tx1"/>
+                </a:solidFill>
+                <a:effectLst/>
+                <a:latin typeface="+mn-lt"/>
+                <a:ea typeface="+mn-ea"/>
+                <a:cs typeface="+mn-cs"/>
+              </a:rPr>
+              <a:t>Inside main on line 4, </a:t>
+            </a:r>
+            <a:r>
+              <a:rPr lang="en-US" sz="1200" kern="1200" err="1">
+                <a:solidFill>
+                  <a:schemeClr val="tx1"/>
+                </a:solidFill>
+                <a:effectLst/>
+                <a:latin typeface="+mn-lt"/>
+                <a:ea typeface="+mn-ea"/>
+                <a:cs typeface="+mn-cs"/>
+              </a:rPr>
+              <a:t>runApp</a:t>
+            </a:r>
+            <a:r>
+              <a:rPr lang="en-US" sz="1200" kern="1200">
+                <a:solidFill>
+                  <a:schemeClr val="tx1"/>
+                </a:solidFill>
+                <a:effectLst/>
+                <a:latin typeface="+mn-lt"/>
+                <a:ea typeface="+mn-ea"/>
+                <a:cs typeface="+mn-cs"/>
+              </a:rPr>
+              <a:t> is a built in Flutter function that creates the root of the widget tree.</a:t>
+            </a:r>
+          </a:p>
+          <a:p>
+            <a:br>
+              <a:rPr lang="en-US" sz="1200" kern="1200">
+                <a:solidFill>
+                  <a:schemeClr val="tx1"/>
+                </a:solidFill>
+                <a:effectLst/>
+                <a:latin typeface="+mn-lt"/>
+                <a:ea typeface="+mn-ea"/>
+                <a:cs typeface="+mn-cs"/>
+              </a:rPr>
+            </a:br>
+            <a:endParaRPr lang="en-US" sz="1200" kern="1200">
+              <a:solidFill>
+                <a:schemeClr val="tx1"/>
+              </a:solidFill>
+              <a:effectLst/>
+              <a:latin typeface="+mn-lt"/>
+              <a:ea typeface="+mn-ea"/>
+              <a:cs typeface="+mn-cs"/>
+            </a:endParaRPr>
+          </a:p>
+          <a:p>
+            <a:r>
+              <a:rPr lang="en-US" sz="1200" kern="1200">
+                <a:solidFill>
+                  <a:schemeClr val="tx1"/>
+                </a:solidFill>
+                <a:effectLst/>
+                <a:latin typeface="+mn-lt"/>
+                <a:ea typeface="+mn-ea"/>
+                <a:cs typeface="+mn-cs"/>
+              </a:rPr>
+              <a:t>Finally, you’ll see the home property, which acts as the default route or main screen of your app. In this case, it simply holds a Text widget displaying 'Hello Flutter'.</a:t>
+            </a:r>
+          </a:p>
+          <a:p>
+            <a:br>
+              <a:rPr lang="en-US" sz="1200" kern="1200">
+                <a:solidFill>
+                  <a:schemeClr val="tx1"/>
+                </a:solidFill>
+                <a:effectLst/>
+                <a:latin typeface="+mn-lt"/>
+                <a:ea typeface="+mn-ea"/>
+                <a:cs typeface="+mn-cs"/>
+              </a:rPr>
+            </a:br>
+            <a:endParaRPr lang="en-US" sz="1200" kern="1200">
+              <a:solidFill>
+                <a:schemeClr val="tx1"/>
+              </a:solidFill>
+              <a:effectLst/>
+              <a:latin typeface="+mn-lt"/>
+              <a:ea typeface="+mn-ea"/>
+              <a:cs typeface="+mn-cs"/>
+            </a:endParaRPr>
+          </a:p>
+          <a:p>
+            <a:r>
+              <a:rPr lang="en-US" sz="1200" kern="1200">
+                <a:solidFill>
+                  <a:schemeClr val="tx1"/>
+                </a:solidFill>
+                <a:effectLst/>
+                <a:latin typeface="+mn-lt"/>
+                <a:ea typeface="+mn-ea"/>
+                <a:cs typeface="+mn-cs"/>
+              </a:rPr>
+              <a:t>Now, obviously, this is a very bare-bones starting point, but don’t be fooled as the lab will take you from this basic snippet to writing properly structured code. Trust me, once you get the hand of it it’s much easier than you think.</a:t>
+            </a:r>
+          </a:p>
+        </p:txBody>
+      </p:sp>
+      <p:sp>
+        <p:nvSpPr>
+          <p:cNvPr id="4" name="Slide Number Placeholder 3"/>
+          <p:cNvSpPr>
+            <a:spLocks noGrp="1"/>
+          </p:cNvSpPr>
+          <p:nvPr>
+            <p:ph type="sldNum" sz="quarter" idx="5"/>
+          </p:nvPr>
+        </p:nvSpPr>
+        <p:spPr/>
+        <p:txBody>
+          <a:bodyPr/>
+          <a:lstStyle/>
+          <a:p>
+            <a:fld id="{2A6723D5-B88C-DC4A-99B9-F7A549FFB66B}" type="slidenum">
+              <a:rPr lang="en-US" smtClean="0"/>
+              <a:t>8</a:t>
+            </a:fld>
+            <a:endParaRPr lang="en-US"/>
+          </a:p>
+        </p:txBody>
+      </p:sp>
+    </p:spTree>
+    <p:extLst>
+      <p:ext uri="{BB962C8B-B14F-4D97-AF65-F5344CB8AC3E}">
+        <p14:creationId xmlns:p14="http://schemas.microsoft.com/office/powerpoint/2010/main" val="866647360"/>
+      </p:ext>
+    </p:extLst>
+  </p:cSld>
+  <p:clrMapOvr>
+    <a:masterClrMapping/>
+  </p:clrMapOvr>
+</p:notes>
+</file>
+
+<file path=ppt/notesSlides/notesSlide9.xml><?xml version="1.0" encoding="utf-8"?>
+<p:notes xmlns:a="http://schemas.openxmlformats.org/drawingml/2006/main" xmlns:r="http://schemas.openxmlformats.org/officeDocument/2006/relationships" xmlns:p="http://schemas.openxmlformats.org/presentationml/2006/main">
+  <p:cSld>
+    <p:spTree>
+      <p:nvGrpSpPr>
+        <p:cNvPr id="1" name=""/>
+        <p:cNvGrpSpPr/>
+        <p:nvPr/>
+      </p:nvGrpSpPr>
+      <p:grpSpPr>
+        <a:xfrm>
+          <a:off x="0" y="0"/>
+          <a:ext cx="0" cy="0"/>
+          <a:chOff x="0" y="0"/>
+          <a:chExt cx="0" cy="0"/>
+        </a:xfrm>
+      </p:grpSpPr>
+      <p:sp>
+        <p:nvSpPr>
+          <p:cNvPr id="2" name="Slide Image Placeholder 1"/>
+          <p:cNvSpPr>
+            <a:spLocks noGrp="1" noRot="1" noChangeAspect="1"/>
+          </p:cNvSpPr>
+          <p:nvPr>
+            <p:ph type="sldImg"/>
+          </p:nvPr>
+        </p:nvSpPr>
+        <p:spPr/>
+      </p:sp>
+      <p:sp>
+        <p:nvSpPr>
+          <p:cNvPr id="3" name="Notes Placeholder 2"/>
+          <p:cNvSpPr>
+            <a:spLocks noGrp="1"/>
+          </p:cNvSpPr>
+          <p:nvPr>
+            <p:ph type="body" idx="1"/>
+          </p:nvPr>
+        </p:nvSpPr>
+        <p:spPr/>
+        <p:txBody>
+          <a:bodyPr/>
+          <a:lstStyle/>
+          <a:p>
+            <a:r>
+              <a:rPr lang="en-US" sz="1200" kern="1200">
+                <a:solidFill>
+                  <a:schemeClr val="tx1"/>
+                </a:solidFill>
+                <a:effectLst/>
+                <a:latin typeface="+mn-lt"/>
+                <a:ea typeface="+mn-ea"/>
+                <a:cs typeface="+mn-cs"/>
+              </a:rPr>
+              <a:t>Now we can have a look at how Flutter app connects to the wider world. An app is rarely offline based, it will use the cloud for more eleven up-to-date data.</a:t>
+            </a:r>
+          </a:p>
+          <a:p>
+            <a:br>
+              <a:rPr lang="en-US" sz="1200" kern="1200">
+                <a:solidFill>
+                  <a:schemeClr val="tx1"/>
+                </a:solidFill>
+                <a:effectLst/>
+                <a:latin typeface="+mn-lt"/>
+                <a:ea typeface="+mn-ea"/>
+                <a:cs typeface="+mn-cs"/>
+              </a:rPr>
+            </a:br>
+            <a:endParaRPr lang="en-US" sz="1200" kern="1200">
+              <a:solidFill>
+                <a:schemeClr val="tx1"/>
+              </a:solidFill>
+              <a:effectLst/>
+              <a:latin typeface="+mn-lt"/>
+              <a:ea typeface="+mn-ea"/>
+              <a:cs typeface="+mn-cs"/>
+            </a:endParaRPr>
+          </a:p>
+          <a:p>
+            <a:r>
+              <a:rPr lang="en-US" sz="1200" kern="1200">
+                <a:solidFill>
+                  <a:schemeClr val="tx1"/>
+                </a:solidFill>
+                <a:effectLst/>
+                <a:latin typeface="+mn-lt"/>
+                <a:ea typeface="+mn-ea"/>
+                <a:cs typeface="+mn-cs"/>
+              </a:rPr>
+              <a:t>As you can see in this diagram, an Android/IOS app built with flutter communicates with a backend RST API to request information. When a request is made, the backend server retrieves the data from a database and sends a response back through the API.</a:t>
+            </a:r>
+          </a:p>
+          <a:p>
+            <a:br>
+              <a:rPr lang="en-US" sz="1200" kern="1200">
+                <a:solidFill>
+                  <a:schemeClr val="tx1"/>
+                </a:solidFill>
+                <a:effectLst/>
+                <a:latin typeface="+mn-lt"/>
+                <a:ea typeface="+mn-ea"/>
+                <a:cs typeface="+mn-cs"/>
+              </a:rPr>
+            </a:br>
+            <a:endParaRPr lang="en-US" sz="1200" kern="1200">
+              <a:solidFill>
+                <a:schemeClr val="tx1"/>
+              </a:solidFill>
+              <a:effectLst/>
+              <a:latin typeface="+mn-lt"/>
+              <a:ea typeface="+mn-ea"/>
+              <a:cs typeface="+mn-cs"/>
+            </a:endParaRPr>
+          </a:p>
+          <a:p>
+            <a:r>
+              <a:rPr lang="en-US" sz="1200" kern="1200">
+                <a:solidFill>
+                  <a:schemeClr val="tx1"/>
+                </a:solidFill>
+                <a:effectLst/>
+                <a:latin typeface="+mn-lt"/>
+                <a:ea typeface="+mn-ea"/>
+                <a:cs typeface="+mn-cs"/>
+              </a:rPr>
+              <a:t>While Flutter handles the visual UI rendering on the device, Dart is working simultaneously in the background to handle the network requests, parse the incoming data, and prepare it for the app.</a:t>
+            </a:r>
+          </a:p>
+        </p:txBody>
+      </p:sp>
+      <p:sp>
+        <p:nvSpPr>
+          <p:cNvPr id="4" name="Slide Number Placeholder 3"/>
+          <p:cNvSpPr>
+            <a:spLocks noGrp="1"/>
+          </p:cNvSpPr>
+          <p:nvPr>
+            <p:ph type="sldNum" sz="quarter" idx="5"/>
+          </p:nvPr>
+        </p:nvSpPr>
+        <p:spPr/>
+        <p:txBody>
+          <a:bodyPr/>
+          <a:lstStyle/>
+          <a:p>
+            <a:fld id="{2A6723D5-B88C-DC4A-99B9-F7A549FFB66B}" type="slidenum">
+              <a:rPr lang="en-US" smtClean="0"/>
+              <a:t>9</a:t>
+            </a:fld>
+            <a:endParaRPr lang="en-US"/>
+          </a:p>
+        </p:txBody>
+      </p:sp>
+    </p:spTree>
+    <p:extLst>
+      <p:ext uri="{BB962C8B-B14F-4D97-AF65-F5344CB8AC3E}">
+        <p14:creationId xmlns:p14="http://schemas.microsoft.com/office/powerpoint/2010/main" val="1752183747"/>
       </p:ext>
     </p:extLst>
   </p:cSld>
@@ -2654,7 +5063,7 @@
           <a:p>
             <a:fld id="{846CE7D5-CF57-46EF-B807-FDD0502418D4}" type="datetimeFigureOut">
               <a:rPr lang="en-GB" smtClean="0"/>
-              <a:t>09/10/2026</a:t>
+              <a:t>13/10/2026</a:t>
             </a:fld>
             <a:endParaRPr lang="en-GB"/>
           </a:p>
@@ -2822,7 +5231,7 @@
           <a:p>
             <a:fld id="{846CE7D5-CF57-46EF-B807-FDD0502418D4}" type="datetimeFigureOut">
               <a:rPr lang="en-GB" smtClean="0"/>
-              <a:t>09/10/2026</a:t>
+              <a:t>13/10/2026</a:t>
             </a:fld>
             <a:endParaRPr lang="en-GB"/>
           </a:p>
@@ -3000,7 +5409,7 @@
           <a:p>
             <a:fld id="{846CE7D5-CF57-46EF-B807-FDD0502418D4}" type="datetimeFigureOut">
               <a:rPr lang="en-GB" smtClean="0"/>
-              <a:t>09/10/2026</a:t>
+              <a:t>13/10/2026</a:t>
             </a:fld>
             <a:endParaRPr lang="en-GB"/>
           </a:p>
@@ -3168,7 +5577,7 @@
           <a:p>
             <a:fld id="{846CE7D5-CF57-46EF-B807-FDD0502418D4}" type="datetimeFigureOut">
               <a:rPr lang="en-GB" smtClean="0"/>
-              <a:t>09/10/2026</a:t>
+              <a:t>13/10/2026</a:t>
             </a:fld>
             <a:endParaRPr lang="en-GB"/>
           </a:p>
@@ -3413,7 +5822,7 @@
           <a:p>
             <a:fld id="{846CE7D5-CF57-46EF-B807-FDD0502418D4}" type="datetimeFigureOut">
               <a:rPr lang="en-GB" smtClean="0"/>
-              <a:t>09/10/2026</a:t>
+              <a:t>13/10/2026</a:t>
             </a:fld>
             <a:endParaRPr lang="en-GB"/>
           </a:p>
@@ -3642,7 +6051,7 @@
           <a:p>
             <a:fld id="{846CE7D5-CF57-46EF-B807-FDD0502418D4}" type="datetimeFigureOut">
               <a:rPr lang="en-GB" smtClean="0"/>
-              <a:t>09/10/2026</a:t>
+              <a:t>13/10/2026</a:t>
             </a:fld>
             <a:endParaRPr lang="en-GB"/>
           </a:p>
@@ -4006,7 +6415,7 @@
           <a:p>
             <a:fld id="{846CE7D5-CF57-46EF-B807-FDD0502418D4}" type="datetimeFigureOut">
               <a:rPr lang="en-GB" smtClean="0"/>
-              <a:t>09/10/2026</a:t>
+              <a:t>13/10/2026</a:t>
             </a:fld>
             <a:endParaRPr lang="en-GB"/>
           </a:p>
@@ -4123,7 +6532,7 @@
           <a:p>
             <a:fld id="{846CE7D5-CF57-46EF-B807-FDD0502418D4}" type="datetimeFigureOut">
               <a:rPr lang="en-GB" smtClean="0"/>
-              <a:t>09/10/2026</a:t>
+              <a:t>13/10/2026</a:t>
             </a:fld>
             <a:endParaRPr lang="en-GB"/>
           </a:p>
@@ -4218,7 +6627,7 @@
           <a:p>
             <a:fld id="{846CE7D5-CF57-46EF-B807-FDD0502418D4}" type="datetimeFigureOut">
               <a:rPr lang="en-GB" smtClean="0"/>
-              <a:t>09/10/2026</a:t>
+              <a:t>13/10/2026</a:t>
             </a:fld>
             <a:endParaRPr lang="en-GB"/>
           </a:p>
@@ -4493,7 +6902,7 @@
           <a:p>
             <a:fld id="{846CE7D5-CF57-46EF-B807-FDD0502418D4}" type="datetimeFigureOut">
               <a:rPr lang="en-GB" smtClean="0"/>
-              <a:t>09/10/2026</a:t>
+              <a:t>13/10/2026</a:t>
             </a:fld>
             <a:endParaRPr lang="en-GB"/>
           </a:p>
@@ -4745,7 +7154,7 @@
           <a:p>
             <a:fld id="{846CE7D5-CF57-46EF-B807-FDD0502418D4}" type="datetimeFigureOut">
               <a:rPr lang="en-GB" smtClean="0"/>
-              <a:t>09/10/2026</a:t>
+              <a:t>13/10/2026</a:t>
             </a:fld>
             <a:endParaRPr lang="en-GB"/>
           </a:p>
@@ -4956,7 +7365,7 @@
           <a:p>
             <a:fld id="{846CE7D5-CF57-46EF-B807-FDD0502418D4}" type="datetimeFigureOut">
               <a:rPr lang="en-GB" smtClean="0"/>
-              <a:t>09/10/2026</a:t>
+              <a:t>13/10/2026</a:t>
             </a:fld>
             <a:endParaRPr lang="en-GB"/>
           </a:p>
@@ -5410,7 +7819,7 @@
             <p:nvPr/>
           </p:nvPicPr>
           <p:blipFill>
-            <a:blip r:embed="rId2"/>
+            <a:blip r:embed="rId3"/>
             <a:srcRect l="17220" t="21619" r="18346" b="21579"/>
             <a:stretch>
               <a:fillRect/>
@@ -5747,13 +8156,13 @@
   <p:clrMapOvr>
     <a:masterClrMapping/>
   </p:clrMapOvr>
-  <mc:AlternateContent xmlns:mc="http://schemas.openxmlformats.org/markup-compatibility/2006" xmlns:p159="http://schemas.microsoft.com/office/powerpoint/2015/09/main">
-    <mc:Choice Requires="p159">
+  <mc:AlternateContent xmlns:mc="http://schemas.openxmlformats.org/markup-compatibility/2006">
+    <mc:Choice xmlns:p159="http://schemas.microsoft.com/office/powerpoint/2015/09/main" Requires="p159">
       <p:transition xmlns:p14="http://schemas.microsoft.com/office/powerpoint/2010/main" spd="slow" p14:dur="2000">
         <p159:morph option="byObject"/>
       </p:transition>
     </mc:Choice>
-    <mc:Fallback xmlns="">
+    <mc:Fallback>
       <p:transition spd="slow">
         <p:fade/>
       </p:transition>
@@ -5828,7 +8237,7 @@
             <p:nvPr/>
           </p:nvPicPr>
           <p:blipFill>
-            <a:blip r:embed="rId2"/>
+            <a:blip r:embed="rId3"/>
             <a:srcRect l="17220" t="21619" r="18346" b="21579"/>
             <a:stretch>
               <a:fillRect/>
@@ -5905,7 +8314,7 @@
             <a:lstStyle/>
             <a:p>
               <a:pPr algn="ctr"/>
-              <a:endParaRPr lang="en-US" dirty="0"/>
+              <a:endParaRPr lang="en-US"/>
             </a:p>
           </p:txBody>
         </p:sp>
@@ -6031,7 +8440,7 @@
           <a:lstStyle/>
           <a:p>
             <a:pPr algn="ctr"/>
-            <a:endParaRPr lang="en-US" dirty="0"/>
+            <a:endParaRPr lang="en-US"/>
           </a:p>
         </p:txBody>
       </p:sp>
@@ -6065,7 +8474,7 @@
           <a:p>
             <a:pPr algn="ctr"/>
             <a:r>
-              <a:rPr lang="en-US" sz="4000" dirty="0">
+              <a:rPr lang="en-US" sz="4000">
                 <a:solidFill>
                   <a:srgbClr val="415F91"/>
                 </a:solidFill>
@@ -6075,36 +8484,6 @@
           </a:p>
         </p:txBody>
       </p:sp>
-      <p:pic>
-        <p:nvPicPr>
-          <p:cNvPr id="2" name="Picture 1">
-            <a:extLst>
-              <a:ext uri="{FF2B5EF4-FFF2-40B4-BE49-F238E27FC236}">
-                <a16:creationId xmlns:a16="http://schemas.microsoft.com/office/drawing/2014/main" id="{E7A0E90C-780D-25CA-B48F-D539E4B9A7FE}"/>
-              </a:ext>
-            </a:extLst>
-          </p:cNvPr>
-          <p:cNvPicPr>
-            <a:picLocks noChangeAspect="1"/>
-          </p:cNvPicPr>
-          <p:nvPr/>
-        </p:nvPicPr>
-        <p:blipFill>
-          <a:blip r:embed="rId3"/>
-          <a:stretch>
-            <a:fillRect/>
-          </a:stretch>
-        </p:blipFill>
-        <p:spPr>
-          <a:xfrm>
-            <a:off x="119672" y="-2115855"/>
-            <a:ext cx="11422304" cy="2074056"/>
-          </a:xfrm>
-          <a:prstGeom prst="rect">
-            <a:avLst/>
-          </a:prstGeom>
-        </p:spPr>
-      </p:pic>
       <p:grpSp>
         <p:nvGrpSpPr>
           <p:cNvPr id="57" name="Group 56">
@@ -6174,58 +8553,58 @@
             <a:p>
               <a:pPr algn="ctr"/>
               <a:r>
-                <a:rPr lang="en-US" sz="2800" dirty="0">
+                <a:rPr lang="en-US" sz="2800">
                   <a:solidFill>
                     <a:srgbClr val="BA1A1A"/>
                   </a:solidFill>
                 </a:rPr>
                 <a:t>Flutter App</a:t>
               </a:r>
-              <a:endParaRPr lang="en-US" sz="1600" dirty="0"/>
+              <a:endParaRPr lang="en-US" sz="1600"/>
             </a:p>
             <a:p>
               <a:pPr algn="ctr"/>
-              <a:endParaRPr lang="en-US" sz="1600" dirty="0"/>
+              <a:endParaRPr lang="en-US" sz="1600"/>
             </a:p>
             <a:p>
               <a:pPr algn="ctr"/>
-              <a:endParaRPr lang="en-US" sz="1600" dirty="0"/>
+              <a:endParaRPr lang="en-US" sz="1600"/>
             </a:p>
             <a:p>
               <a:pPr algn="ctr"/>
-              <a:endParaRPr lang="en-US" sz="1600" dirty="0"/>
+              <a:endParaRPr lang="en-US" sz="1600"/>
             </a:p>
             <a:p>
               <a:pPr algn="ctr"/>
-              <a:endParaRPr lang="en-US" sz="1600" dirty="0"/>
+              <a:endParaRPr lang="en-US" sz="1600"/>
             </a:p>
             <a:p>
               <a:pPr algn="ctr"/>
-              <a:endParaRPr lang="en-US" sz="1600" dirty="0"/>
+              <a:endParaRPr lang="en-US" sz="1600"/>
             </a:p>
             <a:p>
               <a:pPr algn="ctr"/>
-              <a:endParaRPr lang="en-US" sz="1600" dirty="0"/>
+              <a:endParaRPr lang="en-US" sz="1600"/>
             </a:p>
             <a:p>
               <a:pPr algn="ctr"/>
-              <a:endParaRPr lang="en-US" sz="1600" dirty="0"/>
+              <a:endParaRPr lang="en-US" sz="1600"/>
             </a:p>
             <a:p>
               <a:pPr algn="ctr"/>
-              <a:endParaRPr lang="en-US" sz="1600" dirty="0"/>
+              <a:endParaRPr lang="en-US" sz="1600"/>
             </a:p>
             <a:p>
               <a:pPr algn="ctr"/>
-              <a:endParaRPr lang="en-US" sz="1600" dirty="0"/>
+              <a:endParaRPr lang="en-US" sz="1600"/>
             </a:p>
             <a:p>
               <a:pPr algn="ctr"/>
-              <a:endParaRPr lang="en-US" sz="1600" dirty="0"/>
+              <a:endParaRPr lang="en-US" sz="1600"/>
             </a:p>
             <a:p>
               <a:pPr algn="ctr"/>
-              <a:endParaRPr lang="en-US" sz="1600" dirty="0"/>
+              <a:endParaRPr lang="en-US" sz="1600"/>
             </a:p>
           </p:txBody>
         </p:sp>
@@ -6278,7 +8657,7 @@
             <a:p>
               <a:pPr algn="ctr"/>
               <a:r>
-                <a:rPr lang="en-US" sz="2800" dirty="0">
+                <a:rPr lang="en-US" sz="2800">
                   <a:solidFill>
                     <a:srgbClr val="705575"/>
                   </a:solidFill>
@@ -6288,7 +8667,7 @@
             </a:p>
             <a:p>
               <a:pPr algn="ctr"/>
-              <a:endParaRPr lang="en-US" sz="1600" dirty="0">
+              <a:endParaRPr lang="en-US" sz="1600">
                 <a:solidFill>
                   <a:srgbClr val="705575"/>
                 </a:solidFill>
@@ -6296,7 +8675,7 @@
             </a:p>
             <a:p>
               <a:pPr algn="ctr"/>
-              <a:endParaRPr lang="en-US" sz="1600" dirty="0">
+              <a:endParaRPr lang="en-US" sz="1600">
                 <a:solidFill>
                   <a:srgbClr val="705575"/>
                 </a:solidFill>
@@ -6304,7 +8683,7 @@
             </a:p>
             <a:p>
               <a:pPr algn="ctr"/>
-              <a:endParaRPr lang="en-US" sz="1600" dirty="0">
+              <a:endParaRPr lang="en-US" sz="1600">
                 <a:solidFill>
                   <a:srgbClr val="705575"/>
                 </a:solidFill>
@@ -6312,7 +8691,7 @@
             </a:p>
             <a:p>
               <a:pPr algn="ctr"/>
-              <a:endParaRPr lang="en-US" sz="1600" dirty="0">
+              <a:endParaRPr lang="en-US" sz="1600">
                 <a:solidFill>
                   <a:srgbClr val="705575"/>
                 </a:solidFill>
@@ -6320,7 +8699,7 @@
             </a:p>
             <a:p>
               <a:pPr algn="ctr"/>
-              <a:endParaRPr lang="en-US" sz="1600" dirty="0">
+              <a:endParaRPr lang="en-US" sz="1600">
                 <a:solidFill>
                   <a:srgbClr val="705575"/>
                 </a:solidFill>
@@ -6328,7 +8707,7 @@
             </a:p>
             <a:p>
               <a:pPr algn="ctr"/>
-              <a:endParaRPr lang="en-US" sz="1600" dirty="0">
+              <a:endParaRPr lang="en-US" sz="1600">
                 <a:solidFill>
                   <a:srgbClr val="705575"/>
                 </a:solidFill>
@@ -6336,7 +8715,7 @@
             </a:p>
             <a:p>
               <a:pPr algn="ctr"/>
-              <a:endParaRPr lang="en-US" sz="1600" dirty="0">
+              <a:endParaRPr lang="en-US" sz="1600">
                 <a:solidFill>
                   <a:srgbClr val="705575"/>
                 </a:solidFill>
@@ -6344,7 +8723,7 @@
             </a:p>
             <a:p>
               <a:pPr algn="ctr"/>
-              <a:endParaRPr lang="en-US" sz="1600" dirty="0">
+              <a:endParaRPr lang="en-US" sz="1600">
                 <a:solidFill>
                   <a:srgbClr val="705575"/>
                 </a:solidFill>
@@ -6352,7 +8731,7 @@
             </a:p>
             <a:p>
               <a:pPr algn="ctr"/>
-              <a:endParaRPr lang="en-US" sz="1600" dirty="0">
+              <a:endParaRPr lang="en-US" sz="1600">
                 <a:solidFill>
                   <a:srgbClr val="DAE2F9"/>
                 </a:solidFill>
@@ -6409,14 +8788,14 @@
             <a:p>
               <a:pPr algn="ctr"/>
               <a:r>
-                <a:rPr lang="en-US" sz="3200" dirty="0">
+                <a:rPr lang="en-US" sz="3200">
                   <a:solidFill>
                     <a:srgbClr val="415F91"/>
                   </a:solidFill>
                 </a:rPr>
                 <a:t>Rest API</a:t>
               </a:r>
-              <a:endParaRPr lang="en-US" sz="3200" dirty="0">
+              <a:endParaRPr lang="en-US" sz="3200">
                 <a:solidFill>
                   <a:srgbClr val="DAE2F9"/>
                 </a:solidFill>
@@ -6473,14 +8852,14 @@
             <a:p>
               <a:pPr algn="ctr"/>
               <a:r>
-                <a:rPr lang="en-US" sz="2800" dirty="0">
+                <a:rPr lang="en-US" sz="2800">
                   <a:solidFill>
                     <a:srgbClr val="705575"/>
                   </a:solidFill>
                 </a:rPr>
                 <a:t>Database</a:t>
               </a:r>
-              <a:endParaRPr lang="en-US" sz="1600" dirty="0">
+              <a:endParaRPr lang="en-US" sz="1600">
                 <a:solidFill>
                   <a:srgbClr val="705575"/>
                 </a:solidFill>
@@ -6488,7 +8867,7 @@
             </a:p>
             <a:p>
               <a:pPr algn="ctr"/>
-              <a:endParaRPr lang="en-US" sz="1600" dirty="0">
+              <a:endParaRPr lang="en-US" sz="1600">
                 <a:solidFill>
                   <a:srgbClr val="705575"/>
                 </a:solidFill>
@@ -6496,7 +8875,7 @@
             </a:p>
             <a:p>
               <a:pPr algn="ctr"/>
-              <a:endParaRPr lang="en-US" sz="1600" dirty="0">
+              <a:endParaRPr lang="en-US" sz="1600">
                 <a:solidFill>
                   <a:srgbClr val="705575"/>
                 </a:solidFill>
@@ -6504,7 +8883,7 @@
             </a:p>
             <a:p>
               <a:pPr algn="ctr"/>
-              <a:endParaRPr lang="en-US" sz="1600" dirty="0">
+              <a:endParaRPr lang="en-US" sz="1600">
                 <a:solidFill>
                   <a:srgbClr val="705575"/>
                 </a:solidFill>
@@ -6512,7 +8891,7 @@
             </a:p>
             <a:p>
               <a:pPr algn="ctr"/>
-              <a:endParaRPr lang="en-US" sz="1600" dirty="0">
+              <a:endParaRPr lang="en-US" sz="1600">
                 <a:solidFill>
                   <a:srgbClr val="705575"/>
                 </a:solidFill>
@@ -6520,7 +8899,7 @@
             </a:p>
             <a:p>
               <a:pPr algn="ctr"/>
-              <a:endParaRPr lang="en-US" sz="1600" dirty="0">
+              <a:endParaRPr lang="en-US" sz="1600">
                 <a:solidFill>
                   <a:srgbClr val="705575"/>
                 </a:solidFill>
@@ -6528,7 +8907,7 @@
             </a:p>
             <a:p>
               <a:pPr algn="ctr"/>
-              <a:endParaRPr lang="en-US" sz="1600" dirty="0"/>
+              <a:endParaRPr lang="en-US" sz="1600"/>
             </a:p>
           </p:txBody>
         </p:sp>
@@ -6583,7 +8962,7 @@
             <p:nvPr/>
           </p:nvPicPr>
           <p:blipFill>
-            <a:blip r:embed="rId2"/>
+            <a:blip r:embed="rId3"/>
             <a:srcRect l="17220" t="21619" r="18346" b="21579"/>
             <a:stretch>
               <a:fillRect/>
@@ -7092,7 +9471,7 @@
             <a:p>
               <a:pPr algn="ctr"/>
               <a:r>
-                <a:rPr lang="en-US" sz="1600" dirty="0">
+                <a:rPr lang="en-US" sz="1600">
                   <a:latin typeface="Aptos Light" panose="020B0004020202020204" pitchFamily="34" charset="0"/>
                 </a:rPr>
                 <a:t>&gt; Request &gt;</a:t>
@@ -7130,7 +9509,7 @@
             <a:p>
               <a:pPr algn="ctr"/>
               <a:r>
-                <a:rPr lang="en-US" sz="1600" dirty="0">
+                <a:rPr lang="en-US" sz="1600">
                   <a:latin typeface="Aptos Light" panose="020B0004020202020204" pitchFamily="34" charset="0"/>
                 </a:rPr>
                 <a:t>&gt; Request &gt;</a:t>
@@ -7168,7 +9547,7 @@
             <a:p>
               <a:pPr algn="ctr"/>
               <a:r>
-                <a:rPr lang="en-US" sz="1600" dirty="0">
+                <a:rPr lang="en-US" sz="1600">
                   <a:latin typeface="Aptos Light" panose="020B0004020202020204" pitchFamily="34" charset="0"/>
                 </a:rPr>
                 <a:t>&gt; Query &gt;</a:t>
@@ -7206,7 +9585,7 @@
             <a:p>
               <a:pPr algn="ctr"/>
               <a:r>
-                <a:rPr lang="en-US" sz="1600" dirty="0">
+                <a:rPr lang="en-US" sz="1600">
                   <a:latin typeface="Aptos Light" panose="020B0004020202020204" pitchFamily="34" charset="0"/>
                 </a:rPr>
                 <a:t>&gt; Data &gt;</a:t>
@@ -7244,7 +9623,7 @@
             <a:p>
               <a:pPr algn="ctr"/>
               <a:r>
-                <a:rPr lang="en-US" sz="1600" dirty="0">
+                <a:rPr lang="en-US" sz="1600">
                   <a:latin typeface="Aptos Light" panose="020B0004020202020204" pitchFamily="34" charset="0"/>
                 </a:rPr>
                 <a:t>&lt; Data &lt;</a:t>
@@ -7282,7 +9661,7 @@
             <a:p>
               <a:pPr algn="ctr"/>
               <a:r>
-                <a:rPr lang="en-US" sz="1600" dirty="0">
+                <a:rPr lang="en-US" sz="1600">
                   <a:latin typeface="Aptos Light" panose="020B0004020202020204" pitchFamily="34" charset="0"/>
                 </a:rPr>
                 <a:t>&lt; Data &lt;</a:t>
@@ -7321,7 +9700,7 @@
           <a:p>
             <a:pPr algn="ctr"/>
             <a:r>
-              <a:rPr lang="en-GB" sz="1800" dirty="0">
+              <a:rPr lang="en-GB" sz="1800">
                 <a:ea typeface="Calibri"/>
                 <a:cs typeface="Calibri"/>
               </a:rPr>
@@ -7331,7 +9710,7 @@
           <a:p>
             <a:pPr algn="ctr"/>
             <a:r>
-              <a:rPr lang="en-GB" sz="1800" dirty="0">
+              <a:rPr lang="en-GB" sz="1800">
                 <a:ea typeface="Calibri"/>
                 <a:cs typeface="Calibri"/>
               </a:rPr>
@@ -7341,7 +9720,7 @@
           <a:p>
             <a:pPr algn="ctr"/>
             <a:r>
-              <a:rPr lang="en-GB" sz="1800" dirty="0">
+              <a:rPr lang="en-GB" sz="1800">
                 <a:ea typeface="Calibri"/>
                 <a:cs typeface="Calibri"/>
               </a:rPr>
@@ -7351,7 +9730,7 @@
           <a:p>
             <a:pPr algn="ctr"/>
             <a:r>
-              <a:rPr lang="en-GB" sz="1800" dirty="0">
+              <a:rPr lang="en-GB" sz="1800">
                 <a:ea typeface="Calibri"/>
                 <a:cs typeface="Calibri"/>
               </a:rPr>
@@ -7361,7 +9740,7 @@
           <a:p>
             <a:pPr algn="ctr"/>
             <a:r>
-              <a:rPr lang="en-GB" sz="1800" dirty="0">
+              <a:rPr lang="en-GB" sz="1800">
                 <a:ea typeface="Calibri"/>
                 <a:cs typeface="Calibri"/>
               </a:rPr>
@@ -7371,7 +9750,7 @@
           <a:p>
             <a:pPr algn="ctr"/>
             <a:r>
-              <a:rPr lang="en-GB" sz="1800" dirty="0">
+              <a:rPr lang="en-GB" sz="1800">
                 <a:ea typeface="Calibri"/>
                 <a:cs typeface="Calibri"/>
               </a:rPr>
@@ -7409,7 +9788,7 @@
           <a:lstStyle/>
           <a:p>
             <a:r>
-              <a:rPr lang="en-GB" dirty="0">
+              <a:rPr lang="en-GB">
                 <a:ea typeface="Calibri"/>
                 <a:cs typeface="Calibri"/>
               </a:rPr>
@@ -7418,7 +9797,7 @@
           </a:p>
           <a:p>
             <a:r>
-              <a:rPr lang="en-GB" dirty="0">
+              <a:rPr lang="en-GB">
                 <a:ea typeface="Calibri"/>
                 <a:cs typeface="Calibri"/>
               </a:rPr>
@@ -7431,7 +9810,7 @@
               <a:buChar char="•"/>
             </a:pPr>
             <a:r>
-              <a:rPr lang="en-GB" dirty="0">
+              <a:rPr lang="en-GB">
                 <a:ea typeface="Calibri"/>
                 <a:cs typeface="Calibri"/>
               </a:rPr>
@@ -7444,7 +9823,7 @@
               <a:buChar char="•"/>
             </a:pPr>
             <a:r>
-              <a:rPr lang="en-GB" dirty="0">
+              <a:rPr lang="en-GB">
                 <a:ea typeface="Calibri"/>
                 <a:cs typeface="Calibri"/>
               </a:rPr>
@@ -7457,7 +9836,7 @@
               <a:buChar char="•"/>
             </a:pPr>
             <a:r>
-              <a:rPr lang="en-GB" dirty="0">
+              <a:rPr lang="en-GB">
                 <a:ea typeface="Calibri"/>
                 <a:cs typeface="Calibri"/>
               </a:rPr>
@@ -7470,7 +9849,7 @@
               <a:buChar char="•"/>
             </a:pPr>
             <a:r>
-              <a:rPr lang="en-GB" dirty="0">
+              <a:rPr lang="en-GB">
                 <a:ea typeface="Calibri"/>
                 <a:cs typeface="Calibri"/>
               </a:rPr>
@@ -7508,7 +9887,7 @@
           <a:lstStyle/>
           <a:p>
             <a:r>
-              <a:rPr lang="en-GB" dirty="0">
+              <a:rPr lang="en-GB">
                 <a:ea typeface="Calibri"/>
                 <a:cs typeface="Calibri"/>
               </a:rPr>
@@ -7521,7 +9900,7 @@
               <a:buChar char="•"/>
             </a:pPr>
             <a:r>
-              <a:rPr lang="en-GB" dirty="0">
+              <a:rPr lang="en-GB">
                 <a:ea typeface="Calibri"/>
                 <a:cs typeface="Calibri"/>
               </a:rPr>
@@ -7534,7 +9913,7 @@
               <a:buChar char="•"/>
             </a:pPr>
             <a:r>
-              <a:rPr lang="en-GB" dirty="0">
+              <a:rPr lang="en-GB">
                 <a:ea typeface="Calibri"/>
                 <a:cs typeface="Calibri"/>
               </a:rPr>
@@ -7547,7 +9926,7 @@
               <a:buChar char="•"/>
             </a:pPr>
             <a:r>
-              <a:rPr lang="en-GB" dirty="0">
+              <a:rPr lang="en-GB">
                 <a:ea typeface="Calibri"/>
                 <a:cs typeface="Calibri"/>
               </a:rPr>
@@ -7560,7 +9939,7 @@
               <a:buChar char="•"/>
             </a:pPr>
             <a:r>
-              <a:rPr lang="en-GB" dirty="0">
+              <a:rPr lang="en-GB">
                 <a:ea typeface="Calibri"/>
                 <a:cs typeface="Calibri"/>
               </a:rPr>
@@ -7573,7 +9952,7 @@
               <a:buChar char="•"/>
             </a:pPr>
             <a:r>
-              <a:rPr lang="en-GB" dirty="0">
+              <a:rPr lang="en-GB">
                 <a:ea typeface="Calibri"/>
                 <a:cs typeface="Calibri"/>
               </a:rPr>
@@ -7673,7 +10052,7 @@
             <p:nvPr/>
           </p:nvPicPr>
           <p:blipFill>
-            <a:blip r:embed="rId2"/>
+            <a:blip r:embed="rId3"/>
             <a:srcRect l="17220" t="21619" r="18346" b="21579"/>
             <a:stretch>
               <a:fillRect/>
@@ -7845,7 +10224,7 @@
           <a:p>
             <a:pPr algn="ctr"/>
             <a:r>
-              <a:rPr lang="en-US" sz="4000" dirty="0">
+              <a:rPr lang="en-US" sz="4000">
                 <a:solidFill>
                   <a:srgbClr val="415F91"/>
                 </a:solidFill>
@@ -7869,8 +10248,8 @@
         </p:nvSpPr>
         <p:spPr>
           <a:xfrm>
-            <a:off x="886590" y="1443261"/>
-            <a:ext cx="10418820" cy="4524315"/>
+            <a:off x="2459751" y="890197"/>
+            <a:ext cx="7530595" cy="5078313"/>
           </a:xfrm>
           <a:prstGeom prst="rect">
             <a:avLst/>
@@ -7878,33 +10257,31 @@
           <a:noFill/>
         </p:spPr>
         <p:txBody>
-          <a:bodyPr wrap="square" rtlCol="0">
+          <a:bodyPr wrap="square" lIns="91440" tIns="45720" rIns="91440" bIns="45720" rtlCol="0" anchor="t">
             <a:spAutoFit/>
           </a:bodyPr>
           <a:lstStyle/>
           <a:p>
-            <a:pPr algn="ctr"/>
-            <a:r>
-              <a:rPr lang="en-US" dirty="0">
+            <a:r>
+              <a:rPr lang="en-US">
                 <a:solidFill>
                   <a:srgbClr val="191C20"/>
                 </a:solidFill>
               </a:rPr>
               <a:t>Flutter is multiplatform, so you're able to deploy your application on any form of devices. This means you only need to learn one language and update only one codebase.</a:t>
             </a:r>
-          </a:p>
-          <a:p>
-            <a:pPr algn="ctr"/>
-            <a:endParaRPr lang="en-US" dirty="0">
+            <a:endParaRPr lang="en-US"/>
+          </a:p>
+          <a:p>
+            <a:endParaRPr lang="en-US">
               <a:solidFill>
                 <a:srgbClr val="191C20"/>
               </a:solidFill>
             </a:endParaRPr>
           </a:p>
           <a:p>
-            <a:pPr algn="ctr"/>
-            <a:r>
-              <a:rPr lang="en-US" dirty="0">
+            <a:r>
+              <a:rPr lang="en-US">
                 <a:solidFill>
                   <a:srgbClr val="191C20"/>
                 </a:solidFill>
@@ -7912,40 +10289,30 @@
               <a:t>Faster development time is a result from the single codebase.</a:t>
             </a:r>
             <a:br>
-              <a:rPr lang="en-US" dirty="0">
-                <a:solidFill>
-                  <a:srgbClr val="191C20"/>
-                </a:solidFill>
-              </a:rPr>
+              <a:rPr lang="en-US"/>
             </a:br>
             <a:br>
-              <a:rPr lang="en-US" dirty="0">
+              <a:rPr lang="en-US"/>
+            </a:br>
+            <a:r>
+              <a:rPr lang="en-US">
                 <a:solidFill>
                   <a:srgbClr val="191C20"/>
                 </a:solidFill>
               </a:rPr>
-            </a:br>
-            <a:r>
-              <a:rPr lang="en-US" dirty="0">
-                <a:solidFill>
-                  <a:srgbClr val="191C20"/>
-                </a:solidFill>
-              </a:rPr>
               <a:t>Testing can be completed quickly as well with Flutter’s Hot Reload that allows the program to update without having to rebuild the project every time.</a:t>
             </a:r>
           </a:p>
           <a:p>
-            <a:pPr algn="ctr"/>
-            <a:endParaRPr lang="en-US" dirty="0">
+            <a:endParaRPr lang="en-US">
               <a:solidFill>
                 <a:srgbClr val="191C20"/>
               </a:solidFill>
             </a:endParaRPr>
           </a:p>
           <a:p>
-            <a:pPr algn="ctr"/>
-            <a:r>
-              <a:rPr lang="en-US" dirty="0">
+            <a:r>
+              <a:rPr lang="en-US">
                 <a:solidFill>
                   <a:srgbClr val="191C20"/>
                 </a:solidFill>
@@ -7954,32 +10321,28 @@
             </a:r>
           </a:p>
           <a:p>
-            <a:pPr algn="ctr"/>
-            <a:endParaRPr lang="en-US" dirty="0">
+            <a:endParaRPr lang="en-US">
               <a:solidFill>
                 <a:srgbClr val="191C20"/>
               </a:solidFill>
             </a:endParaRPr>
           </a:p>
           <a:p>
-            <a:pPr algn="ctr"/>
-            <a:r>
-              <a:rPr lang="en-US" dirty="0"/>
+            <a:r>
+              <a:rPr lang="en-US"/>
               <a:t>Flutter compiles directly to native machine code for production releases so performance should be great and the same through platforms</a:t>
             </a:r>
           </a:p>
           <a:p>
-            <a:pPr algn="ctr"/>
-            <a:endParaRPr lang="en-US" dirty="0">
+            <a:endParaRPr lang="en-US">
               <a:solidFill>
                 <a:srgbClr val="191C20"/>
               </a:solidFill>
             </a:endParaRPr>
           </a:p>
           <a:p>
-            <a:pPr algn="ctr"/>
-            <a:r>
-              <a:rPr lang="en-US" dirty="0">
+            <a:r>
+              <a:rPr lang="en-US">
                 <a:solidFill>
                   <a:srgbClr val="191C20"/>
                 </a:solidFill>
@@ -8060,7 +10423,7 @@
           <p:nvPr/>
         </p:nvPicPr>
         <p:blipFill>
-          <a:blip r:embed="rId2">
+          <a:blip r:embed="rId3">
             <a:extLst>
               <a:ext uri="{28A0092B-C50C-407E-A947-70E740481C1C}">
                 <a14:useLocalDpi xmlns:a14="http://schemas.microsoft.com/office/drawing/2010/main" val="0"/>
@@ -8115,7 +10478,7 @@
             <p:nvPr/>
           </p:nvPicPr>
           <p:blipFill>
-            <a:blip r:embed="rId3"/>
+            <a:blip r:embed="rId4"/>
             <a:srcRect l="17220" t="21619" r="18346" b="21579"/>
             <a:stretch>
               <a:fillRect/>
@@ -8488,13 +10851,13 @@
   <p:clrMapOvr>
     <a:masterClrMapping/>
   </p:clrMapOvr>
-  <mc:AlternateContent xmlns:mc="http://schemas.openxmlformats.org/markup-compatibility/2006" xmlns:p159="http://schemas.microsoft.com/office/powerpoint/2015/09/main">
-    <mc:Choice Requires="p159">
+  <mc:AlternateContent xmlns:mc="http://schemas.openxmlformats.org/markup-compatibility/2006">
+    <mc:Choice xmlns:p159="http://schemas.microsoft.com/office/powerpoint/2015/09/main" Requires="p159">
       <p:transition xmlns:p14="http://schemas.microsoft.com/office/powerpoint/2010/main" spd="slow" p14:dur="2000">
         <p159:morph option="byObject"/>
       </p:transition>
     </mc:Choice>
-    <mc:Fallback xmlns="">
+    <mc:Fallback>
       <p:transition spd="slow">
         <p:fade/>
       </p:transition>
@@ -8569,7 +10932,7 @@
             <p:nvPr/>
           </p:nvPicPr>
           <p:blipFill>
-            <a:blip r:embed="rId2"/>
+            <a:blip r:embed="rId3"/>
             <a:srcRect l="17220" t="21619" r="18346" b="21579"/>
             <a:stretch>
               <a:fillRect/>
@@ -8741,7 +11104,7 @@
           <a:p>
             <a:pPr algn="ctr"/>
             <a:r>
-              <a:rPr lang="en-US" sz="4000" dirty="0">
+              <a:rPr lang="en-US" sz="4000">
                 <a:solidFill>
                   <a:srgbClr val="415F91"/>
                 </a:solidFill>
@@ -8800,7 +11163,7 @@
           <a:p>
             <a:pPr algn="ctr"/>
             <a:r>
-              <a:rPr lang="en-US" dirty="0">
+              <a:rPr lang="en-US">
                 <a:solidFill>
                   <a:srgbClr val="284777"/>
                 </a:solidFill>
@@ -8859,7 +11222,7 @@
           <a:p>
             <a:pPr algn="ctr"/>
             <a:r>
-              <a:rPr lang="en-US" dirty="0">
+              <a:rPr lang="en-US">
                 <a:solidFill>
                   <a:srgbClr val="284777"/>
                 </a:solidFill>
@@ -8918,7 +11281,7 @@
           <a:p>
             <a:pPr algn="ctr"/>
             <a:r>
-              <a:rPr lang="en-US" dirty="0">
+              <a:rPr lang="en-US">
                 <a:solidFill>
                   <a:srgbClr val="284777"/>
                 </a:solidFill>
@@ -8977,7 +11340,7 @@
           <a:p>
             <a:pPr algn="ctr"/>
             <a:r>
-              <a:rPr lang="en-US" dirty="0">
+              <a:rPr lang="en-US">
                 <a:solidFill>
                   <a:srgbClr val="284777"/>
                 </a:solidFill>
@@ -9246,7 +11609,7 @@
           <p:nvPr/>
         </p:nvPicPr>
         <p:blipFill>
-          <a:blip r:embed="rId3">
+          <a:blip r:embed="rId4">
             <a:extLst>
               <a:ext uri="{28A0092B-C50C-407E-A947-70E740481C1C}">
                 <a14:useLocalDpi xmlns:a14="http://schemas.microsoft.com/office/drawing/2010/main" val="0"/>
@@ -9282,7 +11645,7 @@
           <p:nvPr/>
         </p:nvPicPr>
         <p:blipFill>
-          <a:blip r:embed="rId4">
+          <a:blip r:embed="rId5">
             <a:extLst>
               <a:ext uri="{28A0092B-C50C-407E-A947-70E740481C1C}">
                 <a14:useLocalDpi xmlns:a14="http://schemas.microsoft.com/office/drawing/2010/main" val="0"/>
@@ -9318,7 +11681,7 @@
           <p:nvPr/>
         </p:nvPicPr>
         <p:blipFill>
-          <a:blip r:embed="rId5">
+          <a:blip r:embed="rId6">
             <a:extLst>
               <a:ext uri="{28A0092B-C50C-407E-A947-70E740481C1C}">
                 <a14:useLocalDpi xmlns:a14="http://schemas.microsoft.com/office/drawing/2010/main" val="0"/>
@@ -9474,7 +11837,7 @@
           <p:nvPr/>
         </p:nvPicPr>
         <p:blipFill>
-          <a:blip r:embed="rId2">
+          <a:blip r:embed="rId3">
             <a:extLst>
               <a:ext uri="{28A0092B-C50C-407E-A947-70E740481C1C}">
                 <a14:useLocalDpi xmlns:a14="http://schemas.microsoft.com/office/drawing/2010/main" val="0"/>
@@ -9649,7 +12012,7 @@
           <a:p>
             <a:pPr algn="ctr"/>
             <a:r>
-              <a:rPr lang="en-US" sz="4000" dirty="0">
+              <a:rPr lang="en-US" sz="4000">
                 <a:solidFill>
                   <a:srgbClr val="415F91"/>
                 </a:solidFill>
@@ -9689,7 +12052,7 @@
           <a:p>
             <a:pPr algn="ctr"/>
             <a:r>
-              <a:rPr lang="en-US" dirty="0">
+              <a:rPr lang="en-US">
                 <a:solidFill>
                   <a:srgbClr val="191C20"/>
                 </a:solidFill>
@@ -9734,7 +12097,7 @@
             <p:nvPr/>
           </p:nvPicPr>
           <p:blipFill>
-            <a:blip r:embed="rId3"/>
+            <a:blip r:embed="rId4"/>
             <a:srcRect l="17220" t="21619" r="18346" b="21579"/>
             <a:stretch>
               <a:fillRect/>
@@ -9846,7 +12209,7 @@
           <a:p>
             <a:pPr algn="ctr"/>
             <a:r>
-              <a:rPr lang="en-US" sz="8000" dirty="0" err="1">
+              <a:rPr lang="en-US" sz="8000" err="1">
                 <a:solidFill>
                   <a:srgbClr val="284777"/>
                 </a:solidFill>
@@ -9855,7 +12218,7 @@
               <a:t>www.uniqstudio.org</a:t>
             </a:r>
             <a:r>
-              <a:rPr lang="en-US" sz="8000" dirty="0">
+              <a:rPr lang="en-US" sz="8000">
                 <a:solidFill>
                   <a:srgbClr val="284777"/>
                 </a:solidFill>
@@ -9881,7 +12244,7 @@
           <p:nvPr/>
         </p:nvPicPr>
         <p:blipFill>
-          <a:blip r:embed="rId4">
+          <a:blip r:embed="rId5">
             <a:extLst>
               <a:ext uri="{28A0092B-C50C-407E-A947-70E740481C1C}">
                 <a14:useLocalDpi xmlns:a14="http://schemas.microsoft.com/office/drawing/2010/main" val="0"/>
@@ -9917,7 +12280,7 @@
           <p:nvPr/>
         </p:nvPicPr>
         <p:blipFill>
-          <a:blip r:embed="rId5">
+          <a:blip r:embed="rId6">
             <a:extLst>
               <a:ext uri="{28A0092B-C50C-407E-A947-70E740481C1C}">
                 <a14:useLocalDpi xmlns:a14="http://schemas.microsoft.com/office/drawing/2010/main" val="0"/>
@@ -10029,7 +12392,7 @@
             <p:nvPr/>
           </p:nvPicPr>
           <p:blipFill>
-            <a:blip r:embed="rId2"/>
+            <a:blip r:embed="rId3"/>
             <a:srcRect l="17220" t="21619" r="18346" b="21579"/>
             <a:stretch>
               <a:fillRect/>
@@ -10240,7 +12603,7 @@
           <a:lstStyle/>
           <a:p>
             <a:r>
-              <a:rPr lang="en-GB" dirty="0">
+              <a:rPr lang="en-GB">
                 <a:solidFill>
                   <a:srgbClr val="283141"/>
                 </a:solidFill>
@@ -10251,7 +12614,7 @@
               <a:t>Dart (2026) </a:t>
             </a:r>
             <a:r>
-              <a:rPr lang="en-GB" dirty="0">
+              <a:rPr lang="en-GB">
                 <a:solidFill>
                   <a:srgbClr val="415F91"/>
                 </a:solidFill>
@@ -10259,122 +12622,17 @@
                 <a:ea typeface="Calibri"/>
                 <a:cs typeface="Calibri"/>
               </a:rPr>
-              <a:t>Dart </a:t>
-            </a:r>
-            <a:r>
-              <a:rPr lang="en-GB">
-                <a:solidFill>
-                  <a:srgbClr val="415F91"/>
-                </a:solidFill>
-                <a:latin typeface="Aptos" panose="020B0004020202020204" pitchFamily="34" charset="0"/>
-                <a:ea typeface="Calibri"/>
-                <a:cs typeface="Calibri"/>
-              </a:rPr>
-              <a:t>documentation. </a:t>
-            </a:r>
-            <a:endParaRPr lang="en-GB" dirty="0">
-              <a:solidFill>
-                <a:srgbClr val="415F91"/>
-              </a:solidFill>
-              <a:latin typeface="Aptos" panose="020B0004020202020204" pitchFamily="34" charset="0"/>
-              <a:ea typeface="Calibri"/>
-              <a:cs typeface="Calibri"/>
-            </a:endParaRPr>
-          </a:p>
-          <a:p>
-            <a:r>
-              <a:rPr lang="en-GB" dirty="0">
-                <a:latin typeface="Aptos" panose="020B0004020202020204" pitchFamily="34" charset="0"/>
-                <a:ea typeface="Calibri"/>
-                <a:cs typeface="Calibri"/>
-              </a:rPr>
-              <a:t>    </a:t>
-            </a:r>
+              <a:t>Dart documentation. </a:t>
+            </a:r>
+          </a:p>
+          <a:p>
             <a:r>
               <a:rPr lang="en-GB">
                 <a:latin typeface="Aptos" panose="020B0004020202020204" pitchFamily="34" charset="0"/>
                 <a:ea typeface="Calibri"/>
                 <a:cs typeface="Calibri"/>
               </a:rPr>
-              <a:t>Available at: </a:t>
-            </a:r>
-            <a:r>
-              <a:rPr lang="en-GB">
-                <a:latin typeface="Aptos" panose="020B0004020202020204" pitchFamily="34" charset="0"/>
-                <a:ea typeface="Calibri"/>
-                <a:cs typeface="Calibri"/>
-                <a:hlinkClick r:id="rId3">
-                  <a:extLst>
-                    <a:ext uri="{A12FA001-AC4F-418D-AE19-62706E023703}">
-                      <ahyp:hlinkClr xmlns:ahyp="http://schemas.microsoft.com/office/drawing/2018/hyperlinkcolor" val="tx"/>
-                    </a:ext>
-                  </a:extLst>
-                </a:hlinkClick>
-              </a:rPr>
-              <a:t>https://dart.dev/</a:t>
-            </a:r>
-            <a:r>
-              <a:rPr lang="en-GB">
-                <a:latin typeface="Aptos" panose="020B0004020202020204" pitchFamily="34" charset="0"/>
-                <a:ea typeface="Calibri"/>
-                <a:cs typeface="Calibri"/>
-              </a:rPr>
-              <a:t> (Accessed: 2 October 2026).</a:t>
-            </a:r>
-            <a:endParaRPr lang="en-US">
-              <a:latin typeface="Aptos" panose="020B0004020202020204" pitchFamily="34" charset="0"/>
-              <a:ea typeface="Calibri"/>
-              <a:cs typeface="Calibri"/>
-            </a:endParaRPr>
-          </a:p>
-          <a:p>
-            <a:r>
-              <a:rPr lang="en-GB" dirty="0">
-                <a:solidFill>
-                  <a:srgbClr val="283141"/>
-                </a:solidFill>
-                <a:latin typeface="Aptos" panose="020B0004020202020204" pitchFamily="34" charset="0"/>
-                <a:ea typeface="Calibri"/>
-                <a:cs typeface="Calibri"/>
-              </a:rPr>
-              <a:t>Flutter (2026) </a:t>
-            </a:r>
-            <a:r>
-              <a:rPr lang="en-GB">
-                <a:solidFill>
-                  <a:srgbClr val="415F91"/>
-                </a:solidFill>
-                <a:latin typeface="Aptos" panose="020B0004020202020204" pitchFamily="34" charset="0"/>
-                <a:ea typeface="Calibri"/>
-                <a:cs typeface="Calibri"/>
-              </a:rPr>
-              <a:t>Basic widgets. </a:t>
-            </a:r>
-            <a:endParaRPr lang="en-GB" dirty="0">
-              <a:solidFill>
-                <a:srgbClr val="415F91"/>
-              </a:solidFill>
-              <a:latin typeface="Aptos" panose="020B0004020202020204" pitchFamily="34" charset="0"/>
-              <a:ea typeface="Calibri"/>
-              <a:cs typeface="Calibri"/>
-            </a:endParaRPr>
-          </a:p>
-          <a:p>
-            <a:r>
-              <a:rPr lang="en-GB" dirty="0">
-                <a:latin typeface="Aptos" panose="020B0004020202020204" pitchFamily="34" charset="0"/>
-                <a:ea typeface="Calibri"/>
-                <a:cs typeface="Calibri"/>
-              </a:rPr>
-              <a:t>    </a:t>
-            </a:r>
-            <a:r>
-              <a:rPr lang="en-GB">
-                <a:latin typeface="Aptos" panose="020B0004020202020204" pitchFamily="34" charset="0"/>
-                <a:ea typeface="Calibri"/>
-                <a:cs typeface="Calibri"/>
-              </a:rPr>
-              <a:t>Available at: </a:t>
+              <a:t>    Available at: </a:t>
             </a:r>
             <a:r>
               <a:rPr lang="en-GB">
@@ -10389,7 +12647,7 @@
                   </a:extLst>
                 </a:hlinkClick>
               </a:rPr>
-              <a:t>https://docs.flutter.dev/ui/widgets/basics</a:t>
+              <a:t>https://dart.dev/</a:t>
             </a:r>
             <a:r>
               <a:rPr lang="en-GB">
@@ -10397,36 +12655,9 @@
                 <a:ea typeface="Calibri"/>
                 <a:cs typeface="Calibri"/>
               </a:rPr>
-              <a:t> (Accessed: 1 October 2026).</a:t>
-            </a:r>
-          </a:p>
-          <a:p>
-            <a:r>
-              <a:rPr lang="en-GB" dirty="0">
-                <a:solidFill>
-                  <a:srgbClr val="283141"/>
-                </a:solidFill>
-                <a:latin typeface="Aptos" panose="020B0004020202020204" pitchFamily="34" charset="0"/>
-                <a:ea typeface="Calibri"/>
-                <a:cs typeface="Calibri"/>
-              </a:rPr>
-              <a:t>Flutter (2026) </a:t>
-            </a:r>
-            <a:r>
-              <a:rPr lang="en-GB">
-                <a:solidFill>
-                  <a:srgbClr val="415F91"/>
-                </a:solidFill>
-                <a:latin typeface="Aptos" panose="020B0004020202020204" pitchFamily="34" charset="0"/>
-                <a:ea typeface="Calibri"/>
-                <a:cs typeface="Calibri"/>
-              </a:rPr>
-              <a:t>Building user interfaces with Flutter. </a:t>
-            </a:r>
-            <a:endParaRPr lang="en-GB" dirty="0">
-              <a:solidFill>
-                <a:srgbClr val="415F91"/>
-              </a:solidFill>
+              <a:t> (Accessed: 2 October 2026).</a:t>
+            </a:r>
+            <a:endParaRPr lang="en-US">
               <a:latin typeface="Aptos" panose="020B0004020202020204" pitchFamily="34" charset="0"/>
               <a:ea typeface="Calibri"/>
               <a:cs typeface="Calibri"/>
@@ -10434,23 +12665,36 @@
           </a:p>
           <a:p>
             <a:r>
-              <a:rPr lang="en-GB" dirty="0">
-                <a:solidFill>
-                  <a:srgbClr val="415F91"/>
+              <a:rPr lang="en-GB">
+                <a:solidFill>
+                  <a:srgbClr val="283141"/>
                 </a:solidFill>
                 <a:latin typeface="Aptos" panose="020B0004020202020204" pitchFamily="34" charset="0"/>
                 <a:ea typeface="Calibri"/>
                 <a:cs typeface="Calibri"/>
               </a:rPr>
-              <a:t>    </a:t>
-            </a:r>
+              <a:t>Flutter (2026) </a:t>
+            </a:r>
+            <a:r>
+              <a:rPr lang="en-GB">
+                <a:solidFill>
+                  <a:srgbClr val="415F91"/>
+                </a:solidFill>
+                <a:latin typeface="Aptos" panose="020B0004020202020204" pitchFamily="34" charset="0"/>
+                <a:ea typeface="Calibri"/>
+                <a:cs typeface="Calibri"/>
+              </a:rPr>
+              <a:t>Basic widgets. </a:t>
+            </a:r>
+          </a:p>
+          <a:p>
             <a:r>
               <a:rPr lang="en-GB">
                 <a:latin typeface="Aptos" panose="020B0004020202020204" pitchFamily="34" charset="0"/>
                 <a:ea typeface="Calibri"/>
                 <a:cs typeface="Calibri"/>
               </a:rPr>
-              <a:t>Available at: </a:t>
+              <a:t>    Available at: </a:t>
             </a:r>
             <a:r>
               <a:rPr lang="en-GB">
@@ -10465,7 +12709,7 @@
                   </a:extLst>
                 </a:hlinkClick>
               </a:rPr>
-              <a:t>https://docs.flutter.dev/ui</a:t>
+              <a:t>https://docs.flutter.dev/ui/widgets/basics</a:t>
             </a:r>
             <a:r>
               <a:rPr lang="en-GB">
@@ -10478,7 +12722,7 @@
           </a:p>
           <a:p>
             <a:r>
-              <a:rPr lang="en-GB" dirty="0">
+              <a:rPr lang="en-GB">
                 <a:solidFill>
                   <a:srgbClr val="283141"/>
                 </a:solidFill>
@@ -10497,7 +12741,7 @@
                 <a:ea typeface="Calibri"/>
                 <a:cs typeface="Calibri"/>
               </a:rPr>
-              <a:t>Common architecture concepts. </a:t>
+              <a:t>Building user interfaces with Flutter. </a:t>
             </a:r>
           </a:p>
           <a:p>
@@ -10533,7 +12777,7 @@
                   </a:extLst>
                 </a:hlinkClick>
               </a:rPr>
-              <a:t>https://docs.flutter.dev/app-architecture/concepts</a:t>
+              <a:t>https://docs.flutter.dev/ui</a:t>
             </a:r>
             <a:r>
               <a:rPr lang="en-GB">
@@ -10541,12 +12785,12 @@
                 <a:ea typeface="Calibri"/>
                 <a:cs typeface="Calibri"/>
               </a:rPr>
-              <a:t> (Accessed: 2 October 2026).</a:t>
-            </a:r>
-          </a:p>
-          <a:p>
-            <a:r>
-              <a:rPr lang="en-GB" dirty="0">
+              <a:t> (Accessed: 1 October 2026).</a:t>
+            </a:r>
+          </a:p>
+          <a:p>
+            <a:r>
+              <a:rPr lang="en-GB">
                 <a:solidFill>
                   <a:srgbClr val="283141"/>
                 </a:solidFill>
@@ -10557,7 +12801,7 @@
               <a:t>Flutter (2026) </a:t>
             </a:r>
             <a:r>
-              <a:rPr lang="en-GB" dirty="0">
+              <a:rPr lang="en-GB">
                 <a:solidFill>
                   <a:srgbClr val="415F91"/>
                 </a:solidFill>
@@ -10565,8 +12809,10 @@
                 <a:ea typeface="Calibri"/>
                 <a:cs typeface="Calibri"/>
               </a:rPr>
-              <a:t>Flutter </a:t>
-            </a:r>
+              <a:t>Common architecture concepts. </a:t>
+            </a:r>
+          </a:p>
+          <a:p>
             <a:r>
               <a:rPr lang="en-GB">
                 <a:solidFill>
@@ -10576,17 +12822,15 @@
                 <a:ea typeface="Calibri"/>
                 <a:cs typeface="Calibri"/>
               </a:rPr>
-              <a:t>architectural overview. </a:t>
-            </a:r>
-          </a:p>
-          <a:p>
+              <a:t>    </a:t>
+            </a:r>
             <a:r>
               <a:rPr lang="en-GB">
                 <a:latin typeface="Aptos" panose="020B0004020202020204" pitchFamily="34" charset="0"/>
                 <a:ea typeface="Calibri"/>
                 <a:cs typeface="Calibri"/>
               </a:rPr>
-              <a:t>   Available at: </a:t>
+              <a:t>Available at: </a:t>
             </a:r>
             <a:r>
               <a:rPr lang="en-GB">
@@ -10601,7 +12845,7 @@
                   </a:extLst>
                 </a:hlinkClick>
               </a:rPr>
-              <a:t>https://docs.flutter.dev/resources/architectural-overview</a:t>
+              <a:t>https://docs.flutter.dev/app-architecture/concepts</a:t>
             </a:r>
             <a:r>
               <a:rPr lang="en-GB">
@@ -10609,12 +12853,12 @@
                 <a:ea typeface="Calibri"/>
                 <a:cs typeface="Calibri"/>
               </a:rPr>
-              <a:t> (Accessed: 30 September 2026).</a:t>
-            </a:r>
-          </a:p>
-          <a:p>
-            <a:r>
-              <a:rPr lang="en-GB" dirty="0">
+              <a:t> (Accessed: 2 October 2026).</a:t>
+            </a:r>
+          </a:p>
+          <a:p>
+            <a:r>
+              <a:rPr lang="en-GB">
                 <a:solidFill>
                   <a:srgbClr val="283141"/>
                 </a:solidFill>
@@ -10625,7 +12869,7 @@
               <a:t>Flutter (2026) </a:t>
             </a:r>
             <a:r>
-              <a:rPr lang="en-GB" dirty="0">
+              <a:rPr lang="en-GB">
                 <a:solidFill>
                   <a:srgbClr val="415F91"/>
                 </a:solidFill>
@@ -10633,47 +12877,17 @@
                 <a:ea typeface="Calibri"/>
                 <a:cs typeface="Calibri"/>
               </a:rPr>
-              <a:t>Flutter </a:t>
-            </a:r>
-            <a:r>
-              <a:rPr lang="en-GB">
-                <a:solidFill>
-                  <a:srgbClr val="415F91"/>
-                </a:solidFill>
-                <a:latin typeface="Aptos" panose="020B0004020202020204" pitchFamily="34" charset="0"/>
-                <a:ea typeface="Calibri"/>
-                <a:cs typeface="Calibri"/>
-              </a:rPr>
-              <a:t>documentation. </a:t>
-            </a:r>
-            <a:endParaRPr lang="en-GB" dirty="0">
-              <a:solidFill>
-                <a:srgbClr val="415F91"/>
-              </a:solidFill>
-              <a:latin typeface="Aptos" panose="020B0004020202020204" pitchFamily="34" charset="0"/>
-              <a:ea typeface="Calibri"/>
-              <a:cs typeface="Calibri"/>
-            </a:endParaRPr>
-          </a:p>
-          <a:p>
-            <a:r>
-              <a:rPr lang="en-GB" dirty="0">
-                <a:solidFill>
-                  <a:srgbClr val="415F91"/>
-                </a:solidFill>
-                <a:latin typeface="Aptos" panose="020B0004020202020204" pitchFamily="34" charset="0"/>
-                <a:ea typeface="Calibri"/>
-                <a:cs typeface="Calibri"/>
-              </a:rPr>
-              <a:t>    </a:t>
-            </a:r>
+              <a:t>Flutter architectural overview. </a:t>
+            </a:r>
+          </a:p>
+          <a:p>
             <a:r>
               <a:rPr lang="en-GB">
                 <a:latin typeface="Aptos" panose="020B0004020202020204" pitchFamily="34" charset="0"/>
                 <a:ea typeface="Calibri"/>
                 <a:cs typeface="Calibri"/>
               </a:rPr>
-              <a:t>Available at: </a:t>
+              <a:t>   Available at: </a:t>
             </a:r>
             <a:r>
               <a:rPr lang="en-GB">
@@ -10688,7 +12902,7 @@
                   </a:extLst>
                 </a:hlinkClick>
               </a:rPr>
-              <a:t>https://docs.flutter.dev/</a:t>
+              <a:t>https://docs.flutter.dev/resources/architectural-overview</a:t>
             </a:r>
             <a:r>
               <a:rPr lang="en-GB">
@@ -10701,7 +12915,7 @@
           </a:p>
           <a:p>
             <a:r>
-              <a:rPr lang="en-GB" dirty="0">
+              <a:rPr lang="en-GB">
                 <a:solidFill>
                   <a:srgbClr val="283141"/>
                 </a:solidFill>
@@ -10712,7 +12926,7 @@
               <a:t>Flutter (2026) </a:t>
             </a:r>
             <a:r>
-              <a:rPr lang="en-GB" dirty="0">
+              <a:rPr lang="en-GB">
                 <a:solidFill>
                   <a:srgbClr val="415F91"/>
                 </a:solidFill>
@@ -10720,31 +12934,12 @@
                 <a:ea typeface="Calibri"/>
                 <a:cs typeface="Calibri"/>
               </a:rPr>
-              <a:t>Flutter </a:t>
-            </a:r>
+              <a:t>Flutter documentation. </a:t>
+            </a:r>
+          </a:p>
+          <a:p>
             <a:r>
               <a:rPr lang="en-GB">
-                <a:solidFill>
-                  <a:srgbClr val="415F91"/>
-                </a:solidFill>
-                <a:latin typeface="Aptos" panose="020B0004020202020204" pitchFamily="34" charset="0"/>
-                <a:ea typeface="Calibri"/>
-                <a:cs typeface="Calibri"/>
-              </a:rPr>
-              <a:t>widget index. </a:t>
-            </a:r>
-            <a:endParaRPr lang="en-GB" dirty="0">
-              <a:solidFill>
-                <a:srgbClr val="415F91"/>
-              </a:solidFill>
-              <a:latin typeface="Aptos" panose="020B0004020202020204" pitchFamily="34" charset="0"/>
-              <a:ea typeface="Calibri"/>
-              <a:cs typeface="Calibri"/>
-            </a:endParaRPr>
-          </a:p>
-          <a:p>
-            <a:r>
-              <a:rPr lang="en-GB" dirty="0">
                 <a:solidFill>
                   <a:srgbClr val="415F91"/>
                 </a:solidFill>
@@ -10775,7 +12970,7 @@
                   </a:extLst>
                 </a:hlinkClick>
               </a:rPr>
-              <a:t>https://docs.flutter.dev/reference/widgets</a:t>
+              <a:t>https://docs.flutter.dev/</a:t>
             </a:r>
             <a:r>
               <a:rPr lang="en-GB">
@@ -10783,12 +12978,12 @@
                 <a:ea typeface="Calibri"/>
                 <a:cs typeface="Calibri"/>
               </a:rPr>
-              <a:t> (Accessed: 2 October 2026).</a:t>
-            </a:r>
-          </a:p>
-          <a:p>
-            <a:r>
-              <a:rPr lang="en-GB" dirty="0">
+              <a:t> (Accessed: 30 September 2026).</a:t>
+            </a:r>
+          </a:p>
+          <a:p>
+            <a:r>
+              <a:rPr lang="en-GB">
                 <a:solidFill>
                   <a:srgbClr val="283141"/>
                 </a:solidFill>
@@ -10807,17 +13002,28 @@
                 <a:ea typeface="Calibri"/>
                 <a:cs typeface="Calibri"/>
               </a:rPr>
-              <a:t>How Flutter works. </a:t>
-            </a:r>
-          </a:p>
-          <a:p>
+              <a:t>Flutter widget index. </a:t>
+            </a:r>
+          </a:p>
+          <a:p>
+            <a:r>
+              <a:rPr lang="en-GB">
+                <a:solidFill>
+                  <a:srgbClr val="415F91"/>
+                </a:solidFill>
+                <a:latin typeface="Aptos" panose="020B0004020202020204" pitchFamily="34" charset="0"/>
+                <a:ea typeface="Calibri"/>
+                <a:cs typeface="Calibri"/>
+              </a:rPr>
+              <a:t>    </a:t>
+            </a:r>
             <a:r>
               <a:rPr lang="en-GB">
                 <a:latin typeface="Aptos" panose="020B0004020202020204" pitchFamily="34" charset="0"/>
                 <a:ea typeface="Calibri"/>
                 <a:cs typeface="Calibri"/>
               </a:rPr>
-              <a:t>    Available at: </a:t>
+              <a:t>Available at: </a:t>
             </a:r>
             <a:r>
               <a:rPr lang="en-GB">
@@ -10825,6 +13031,63 @@
                 <a:ea typeface="Calibri"/>
                 <a:cs typeface="Calibri"/>
                 <a:hlinkClick r:id="rId10">
+                  <a:extLst>
+                    <a:ext uri="{A12FA001-AC4F-418D-AE19-62706E023703}">
+                      <ahyp:hlinkClr xmlns:ahyp="http://schemas.microsoft.com/office/drawing/2018/hyperlinkcolor" val="tx"/>
+                    </a:ext>
+                  </a:extLst>
+                </a:hlinkClick>
+              </a:rPr>
+              <a:t>https://docs.flutter.dev/reference/widgets</a:t>
+            </a:r>
+            <a:r>
+              <a:rPr lang="en-GB">
+                <a:latin typeface="Aptos" panose="020B0004020202020204" pitchFamily="34" charset="0"/>
+                <a:ea typeface="Calibri"/>
+                <a:cs typeface="Calibri"/>
+              </a:rPr>
+              <a:t> (Accessed: 2 October 2026).</a:t>
+            </a:r>
+          </a:p>
+          <a:p>
+            <a:r>
+              <a:rPr lang="en-GB">
+                <a:solidFill>
+                  <a:srgbClr val="283141"/>
+                </a:solidFill>
+                <a:latin typeface="Aptos" panose="020B0004020202020204" pitchFamily="34" charset="0"/>
+                <a:ea typeface="Calibri"/>
+                <a:cs typeface="Calibri"/>
+              </a:rPr>
+              <a:t>Flutter (2026) </a:t>
+            </a:r>
+            <a:r>
+              <a:rPr lang="en-GB">
+                <a:solidFill>
+                  <a:srgbClr val="415F91"/>
+                </a:solidFill>
+                <a:latin typeface="Aptos" panose="020B0004020202020204" pitchFamily="34" charset="0"/>
+                <a:ea typeface="Calibri"/>
+                <a:cs typeface="Calibri"/>
+              </a:rPr>
+              <a:t>How Flutter works. </a:t>
+            </a:r>
+          </a:p>
+          <a:p>
+            <a:r>
+              <a:rPr lang="en-GB">
+                <a:latin typeface="Aptos" panose="020B0004020202020204" pitchFamily="34" charset="0"/>
+                <a:ea typeface="Calibri"/>
+                <a:cs typeface="Calibri"/>
+              </a:rPr>
+              <a:t>    Available at: </a:t>
+            </a:r>
+            <a:r>
+              <a:rPr lang="en-GB">
+                <a:latin typeface="Aptos" panose="020B0004020202020204" pitchFamily="34" charset="0"/>
+                <a:ea typeface="Calibri"/>
+                <a:cs typeface="Calibri"/>
+                <a:hlinkClick r:id="rId11">
                   <a:extLst>
                     <a:ext uri="{A12FA001-AC4F-418D-AE19-62706E023703}">
                       <ahyp:hlinkClr xmlns:ahyp="http://schemas.microsoft.com/office/drawing/2018/hyperlinkcolor" val="tx"/>
@@ -10860,7 +13123,7 @@
           <p:nvPr/>
         </p:nvPicPr>
         <p:blipFill>
-          <a:blip r:embed="rId11">
+          <a:blip r:embed="rId12">
             <a:extLst>
               <a:ext uri="{28A0092B-C50C-407E-A947-70E740481C1C}">
                 <a14:useLocalDpi xmlns:a14="http://schemas.microsoft.com/office/drawing/2010/main" val="0"/>
@@ -10991,13 +13254,13 @@
   <p:clrMapOvr>
     <a:masterClrMapping/>
   </p:clrMapOvr>
-  <mc:AlternateContent xmlns:mc="http://schemas.openxmlformats.org/markup-compatibility/2006" xmlns:p159="http://schemas.microsoft.com/office/powerpoint/2015/09/main">
-    <mc:Choice Requires="p159">
+  <mc:AlternateContent xmlns:mc="http://schemas.openxmlformats.org/markup-compatibility/2006">
+    <mc:Choice xmlns:p159="http://schemas.microsoft.com/office/powerpoint/2015/09/main" Requires="p159">
       <p:transition xmlns:p14="http://schemas.microsoft.com/office/powerpoint/2010/main" spd="slow" p14:dur="2000">
         <p159:morph option="byObject"/>
       </p:transition>
     </mc:Choice>
-    <mc:Fallback xmlns="">
+    <mc:Fallback>
       <p:transition spd="slow">
         <p:fade/>
       </p:transition>
@@ -11072,7 +13335,7 @@
             <p:nvPr/>
           </p:nvPicPr>
           <p:blipFill>
-            <a:blip r:embed="rId2"/>
+            <a:blip r:embed="rId3"/>
             <a:srcRect l="17220" t="21619" r="18346" b="21579"/>
             <a:stretch>
               <a:fillRect/>
@@ -11409,13 +13672,13 @@
   <p:clrMapOvr>
     <a:masterClrMapping/>
   </p:clrMapOvr>
-  <mc:AlternateContent xmlns:mc="http://schemas.openxmlformats.org/markup-compatibility/2006" xmlns:p159="http://schemas.microsoft.com/office/powerpoint/2015/09/main">
-    <mc:Choice Requires="p159">
+  <mc:AlternateContent xmlns:mc="http://schemas.openxmlformats.org/markup-compatibility/2006">
+    <mc:Choice xmlns:p159="http://schemas.microsoft.com/office/powerpoint/2015/09/main" Requires="p159">
       <p:transition xmlns:p14="http://schemas.microsoft.com/office/powerpoint/2010/main" spd="slow" p14:dur="2000">
         <p159:morph option="byObject"/>
       </p:transition>
     </mc:Choice>
-    <mc:Fallback xmlns="">
+    <mc:Fallback>
       <p:transition spd="slow">
         <p:fade/>
       </p:transition>
@@ -11490,7 +13753,7 @@
             <p:nvPr/>
           </p:nvPicPr>
           <p:blipFill>
-            <a:blip r:embed="rId2"/>
+            <a:blip r:embed="rId3"/>
             <a:srcRect l="17220" t="21619" r="18346" b="21579"/>
             <a:stretch>
               <a:fillRect/>
@@ -11942,7 +14205,7 @@
                 <p:nvPr/>
               </p:nvPicPr>
               <p:blipFill>
-                <a:blip r:embed="rId3"/>
+                <a:blip r:embed="rId4"/>
                 <a:stretch>
                   <a:fillRect/>
                 </a:stretch>
@@ -12354,7 +14617,7 @@
             <p:nvPr/>
           </p:nvPicPr>
           <p:blipFill>
-            <a:blip r:embed="rId4"/>
+            <a:blip r:embed="rId5"/>
             <a:stretch>
               <a:fillRect/>
             </a:stretch>
@@ -12384,7 +14647,7 @@
             <p:nvPr/>
           </p:nvPicPr>
           <p:blipFill>
-            <a:blip r:embed="rId5"/>
+            <a:blip r:embed="rId6"/>
             <a:stretch>
               <a:fillRect/>
             </a:stretch>
@@ -12414,7 +14677,7 @@
             <p:nvPr/>
           </p:nvPicPr>
           <p:blipFill>
-            <a:blip r:embed="rId6"/>
+            <a:blip r:embed="rId7"/>
             <a:stretch>
               <a:fillRect/>
             </a:stretch>
@@ -12444,7 +14707,7 @@
             <p:nvPr/>
           </p:nvPicPr>
           <p:blipFill>
-            <a:blip r:embed="rId7"/>
+            <a:blip r:embed="rId8"/>
             <a:stretch>
               <a:fillRect/>
             </a:stretch>
@@ -12474,7 +14737,7 @@
             <p:nvPr/>
           </p:nvPicPr>
           <p:blipFill>
-            <a:blip r:embed="rId8"/>
+            <a:blip r:embed="rId9"/>
             <a:stretch>
               <a:fillRect/>
             </a:stretch>
@@ -12505,7 +14768,7 @@
           <p:nvPr/>
         </p:nvPicPr>
         <p:blipFill>
-          <a:blip r:embed="rId9"/>
+          <a:blip r:embed="rId10"/>
           <a:stretch>
             <a:fillRect/>
           </a:stretch>
@@ -12595,13 +14858,13 @@
   <p:clrMapOvr>
     <a:masterClrMapping/>
   </p:clrMapOvr>
-  <mc:AlternateContent xmlns:mc="http://schemas.openxmlformats.org/markup-compatibility/2006" xmlns:p159="http://schemas.microsoft.com/office/powerpoint/2015/09/main">
-    <mc:Choice Requires="p159">
+  <mc:AlternateContent xmlns:mc="http://schemas.openxmlformats.org/markup-compatibility/2006">
+    <mc:Choice xmlns:p159="http://schemas.microsoft.com/office/powerpoint/2015/09/main" Requires="p159">
       <p:transition xmlns:p14="http://schemas.microsoft.com/office/powerpoint/2010/main" spd="slow" p14:dur="2000">
         <p159:morph option="byObject"/>
       </p:transition>
     </mc:Choice>
-    <mc:Fallback xmlns="">
+    <mc:Fallback>
       <p:transition spd="slow">
         <p:fade/>
       </p:transition>
@@ -12676,7 +14939,7 @@
             <p:nvPr/>
           </p:nvPicPr>
           <p:blipFill>
-            <a:blip r:embed="rId2"/>
+            <a:blip r:embed="rId3"/>
             <a:stretch>
               <a:fillRect/>
             </a:stretch>
@@ -12792,7 +15055,7 @@
             <p:nvPr/>
           </p:nvPicPr>
           <p:blipFill>
-            <a:blip r:embed="rId3"/>
+            <a:blip r:embed="rId4"/>
             <a:srcRect l="17220" t="21619" r="18346" b="21579"/>
             <a:stretch>
               <a:fillRect/>
@@ -12889,7 +15152,7 @@
           <p:nvPr/>
         </p:nvPicPr>
         <p:blipFill>
-          <a:blip r:embed="rId2"/>
+          <a:blip r:embed="rId3"/>
           <a:stretch>
             <a:fillRect/>
           </a:stretch>
@@ -13179,13 +15442,13 @@
   <p:clrMapOvr>
     <a:masterClrMapping/>
   </p:clrMapOvr>
-  <mc:AlternateContent xmlns:mc="http://schemas.openxmlformats.org/markup-compatibility/2006" xmlns:p159="http://schemas.microsoft.com/office/powerpoint/2015/09/main">
-    <mc:Choice Requires="p159">
+  <mc:AlternateContent xmlns:mc="http://schemas.openxmlformats.org/markup-compatibility/2006">
+    <mc:Choice xmlns:p159="http://schemas.microsoft.com/office/powerpoint/2015/09/main" Requires="p159">
       <p:transition xmlns:p14="http://schemas.microsoft.com/office/powerpoint/2010/main" spd="slow" p14:dur="2000">
         <p159:morph option="byObject"/>
       </p:transition>
     </mc:Choice>
-    <mc:Fallback xmlns="">
+    <mc:Fallback>
       <p:transition spd="slow">
         <p:fade/>
       </p:transition>
@@ -13240,7 +15503,7 @@
           <p:nvPr/>
         </p:nvPicPr>
         <p:blipFill>
-          <a:blip r:embed="rId2"/>
+          <a:blip r:embed="rId3"/>
           <a:stretch>
             <a:fillRect/>
           </a:stretch>
@@ -13355,7 +15618,7 @@
             <p:nvPr/>
           </p:nvPicPr>
           <p:blipFill>
-            <a:blip r:embed="rId2"/>
+            <a:blip r:embed="rId3"/>
             <a:stretch>
               <a:fillRect/>
             </a:stretch>
@@ -13471,7 +15734,7 @@
             <p:nvPr/>
           </p:nvPicPr>
           <p:blipFill>
-            <a:blip r:embed="rId3"/>
+            <a:blip r:embed="rId4"/>
             <a:srcRect l="17220" t="21619" r="18346" b="21579"/>
             <a:stretch>
               <a:fillRect/>
@@ -14143,13 +16406,13 @@
   <p:clrMapOvr>
     <a:masterClrMapping/>
   </p:clrMapOvr>
-  <mc:AlternateContent xmlns:mc="http://schemas.openxmlformats.org/markup-compatibility/2006" xmlns:p159="http://schemas.microsoft.com/office/powerpoint/2015/09/main">
-    <mc:Choice Requires="p159">
+  <mc:AlternateContent xmlns:mc="http://schemas.openxmlformats.org/markup-compatibility/2006">
+    <mc:Choice xmlns:p159="http://schemas.microsoft.com/office/powerpoint/2015/09/main" Requires="p159">
       <p:transition xmlns:p14="http://schemas.microsoft.com/office/powerpoint/2010/main" spd="slow" p14:dur="2000">
         <p159:morph option="byObject"/>
       </p:transition>
     </mc:Choice>
-    <mc:Fallback xmlns="">
+    <mc:Fallback>
       <p:transition spd="slow">
         <p:fade/>
       </p:transition>
@@ -15248,13 +17511,13 @@
   <p:clrMapOvr>
     <a:masterClrMapping/>
   </p:clrMapOvr>
-  <mc:AlternateContent xmlns:mc="http://schemas.openxmlformats.org/markup-compatibility/2006" xmlns:p14="http://schemas.microsoft.com/office/powerpoint/2010/main">
-    <mc:Choice Requires="p14">
+  <mc:AlternateContent xmlns:mc="http://schemas.openxmlformats.org/markup-compatibility/2006">
+    <mc:Choice xmlns:p14="http://schemas.microsoft.com/office/powerpoint/2010/main" Requires="p14">
       <p:transition spd="med" p14:dur="700">
         <p:fade/>
       </p:transition>
     </mc:Choice>
-    <mc:Fallback xmlns="">
+    <mc:Fallback>
       <p:transition spd="med">
         <p:fade/>
       </p:transition>
@@ -15329,7 +17592,7 @@
             <p:nvPr/>
           </p:nvPicPr>
           <p:blipFill>
-            <a:blip r:embed="rId2"/>
+            <a:blip r:embed="rId3"/>
             <a:srcRect l="17220" t="21619" r="18346" b="21579"/>
             <a:stretch>
               <a:fillRect/>
@@ -17226,13 +19489,13 @@
   <p:clrMapOvr>
     <a:masterClrMapping/>
   </p:clrMapOvr>
-  <mc:AlternateContent xmlns:mc="http://schemas.openxmlformats.org/markup-compatibility/2006" xmlns:p14="http://schemas.microsoft.com/office/powerpoint/2010/main">
-    <mc:Choice Requires="p14">
+  <mc:AlternateContent xmlns:mc="http://schemas.openxmlformats.org/markup-compatibility/2006">
+    <mc:Choice xmlns:p14="http://schemas.microsoft.com/office/powerpoint/2010/main" Requires="p14">
       <p:transition spd="med" p14:dur="700">
         <p:fade/>
       </p:transition>
     </mc:Choice>
-    <mc:Fallback xmlns="">
+    <mc:Fallback>
       <p:transition spd="med">
         <p:fade/>
       </p:transition>
@@ -17307,7 +19570,7 @@
             <p:nvPr/>
           </p:nvPicPr>
           <p:blipFill>
-            <a:blip r:embed="rId2"/>
+            <a:blip r:embed="rId3"/>
             <a:srcRect l="17220" t="21619" r="18346" b="21579"/>
             <a:stretch>
               <a:fillRect/>
@@ -17775,7 +20038,7 @@
           </a:fontRef>
         </p:style>
         <p:txBody>
-          <a:bodyPr rtlCol="0" anchor="ctr"/>
+          <a:bodyPr lIns="91440" tIns="45720" rIns="91440" bIns="45720" rtlCol="0" anchor="ctr"/>
           <a:lstStyle/>
           <a:p>
             <a:pPr algn="ctr"/>
@@ -17859,7 +20122,7 @@
                 <a:solidFill>
                   <a:srgbClr val="573E5C"/>
                 </a:solidFill>
-                <a:latin typeface="Manrope" pitchFamily="2" charset="0"/>
+                <a:latin typeface="Manrope"/>
                 <a:ea typeface="Calibri"/>
                 <a:cs typeface="Calibri"/>
               </a:rPr>
@@ -17884,7 +20147,7 @@
                 <a:solidFill>
                   <a:srgbClr val="573E5C"/>
                 </a:solidFill>
-                <a:latin typeface="Manrope" pitchFamily="2" charset="0"/>
+                <a:latin typeface="Manrope"/>
                 <a:ea typeface="Calibri"/>
                 <a:cs typeface="Calibri"/>
               </a:rPr>
@@ -17928,13 +20191,13 @@
   <p:clrMapOvr>
     <a:masterClrMapping/>
   </p:clrMapOvr>
-  <mc:AlternateContent xmlns:mc="http://schemas.openxmlformats.org/markup-compatibility/2006" xmlns:p159="http://schemas.microsoft.com/office/powerpoint/2015/09/main">
-    <mc:Choice Requires="p159">
+  <mc:AlternateContent xmlns:mc="http://schemas.openxmlformats.org/markup-compatibility/2006">
+    <mc:Choice xmlns:p159="http://schemas.microsoft.com/office/powerpoint/2015/09/main" Requires="p159">
       <p:transition xmlns:p14="http://schemas.microsoft.com/office/powerpoint/2010/main" spd="slow" p14:dur="2000">
         <p159:morph option="byObject"/>
       </p:transition>
     </mc:Choice>
-    <mc:Fallback xmlns="">
+    <mc:Fallback>
       <p:transition spd="slow">
         <p:fade/>
       </p:transition>
@@ -18009,7 +20272,7 @@
             <p:nvPr/>
           </p:nvPicPr>
           <p:blipFill>
-            <a:blip r:embed="rId2"/>
+            <a:blip r:embed="rId3"/>
             <a:srcRect l="17220" t="21619" r="18346" b="21579"/>
             <a:stretch>
               <a:fillRect/>
@@ -18261,7 +20524,7 @@
           <p:nvPr/>
         </p:nvPicPr>
         <p:blipFill>
-          <a:blip r:embed="rId3">
+          <a:blip r:embed="rId4">
             <a:extLst>
               <a:ext uri="{28A0092B-C50C-407E-A947-70E740481C1C}">
                 <a14:useLocalDpi xmlns:a14="http://schemas.microsoft.com/office/drawing/2010/main" val="0"/>
@@ -18292,13 +20555,13 @@
   <p:clrMapOvr>
     <a:masterClrMapping/>
   </p:clrMapOvr>
-  <mc:AlternateContent xmlns:mc="http://schemas.openxmlformats.org/markup-compatibility/2006" xmlns:p159="http://schemas.microsoft.com/office/powerpoint/2015/09/main">
-    <mc:Choice Requires="p159">
+  <mc:AlternateContent xmlns:mc="http://schemas.openxmlformats.org/markup-compatibility/2006">
+    <mc:Choice xmlns:p159="http://schemas.microsoft.com/office/powerpoint/2015/09/main" Requires="p159">
       <p:transition xmlns:p14="http://schemas.microsoft.com/office/powerpoint/2010/main" spd="slow" p14:dur="2000">
         <p159:morph option="byObject"/>
       </p:transition>
     </mc:Choice>
-    <mc:Fallback xmlns="">
+    <mc:Fallback>
       <p:transition spd="slow">
         <p:fade/>
       </p:transition>
@@ -18373,7 +20636,7 @@
             <p:nvPr/>
           </p:nvPicPr>
           <p:blipFill>
-            <a:blip r:embed="rId2"/>
+            <a:blip r:embed="rId3"/>
             <a:srcRect l="17220" t="21619" r="18346" b="21579"/>
             <a:stretch>
               <a:fillRect/>
@@ -18545,7 +20808,7 @@
           <a:p>
             <a:pPr algn="ctr"/>
             <a:r>
-              <a:rPr lang="en-US" sz="4000" dirty="0">
+              <a:rPr lang="en-US" sz="4000">
                 <a:solidFill>
                   <a:srgbClr val="415F91"/>
                 </a:solidFill>
@@ -18555,36 +20818,6 @@
           </a:p>
         </p:txBody>
       </p:sp>
-      <p:pic>
-        <p:nvPicPr>
-          <p:cNvPr id="2" name="Picture 1">
-            <a:extLst>
-              <a:ext uri="{FF2B5EF4-FFF2-40B4-BE49-F238E27FC236}">
-                <a16:creationId xmlns:a16="http://schemas.microsoft.com/office/drawing/2014/main" id="{DC776A4D-FCB2-A1B1-37A3-55462FBBAAC0}"/>
-              </a:ext>
-            </a:extLst>
-          </p:cNvPr>
-          <p:cNvPicPr>
-            <a:picLocks noChangeAspect="1"/>
-          </p:cNvPicPr>
-          <p:nvPr/>
-        </p:nvPicPr>
-        <p:blipFill>
-          <a:blip r:embed="rId3"/>
-          <a:stretch>
-            <a:fillRect/>
-          </a:stretch>
-        </p:blipFill>
-        <p:spPr>
-          <a:xfrm>
-            <a:off x="119672" y="-2115855"/>
-            <a:ext cx="11422304" cy="2074056"/>
-          </a:xfrm>
-          <a:prstGeom prst="rect">
-            <a:avLst/>
-          </a:prstGeom>
-        </p:spPr>
-      </p:pic>
       <p:grpSp>
         <p:nvGrpSpPr>
           <p:cNvPr id="57" name="Group 56">
@@ -18654,58 +20887,58 @@
             <a:p>
               <a:pPr algn="ctr"/>
               <a:r>
-                <a:rPr lang="en-US" sz="2800" dirty="0">
+                <a:rPr lang="en-US" sz="2800">
                   <a:solidFill>
                     <a:srgbClr val="BA1A1A"/>
                   </a:solidFill>
                 </a:rPr>
                 <a:t>Flutter App</a:t>
               </a:r>
-              <a:endParaRPr lang="en-US" sz="1600" dirty="0"/>
+              <a:endParaRPr lang="en-US" sz="1600"/>
             </a:p>
             <a:p>
               <a:pPr algn="ctr"/>
-              <a:endParaRPr lang="en-US" sz="1600" dirty="0"/>
+              <a:endParaRPr lang="en-US" sz="1600"/>
             </a:p>
             <a:p>
               <a:pPr algn="ctr"/>
-              <a:endParaRPr lang="en-US" sz="1600" dirty="0"/>
+              <a:endParaRPr lang="en-US" sz="1600"/>
             </a:p>
             <a:p>
               <a:pPr algn="ctr"/>
-              <a:endParaRPr lang="en-US" sz="1600" dirty="0"/>
+              <a:endParaRPr lang="en-US" sz="1600"/>
             </a:p>
             <a:p>
               <a:pPr algn="ctr"/>
-              <a:endParaRPr lang="en-US" sz="1600" dirty="0"/>
+              <a:endParaRPr lang="en-US" sz="1600"/>
             </a:p>
             <a:p>
               <a:pPr algn="ctr"/>
-              <a:endParaRPr lang="en-US" sz="1600" dirty="0"/>
+              <a:endParaRPr lang="en-US" sz="1600"/>
             </a:p>
             <a:p>
               <a:pPr algn="ctr"/>
-              <a:endParaRPr lang="en-US" sz="1600" dirty="0"/>
+              <a:endParaRPr lang="en-US" sz="1600"/>
             </a:p>
             <a:p>
               <a:pPr algn="ctr"/>
-              <a:endParaRPr lang="en-US" sz="1600" dirty="0"/>
+              <a:endParaRPr lang="en-US" sz="1600"/>
             </a:p>
             <a:p>
               <a:pPr algn="ctr"/>
-              <a:endParaRPr lang="en-US" sz="1600" dirty="0"/>
+              <a:endParaRPr lang="en-US" sz="1600"/>
             </a:p>
             <a:p>
               <a:pPr algn="ctr"/>
-              <a:endParaRPr lang="en-US" sz="1600" dirty="0"/>
+              <a:endParaRPr lang="en-US" sz="1600"/>
             </a:p>
             <a:p>
               <a:pPr algn="ctr"/>
-              <a:endParaRPr lang="en-US" sz="1600" dirty="0"/>
+              <a:endParaRPr lang="en-US" sz="1600"/>
             </a:p>
             <a:p>
               <a:pPr algn="ctr"/>
-              <a:endParaRPr lang="en-US" sz="1600" dirty="0"/>
+              <a:endParaRPr lang="en-US" sz="1600"/>
             </a:p>
           </p:txBody>
         </p:sp>
@@ -18758,7 +20991,7 @@
             <a:p>
               <a:pPr algn="ctr"/>
               <a:r>
-                <a:rPr lang="en-US" sz="2800" dirty="0">
+                <a:rPr lang="en-US" sz="2800">
                   <a:solidFill>
                     <a:srgbClr val="705575"/>
                   </a:solidFill>
@@ -18768,7 +21001,7 @@
             </a:p>
             <a:p>
               <a:pPr algn="ctr"/>
-              <a:endParaRPr lang="en-US" sz="1600" dirty="0">
+              <a:endParaRPr lang="en-US" sz="1600">
                 <a:solidFill>
                   <a:srgbClr val="705575"/>
                 </a:solidFill>
@@ -18776,7 +21009,7 @@
             </a:p>
             <a:p>
               <a:pPr algn="ctr"/>
-              <a:endParaRPr lang="en-US" sz="1600" dirty="0">
+              <a:endParaRPr lang="en-US" sz="1600">
                 <a:solidFill>
                   <a:srgbClr val="705575"/>
                 </a:solidFill>
@@ -18784,7 +21017,7 @@
             </a:p>
             <a:p>
               <a:pPr algn="ctr"/>
-              <a:endParaRPr lang="en-US" sz="1600" dirty="0">
+              <a:endParaRPr lang="en-US" sz="1600">
                 <a:solidFill>
                   <a:srgbClr val="705575"/>
                 </a:solidFill>
@@ -18792,7 +21025,7 @@
             </a:p>
             <a:p>
               <a:pPr algn="ctr"/>
-              <a:endParaRPr lang="en-US" sz="1600" dirty="0">
+              <a:endParaRPr lang="en-US" sz="1600">
                 <a:solidFill>
                   <a:srgbClr val="705575"/>
                 </a:solidFill>
@@ -18800,7 +21033,7 @@
             </a:p>
             <a:p>
               <a:pPr algn="ctr"/>
-              <a:endParaRPr lang="en-US" sz="1600" dirty="0">
+              <a:endParaRPr lang="en-US" sz="1600">
                 <a:solidFill>
                   <a:srgbClr val="705575"/>
                 </a:solidFill>
@@ -18808,7 +21041,7 @@
             </a:p>
             <a:p>
               <a:pPr algn="ctr"/>
-              <a:endParaRPr lang="en-US" sz="1600" dirty="0">
+              <a:endParaRPr lang="en-US" sz="1600">
                 <a:solidFill>
                   <a:srgbClr val="705575"/>
                 </a:solidFill>
@@ -18816,7 +21049,7 @@
             </a:p>
             <a:p>
               <a:pPr algn="ctr"/>
-              <a:endParaRPr lang="en-US" sz="1600" dirty="0">
+              <a:endParaRPr lang="en-US" sz="1600">
                 <a:solidFill>
                   <a:srgbClr val="705575"/>
                 </a:solidFill>
@@ -18824,7 +21057,7 @@
             </a:p>
             <a:p>
               <a:pPr algn="ctr"/>
-              <a:endParaRPr lang="en-US" sz="1600" dirty="0">
+              <a:endParaRPr lang="en-US" sz="1600">
                 <a:solidFill>
                   <a:srgbClr val="705575"/>
                 </a:solidFill>
@@ -18832,7 +21065,7 @@
             </a:p>
             <a:p>
               <a:pPr algn="ctr"/>
-              <a:endParaRPr lang="en-US" sz="1600" dirty="0">
+              <a:endParaRPr lang="en-US" sz="1600">
                 <a:solidFill>
                   <a:srgbClr val="DAE2F9"/>
                 </a:solidFill>
@@ -18889,14 +21122,14 @@
             <a:p>
               <a:pPr algn="ctr"/>
               <a:r>
-                <a:rPr lang="en-US" sz="3200" dirty="0">
+                <a:rPr lang="en-US" sz="3200">
                   <a:solidFill>
                     <a:srgbClr val="415F91"/>
                   </a:solidFill>
                 </a:rPr>
                 <a:t>Rest API</a:t>
               </a:r>
-              <a:endParaRPr lang="en-US" sz="3200" dirty="0">
+              <a:endParaRPr lang="en-US" sz="3200">
                 <a:solidFill>
                   <a:srgbClr val="DAE2F9"/>
                 </a:solidFill>
@@ -18953,14 +21186,14 @@
             <a:p>
               <a:pPr algn="ctr"/>
               <a:r>
-                <a:rPr lang="en-US" sz="2800" dirty="0">
+                <a:rPr lang="en-US" sz="2800">
                   <a:solidFill>
                     <a:srgbClr val="705575"/>
                   </a:solidFill>
                 </a:rPr>
                 <a:t>Database</a:t>
               </a:r>
-              <a:endParaRPr lang="en-US" sz="1600" dirty="0">
+              <a:endParaRPr lang="en-US" sz="1600">
                 <a:solidFill>
                   <a:srgbClr val="705575"/>
                 </a:solidFill>
@@ -18968,7 +21201,7 @@
             </a:p>
             <a:p>
               <a:pPr algn="ctr"/>
-              <a:endParaRPr lang="en-US" sz="1600" dirty="0">
+              <a:endParaRPr lang="en-US" sz="1600">
                 <a:solidFill>
                   <a:srgbClr val="705575"/>
                 </a:solidFill>
@@ -18976,7 +21209,7 @@
             </a:p>
             <a:p>
               <a:pPr algn="ctr"/>
-              <a:endParaRPr lang="en-US" sz="1600" dirty="0">
+              <a:endParaRPr lang="en-US" sz="1600">
                 <a:solidFill>
                   <a:srgbClr val="705575"/>
                 </a:solidFill>
@@ -18984,7 +21217,7 @@
             </a:p>
             <a:p>
               <a:pPr algn="ctr"/>
-              <a:endParaRPr lang="en-US" sz="1600" dirty="0">
+              <a:endParaRPr lang="en-US" sz="1600">
                 <a:solidFill>
                   <a:srgbClr val="705575"/>
                 </a:solidFill>
@@ -18992,7 +21225,7 @@
             </a:p>
             <a:p>
               <a:pPr algn="ctr"/>
-              <a:endParaRPr lang="en-US" sz="1600" dirty="0">
+              <a:endParaRPr lang="en-US" sz="1600">
                 <a:solidFill>
                   <a:srgbClr val="705575"/>
                 </a:solidFill>
@@ -19000,7 +21233,7 @@
             </a:p>
             <a:p>
               <a:pPr algn="ctr"/>
-              <a:endParaRPr lang="en-US" sz="1600" dirty="0">
+              <a:endParaRPr lang="en-US" sz="1600">
                 <a:solidFill>
                   <a:srgbClr val="705575"/>
                 </a:solidFill>
@@ -19008,7 +21241,7 @@
             </a:p>
             <a:p>
               <a:pPr algn="ctr"/>
-              <a:endParaRPr lang="en-US" sz="1600" dirty="0"/>
+              <a:endParaRPr lang="en-US" sz="1600"/>
             </a:p>
           </p:txBody>
         </p:sp>
@@ -19063,7 +21296,7 @@
             <p:nvPr/>
           </p:nvPicPr>
           <p:blipFill>
-            <a:blip r:embed="rId2"/>
+            <a:blip r:embed="rId3"/>
             <a:srcRect l="17220" t="21619" r="18346" b="21579"/>
             <a:stretch>
               <a:fillRect/>
@@ -19572,7 +21805,7 @@
             <a:p>
               <a:pPr algn="ctr"/>
               <a:r>
-                <a:rPr lang="en-US" sz="1600" dirty="0">
+                <a:rPr lang="en-US" sz="1600">
                   <a:latin typeface="Aptos Light" panose="020B0004020202020204" pitchFamily="34" charset="0"/>
                 </a:rPr>
                 <a:t>&gt; Request &gt;</a:t>
@@ -19610,7 +21843,7 @@
             <a:p>
               <a:pPr algn="ctr"/>
               <a:r>
-                <a:rPr lang="en-US" sz="1600" dirty="0">
+                <a:rPr lang="en-US" sz="1600">
                   <a:latin typeface="Aptos Light" panose="020B0004020202020204" pitchFamily="34" charset="0"/>
                 </a:rPr>
                 <a:t>&gt; Request &gt;</a:t>
@@ -19648,7 +21881,7 @@
             <a:p>
               <a:pPr algn="ctr"/>
               <a:r>
-                <a:rPr lang="en-US" sz="1600" dirty="0">
+                <a:rPr lang="en-US" sz="1600">
                   <a:latin typeface="Aptos Light" panose="020B0004020202020204" pitchFamily="34" charset="0"/>
                 </a:rPr>
                 <a:t>&gt; Query &gt;</a:t>
@@ -19686,7 +21919,7 @@
             <a:p>
               <a:pPr algn="ctr"/>
               <a:r>
-                <a:rPr lang="en-US" sz="1600" dirty="0">
+                <a:rPr lang="en-US" sz="1600">
                   <a:latin typeface="Aptos Light" panose="020B0004020202020204" pitchFamily="34" charset="0"/>
                 </a:rPr>
                 <a:t>&gt; Data &gt;</a:t>
@@ -19724,7 +21957,7 @@
             <a:p>
               <a:pPr algn="ctr"/>
               <a:r>
-                <a:rPr lang="en-US" sz="1600" dirty="0">
+                <a:rPr lang="en-US" sz="1600">
                   <a:latin typeface="Aptos Light" panose="020B0004020202020204" pitchFamily="34" charset="0"/>
                 </a:rPr>
                 <a:t>&lt; Data &lt;</a:t>
@@ -19762,7 +21995,7 @@
             <a:p>
               <a:pPr algn="ctr"/>
               <a:r>
-                <a:rPr lang="en-US" sz="1600" dirty="0">
+                <a:rPr lang="en-US" sz="1600">
                   <a:latin typeface="Aptos Light" panose="020B0004020202020204" pitchFamily="34" charset="0"/>
                 </a:rPr>
                 <a:t>&lt; Data &lt;</a:t>
@@ -19801,7 +22034,7 @@
           <a:p>
             <a:pPr algn="ctr"/>
             <a:r>
-              <a:rPr lang="en-GB" sz="1800" dirty="0">
+              <a:rPr lang="en-GB" sz="1800">
                 <a:ea typeface="Calibri"/>
                 <a:cs typeface="Calibri"/>
               </a:rPr>
@@ -19811,7 +22044,7 @@
           <a:p>
             <a:pPr algn="ctr"/>
             <a:r>
-              <a:rPr lang="en-GB" sz="1800" dirty="0">
+              <a:rPr lang="en-GB" sz="1800">
                 <a:ea typeface="Calibri"/>
                 <a:cs typeface="Calibri"/>
               </a:rPr>
@@ -19821,7 +22054,7 @@
           <a:p>
             <a:pPr algn="ctr"/>
             <a:r>
-              <a:rPr lang="en-GB" sz="1800" dirty="0">
+              <a:rPr lang="en-GB" sz="1800">
                 <a:ea typeface="Calibri"/>
                 <a:cs typeface="Calibri"/>
               </a:rPr>
@@ -19831,7 +22064,7 @@
           <a:p>
             <a:pPr algn="ctr"/>
             <a:r>
-              <a:rPr lang="en-GB" sz="1800" dirty="0">
+              <a:rPr lang="en-GB" sz="1800">
                 <a:ea typeface="Calibri"/>
                 <a:cs typeface="Calibri"/>
               </a:rPr>
@@ -19841,7 +22074,7 @@
           <a:p>
             <a:pPr algn="ctr"/>
             <a:r>
-              <a:rPr lang="en-GB" sz="1800" dirty="0">
+              <a:rPr lang="en-GB" sz="1800">
                 <a:ea typeface="Calibri"/>
                 <a:cs typeface="Calibri"/>
               </a:rPr>
@@ -19851,7 +22084,7 @@
           <a:p>
             <a:pPr algn="ctr"/>
             <a:r>
-              <a:rPr lang="en-GB" sz="1800" dirty="0">
+              <a:rPr lang="en-GB" sz="1800">
                 <a:ea typeface="Calibri"/>
                 <a:cs typeface="Calibri"/>
               </a:rPr>
@@ -19921,7 +22154,7 @@
           <a:lstStyle/>
           <a:p>
             <a:pPr algn="ctr"/>
-            <a:endParaRPr lang="en-US" dirty="0"/>
+            <a:endParaRPr lang="en-US"/>
           </a:p>
         </p:txBody>
       </p:sp>
@@ -19954,7 +22187,7 @@
           <a:lstStyle/>
           <a:p>
             <a:r>
-              <a:rPr lang="en-GB" dirty="0">
+              <a:rPr lang="en-GB">
                 <a:ea typeface="Calibri"/>
                 <a:cs typeface="Calibri"/>
               </a:rPr>
@@ -19963,7 +22196,7 @@
           </a:p>
           <a:p>
             <a:r>
-              <a:rPr lang="en-GB" dirty="0">
+              <a:rPr lang="en-GB">
                 <a:ea typeface="Calibri"/>
                 <a:cs typeface="Calibri"/>
               </a:rPr>
@@ -19976,7 +22209,7 @@
               <a:buChar char="•"/>
             </a:pPr>
             <a:r>
-              <a:rPr lang="en-GB" dirty="0">
+              <a:rPr lang="en-GB">
                 <a:ea typeface="Calibri"/>
                 <a:cs typeface="Calibri"/>
               </a:rPr>
@@ -19989,7 +22222,7 @@
               <a:buChar char="•"/>
             </a:pPr>
             <a:r>
-              <a:rPr lang="en-GB" dirty="0">
+              <a:rPr lang="en-GB">
                 <a:ea typeface="Calibri"/>
                 <a:cs typeface="Calibri"/>
               </a:rPr>
@@ -20002,7 +22235,7 @@
               <a:buChar char="•"/>
             </a:pPr>
             <a:r>
-              <a:rPr lang="en-GB" dirty="0">
+              <a:rPr lang="en-GB">
                 <a:ea typeface="Calibri"/>
                 <a:cs typeface="Calibri"/>
               </a:rPr>
@@ -20015,7 +22248,7 @@
               <a:buChar char="•"/>
             </a:pPr>
             <a:r>
-              <a:rPr lang="en-GB" dirty="0">
+              <a:rPr lang="en-GB">
                 <a:ea typeface="Calibri"/>
                 <a:cs typeface="Calibri"/>
               </a:rPr>
@@ -20053,7 +22286,7 @@
           <a:lstStyle/>
           <a:p>
             <a:r>
-              <a:rPr lang="en-GB" dirty="0">
+              <a:rPr lang="en-GB">
                 <a:ea typeface="Calibri"/>
                 <a:cs typeface="Calibri"/>
               </a:rPr>
@@ -20066,7 +22299,7 @@
               <a:buChar char="•"/>
             </a:pPr>
             <a:r>
-              <a:rPr lang="en-GB" dirty="0">
+              <a:rPr lang="en-GB">
                 <a:ea typeface="Calibri"/>
                 <a:cs typeface="Calibri"/>
               </a:rPr>
@@ -20079,7 +22312,7 @@
               <a:buChar char="•"/>
             </a:pPr>
             <a:r>
-              <a:rPr lang="en-GB" dirty="0">
+              <a:rPr lang="en-GB">
                 <a:ea typeface="Calibri"/>
                 <a:cs typeface="Calibri"/>
               </a:rPr>
@@ -20092,7 +22325,7 @@
               <a:buChar char="•"/>
             </a:pPr>
             <a:r>
-              <a:rPr lang="en-GB" dirty="0">
+              <a:rPr lang="en-GB">
                 <a:ea typeface="Calibri"/>
                 <a:cs typeface="Calibri"/>
               </a:rPr>
@@ -20105,7 +22338,7 @@
               <a:buChar char="•"/>
             </a:pPr>
             <a:r>
-              <a:rPr lang="en-GB" dirty="0">
+              <a:rPr lang="en-GB">
                 <a:ea typeface="Calibri"/>
                 <a:cs typeface="Calibri"/>
               </a:rPr>
@@ -20118,7 +22351,7 @@
               <a:buChar char="•"/>
             </a:pPr>
             <a:r>
-              <a:rPr lang="en-GB" dirty="0">
+              <a:rPr lang="en-GB">
                 <a:ea typeface="Calibri"/>
                 <a:cs typeface="Calibri"/>
               </a:rPr>
